--- a/LiteBroker_security_Ховроненко_Зюков_Кэп_0Х_24.pptx
+++ b/LiteBroker_security_Ховроненко_Зюков_Кэп_0Х_24.pptx
@@ -203,7 +203,7 @@
           <a:p>
             <a:fld id="{1D8BD707-D9CF-40AE-B4C6-C98DA3205C09}" type="datetimeFigureOut">
               <a:rPr lang="en-US"/>
-              <a:t>6/17/2026</a:t>
+              <a:t>6/20/2026</a:t>
             </a:fld>
             <a:endParaRPr lang="en-US"/>
           </a:p>
@@ -389,7 +389,7 @@
           <a:p>
             <a:fld id="{1D8BD707-D9CF-40AE-B4C6-C98DA3205C09}" type="datetimeFigureOut">
               <a:rPr lang="en-US"/>
-              <a:t>6/17/2026</a:t>
+              <a:t>6/20/2026</a:t>
             </a:fld>
             <a:endParaRPr lang="en-US"/>
           </a:p>
@@ -612,7 +612,7 @@
           <a:p>
             <a:fld id="{1D8BD707-D9CF-40AE-B4C6-C98DA3205C09}" type="datetimeFigureOut">
               <a:rPr lang="en-US"/>
-              <a:t>6/17/2026</a:t>
+              <a:t>6/20/2026</a:t>
             </a:fld>
             <a:endParaRPr lang="en-US"/>
           </a:p>
@@ -769,7 +769,7 @@
           <a:p>
             <a:fld id="{1D8BD707-D9CF-40AE-B4C6-C98DA3205C09}" type="datetimeFigureOut">
               <a:rPr lang="en-US"/>
-              <a:t>6/17/2026</a:t>
+              <a:t>6/20/2026</a:t>
             </a:fld>
             <a:endParaRPr lang="en-US"/>
           </a:p>
@@ -905,7 +905,7 @@
           <a:p>
             <a:fld id="{1D8BD707-D9CF-40AE-B4C6-C98DA3205C09}" type="datetimeFigureOut">
               <a:rPr lang="en-US"/>
-              <a:t>6/17/2026</a:t>
+              <a:t>6/20/2026</a:t>
             </a:fld>
             <a:endParaRPr lang="en-US"/>
           </a:p>
@@ -1189,7 +1189,7 @@
           <a:p>
             <a:fld id="{1D8BD707-D9CF-40AE-B4C6-C98DA3205C09}" type="datetimeFigureOut">
               <a:rPr lang="en-US"/>
-              <a:t>6/17/2026</a:t>
+              <a:t>6/20/2026</a:t>
             </a:fld>
             <a:endParaRPr lang="en-US"/>
           </a:p>
@@ -2614,7 +2614,7 @@
       </p:grpSpPr>
       <p:pic>
         <p:nvPicPr>
-          <p:cNvPr id="4" name="Рисунок 3"/>
+          <p:cNvPr id="2" name="Рисунок 1"/>
           <p:cNvPicPr>
             <a:picLocks noChangeAspect="1"/>
           </p:cNvPicPr>
@@ -12251,7 +12251,7 @@
       </p:grpSpPr>
       <p:pic>
         <p:nvPicPr>
-          <p:cNvPr id="4" name="Рисунок 3"/>
+          <p:cNvPr id="2" name="Рисунок 1"/>
           <p:cNvPicPr>
             <a:picLocks noChangeAspect="1"/>
           </p:cNvPicPr>
@@ -12386,11 +12386,19 @@
               </a:spcBef>
             </a:pPr>
             <a:r>
-              <a:rPr spc="-155" dirty="0"/>
-              <a:t>Наблюдаемость:</a:t>
-            </a:r>
-            <a:r>
-              <a:rPr spc="-175" dirty="0"/>
+              <a:rPr spc="-155" dirty="0" err="1" smtClean="0"/>
+              <a:t>Наблюд</a:t>
+            </a:r>
+            <a:r>
+              <a:rPr lang="ru-RU" spc="-155" dirty="0" err="1" smtClean="0"/>
+              <a:t>ение</a:t>
+            </a:r>
+            <a:r>
+              <a:rPr spc="-155" dirty="0" smtClean="0"/>
+              <a:t>:</a:t>
+            </a:r>
+            <a:r>
+              <a:rPr spc="-175" dirty="0" smtClean="0"/>
               <a:t> </a:t>
             </a:r>
             <a:r>
@@ -14751,7 +14759,9 @@
             <a:avLst/>
           </a:prstGeom>
           <a:solidFill>
-            <a:srgbClr val="318537"/>
+            <a:schemeClr val="tx2">
+              <a:lumMod val="50000"/>
+            </a:schemeClr>
           </a:solidFill>
           <a:ln w="15240">
             <a:solidFill>
@@ -14998,7 +15008,9 @@
             <a:avLst/>
           </a:prstGeom>
           <a:solidFill>
-            <a:srgbClr val="318537"/>
+            <a:schemeClr val="tx2">
+              <a:lumMod val="50000"/>
+            </a:schemeClr>
           </a:solidFill>
           <a:ln w="15240">
             <a:solidFill>
@@ -15203,7 +15215,9 @@
             <a:avLst/>
           </a:prstGeom>
           <a:solidFill>
-            <a:srgbClr val="1F9BD1"/>
+            <a:schemeClr val="tx2">
+              <a:lumMod val="50000"/>
+            </a:schemeClr>
           </a:solidFill>
           <a:ln w="15240">
             <a:solidFill>
@@ -15245,7 +15259,7 @@
               </a:rPr>
               <a:t>invoked</a:t>
             </a:r>
-            <a:endParaRPr sz="1400">
+            <a:endParaRPr sz="1400" dirty="0">
               <a:latin typeface="Tahoma"/>
               <a:cs typeface="Tahoma"/>
             </a:endParaRPr>
@@ -15319,7 +15333,7 @@
               </a:rPr>
               <a:t>validate/encrypt/save/publish</a:t>
             </a:r>
-            <a:endParaRPr sz="1400">
+            <a:endParaRPr sz="1400" dirty="0">
               <a:latin typeface="Tahoma"/>
               <a:cs typeface="Tahoma"/>
             </a:endParaRPr>
@@ -15341,7 +15355,9 @@
             <a:avLst/>
           </a:prstGeom>
           <a:solidFill>
-            <a:srgbClr val="1F9BD1"/>
+            <a:schemeClr val="tx2">
+              <a:lumMod val="50000"/>
+            </a:schemeClr>
           </a:solidFill>
           <a:ln w="15240">
             <a:solidFill>
@@ -15373,7 +15389,7 @@
               </a:rPr>
               <a:t>Tamperproof</a:t>
             </a:r>
-            <a:endParaRPr sz="1400">
+            <a:endParaRPr sz="1400" dirty="0">
               <a:latin typeface="Tahoma"/>
               <a:cs typeface="Tahoma"/>
             </a:endParaRPr>
@@ -15487,7 +15503,7 @@
               </a:rPr>
               <a:t>only</a:t>
             </a:r>
-            <a:endParaRPr sz="1400">
+            <a:endParaRPr sz="1400" dirty="0">
               <a:latin typeface="Tahoma"/>
               <a:cs typeface="Tahoma"/>
             </a:endParaRPr>
@@ -15792,15 +15808,15 @@
             </a:r>
             <a:r>
               <a:rPr lang="ru-RU" spc="-30" dirty="0"/>
-              <a:t>, гарантируют отсутствие открытого текста в любом компоненте инфраструктуры, что полностью исключает реализацию определённого неприемлемого события </a:t>
-            </a:r>
-            <a:r>
-              <a:rPr lang="ru-RU" spc="-30" dirty="0" err="1"/>
-              <a:t>безопасности.Несмотря</a:t>
+              <a:t>, гарантируют отсутствие открытого текста в любом компоненте инфраструктуры, что полностью исключает реализацию определённого неприемлемого события безопасности</a:t>
+            </a:r>
+            <a:r>
+              <a:rPr lang="ru-RU" spc="-30" dirty="0" smtClean="0"/>
+              <a:t>. Несмотря </a:t>
             </a:r>
             <a:r>
               <a:rPr lang="ru-RU" spc="-30" dirty="0"/>
-              <a:t> на учебный характер проекта и задокументированные допущения в части управления ключами и транспортной защиты, разработанная архитектура демонстрирует высокую степень готовности к адаптации для промышленной эксплуатации. Выделение криптографического слоя через паттерн </a:t>
+              <a:t>на учебный характер проекта и задокументированные допущения в части управления ключами и транспортной защиты, разработанная архитектура демонстрирует высокую степень готовности к адаптации для промышленной эксплуатации. Выделение криптографического слоя через паттерн </a:t>
             </a:r>
             <a:r>
               <a:rPr lang="ru-RU" spc="-30" dirty="0" err="1"/>
@@ -16191,7 +16207,7 @@
               <a:t> </a:t>
             </a:r>
             <a:r>
-              <a:rPr sz="1500" spc="-35" dirty="0">
+              <a:rPr sz="1500" spc="-35" dirty="0" err="1">
                 <a:solidFill>
                   <a:srgbClr val="F5F8FA"/>
                 </a:solidFill>
@@ -16211,27 +16227,7 @@
               <a:t> </a:t>
             </a:r>
             <a:r>
-              <a:rPr sz="1500" spc="-30" dirty="0">
-                <a:solidFill>
-                  <a:srgbClr val="F5F8FA"/>
-                </a:solidFill>
-                <a:latin typeface="Trebuchet MS"/>
-                <a:cs typeface="Trebuchet MS"/>
-              </a:rPr>
-              <a:t>учебный</a:t>
-            </a:r>
-            <a:r>
-              <a:rPr sz="1500" spc="-110" dirty="0">
-                <a:solidFill>
-                  <a:srgbClr val="F5F8FA"/>
-                </a:solidFill>
-                <a:latin typeface="Trebuchet MS"/>
-                <a:cs typeface="Trebuchet MS"/>
-              </a:rPr>
-              <a:t> </a:t>
-            </a:r>
-            <a:r>
-              <a:rPr sz="1500" spc="-20" dirty="0">
+              <a:rPr sz="1500" spc="-20" dirty="0" err="1" smtClean="0">
                 <a:solidFill>
                   <a:srgbClr val="F5F8FA"/>
                 </a:solidFill>
@@ -16241,7 +16237,7 @@
               <a:t>мессенджер</a:t>
             </a:r>
             <a:r>
-              <a:rPr sz="1500" spc="-125" dirty="0">
+              <a:rPr sz="1500" spc="-125" dirty="0" smtClean="0">
                 <a:solidFill>
                   <a:srgbClr val="F5F8FA"/>
                 </a:solidFill>
@@ -16280,7 +16276,7 @@
               </a:rPr>
               <a:t>выбором собеседника.</a:t>
             </a:r>
-            <a:endParaRPr sz="1500">
+            <a:endParaRPr sz="1500" dirty="0">
               <a:latin typeface="Trebuchet MS"/>
               <a:cs typeface="Trebuchet MS"/>
             </a:endParaRPr>
@@ -16456,7 +16452,7 @@
               </a:rPr>
               <a:t>&lt;userB&gt;.</a:t>
             </a:r>
-            <a:endParaRPr sz="1500">
+            <a:endParaRPr sz="1500" dirty="0">
               <a:latin typeface="Trebuchet MS"/>
               <a:cs typeface="Trebuchet MS"/>
             </a:endParaRPr>
@@ -16627,7 +16623,7 @@
               </a:rPr>
               <a:t>litebroker.sensors.random.</a:t>
             </a:r>
-            <a:endParaRPr sz="1500">
+            <a:endParaRPr sz="1500" dirty="0">
               <a:latin typeface="Trebuchet MS"/>
               <a:cs typeface="Trebuchet MS"/>
             </a:endParaRPr>
@@ -16858,7 +16854,7 @@
               </a:rPr>
               <a:t>криптоконтейнером.</a:t>
             </a:r>
-            <a:endParaRPr sz="1500">
+            <a:endParaRPr sz="1500" dirty="0">
               <a:latin typeface="Trebuchet MS"/>
               <a:cs typeface="Trebuchet MS"/>
             </a:endParaRPr>
@@ -17052,7 +17048,7 @@
               </a:rPr>
               <a:t>аудита.</a:t>
             </a:r>
-            <a:endParaRPr sz="1500">
+            <a:endParaRPr sz="1500" dirty="0">
               <a:latin typeface="Trebuchet MS"/>
               <a:cs typeface="Trebuchet MS"/>
             </a:endParaRPr>
@@ -19702,7 +19698,9 @@
             <a:avLst/>
           </a:prstGeom>
           <a:solidFill>
-            <a:srgbClr val="1F9BD1"/>
+            <a:schemeClr val="tx2">
+              <a:lumMod val="50000"/>
+            </a:schemeClr>
           </a:solidFill>
           <a:ln w="15239">
             <a:solidFill>
@@ -19767,7 +19765,7 @@
             <a:avLst/>
           </a:prstGeom>
           <a:solidFill>
-            <a:srgbClr val="151D27"/>
+            <a:schemeClr val="accent2"/>
           </a:solidFill>
           <a:ln w="15240">
             <a:solidFill>
@@ -20012,7 +20010,7 @@
             <a:avLst/>
           </a:prstGeom>
           <a:solidFill>
-            <a:srgbClr val="6E49A1"/>
+            <a:schemeClr val="accent2"/>
           </a:solidFill>
           <a:ln w="15240">
             <a:solidFill>
@@ -21496,14 +21494,16 @@
         </p:nvSpPr>
         <p:spPr>
           <a:xfrm>
-            <a:off x="731519" y="1664207"/>
+            <a:off x="581659" y="1668960"/>
             <a:ext cx="3383279" cy="411480"/>
           </a:xfrm>
           <a:prstGeom prst="rect">
             <a:avLst/>
           </a:prstGeom>
           <a:solidFill>
-            <a:srgbClr val="1F9BD1"/>
+            <a:schemeClr val="tx2">
+              <a:lumMod val="50000"/>
+            </a:schemeClr>
           </a:solidFill>
           <a:ln w="15240">
             <a:solidFill>
@@ -21525,7 +21525,7 @@
                 <a:spcPts val="270"/>
               </a:spcBef>
             </a:pPr>
-            <a:endParaRPr sz="700">
+            <a:endParaRPr sz="700" dirty="0" smtClean="0">
               <a:latin typeface="Times New Roman"/>
               <a:cs typeface="Times New Roman"/>
             </a:endParaRPr>
@@ -21537,7 +21537,7 @@
               </a:lnSpc>
             </a:pPr>
             <a:r>
-              <a:rPr sz="700" b="1" spc="-50" dirty="0">
+              <a:rPr sz="700" b="1" spc="-50" dirty="0" err="1" smtClean="0">
                 <a:solidFill>
                   <a:srgbClr val="F5F8FA"/>
                 </a:solidFill>
@@ -21547,17 +21547,17 @@
               <a:t>Цели</a:t>
             </a:r>
             <a:r>
-              <a:rPr sz="700" b="1" spc="-45" dirty="0">
-                <a:solidFill>
-                  <a:srgbClr val="F5F8FA"/>
-                </a:solidFill>
-                <a:latin typeface="Tahoma"/>
-                <a:cs typeface="Tahoma"/>
-              </a:rPr>
-              <a:t> </a:t>
-            </a:r>
-            <a:r>
-              <a:rPr sz="700" b="1" spc="-10" dirty="0">
+              <a:rPr sz="700" b="1" spc="-45" dirty="0" smtClean="0">
+                <a:solidFill>
+                  <a:srgbClr val="F5F8FA"/>
+                </a:solidFill>
+                <a:latin typeface="Tahoma"/>
+                <a:cs typeface="Tahoma"/>
+              </a:rPr>
+              <a:t> </a:t>
+            </a:r>
+            <a:r>
+              <a:rPr sz="700" b="1" spc="-10" dirty="0" err="1" smtClean="0">
                 <a:solidFill>
                   <a:srgbClr val="F5F8FA"/>
                 </a:solidFill>
@@ -21566,7 +21566,7 @@
               </a:rPr>
               <a:t>безопасности</a:t>
             </a:r>
-            <a:endParaRPr sz="700">
+            <a:endParaRPr sz="700" dirty="0">
               <a:latin typeface="Tahoma"/>
               <a:cs typeface="Tahoma"/>
             </a:endParaRPr>
@@ -21627,8 +21627,8 @@
         </p:nvSpPr>
         <p:spPr>
           <a:xfrm>
-            <a:off x="855980" y="3220593"/>
-            <a:ext cx="3850004" cy="1306195"/>
+            <a:off x="581659" y="2120732"/>
+            <a:ext cx="4676141" cy="3080972"/>
           </a:xfrm>
           <a:prstGeom prst="rect">
             <a:avLst/>
@@ -21649,596 +21649,114 @@
               </a:spcBef>
             </a:pPr>
             <a:r>
-              <a:rPr sz="1400" spc="-25" dirty="0">
-                <a:solidFill>
-                  <a:srgbClr val="F5F8FA"/>
-                </a:solidFill>
-                <a:latin typeface="Trebuchet MS"/>
-                <a:cs typeface="Trebuchet MS"/>
-              </a:rPr>
-              <a:t>не</a:t>
-            </a:r>
-            <a:r>
-              <a:rPr sz="1400" spc="-90" dirty="0">
-                <a:solidFill>
-                  <a:srgbClr val="F5F8FA"/>
-                </a:solidFill>
-                <a:latin typeface="Trebuchet MS"/>
-                <a:cs typeface="Trebuchet MS"/>
-              </a:rPr>
-              <a:t> </a:t>
-            </a:r>
-            <a:r>
-              <a:rPr sz="1400" spc="-20" dirty="0">
-                <a:solidFill>
-                  <a:srgbClr val="F5F8FA"/>
-                </a:solidFill>
-                <a:latin typeface="Trebuchet MS"/>
-                <a:cs typeface="Trebuchet MS"/>
-              </a:rPr>
-              <a:t>передавать</a:t>
-            </a:r>
-            <a:r>
-              <a:rPr sz="1400" spc="-95" dirty="0">
-                <a:solidFill>
-                  <a:srgbClr val="F5F8FA"/>
-                </a:solidFill>
-                <a:latin typeface="Trebuchet MS"/>
-                <a:cs typeface="Trebuchet MS"/>
-              </a:rPr>
-              <a:t> </a:t>
-            </a:r>
-            <a:r>
-              <a:rPr sz="1400" dirty="0">
-                <a:solidFill>
-                  <a:srgbClr val="F5F8FA"/>
-                </a:solidFill>
-                <a:latin typeface="Trebuchet MS"/>
-                <a:cs typeface="Trebuchet MS"/>
-              </a:rPr>
-              <a:t>сообщение</a:t>
-            </a:r>
-            <a:r>
-              <a:rPr sz="1400" spc="-114" dirty="0">
-                <a:solidFill>
-                  <a:srgbClr val="F5F8FA"/>
-                </a:solidFill>
-                <a:latin typeface="Trebuchet MS"/>
-                <a:cs typeface="Trebuchet MS"/>
-              </a:rPr>
-              <a:t> </a:t>
-            </a:r>
-            <a:r>
-              <a:rPr sz="1400" spc="-30" dirty="0">
-                <a:solidFill>
-                  <a:srgbClr val="F5F8FA"/>
-                </a:solidFill>
-                <a:latin typeface="Trebuchet MS"/>
-                <a:cs typeface="Trebuchet MS"/>
-              </a:rPr>
-              <a:t>как</a:t>
-            </a:r>
-            <a:r>
-              <a:rPr sz="1400" spc="-65" dirty="0">
-                <a:solidFill>
-                  <a:srgbClr val="F5F8FA"/>
-                </a:solidFill>
-                <a:latin typeface="Trebuchet MS"/>
-                <a:cs typeface="Trebuchet MS"/>
-              </a:rPr>
-              <a:t> </a:t>
-            </a:r>
-            <a:r>
-              <a:rPr sz="1400" spc="-35" dirty="0">
-                <a:solidFill>
-                  <a:srgbClr val="F5F8FA"/>
-                </a:solidFill>
-                <a:latin typeface="Trebuchet MS"/>
-                <a:cs typeface="Trebuchet MS"/>
-              </a:rPr>
-              <a:t>открытый</a:t>
-            </a:r>
-            <a:r>
-              <a:rPr sz="1400" spc="-95" dirty="0">
-                <a:solidFill>
-                  <a:srgbClr val="F5F8FA"/>
-                </a:solidFill>
-                <a:latin typeface="Trebuchet MS"/>
-                <a:cs typeface="Trebuchet MS"/>
-              </a:rPr>
-              <a:t> </a:t>
-            </a:r>
-            <a:r>
-              <a:rPr sz="1400" spc="-30" dirty="0">
-                <a:solidFill>
-                  <a:srgbClr val="F5F8FA"/>
-                </a:solidFill>
-                <a:latin typeface="Trebuchet MS"/>
-                <a:cs typeface="Trebuchet MS"/>
-              </a:rPr>
-              <a:t>текст; </a:t>
-            </a:r>
-            <a:r>
-              <a:rPr sz="1400" spc="-25" dirty="0">
-                <a:solidFill>
-                  <a:srgbClr val="F5F8FA"/>
-                </a:solidFill>
-                <a:latin typeface="Trebuchet MS"/>
-                <a:cs typeface="Trebuchet MS"/>
-              </a:rPr>
-              <a:t>сохранять</a:t>
-            </a:r>
-            <a:r>
-              <a:rPr sz="1400" spc="-114" dirty="0">
-                <a:solidFill>
-                  <a:srgbClr val="F5F8FA"/>
-                </a:solidFill>
-                <a:latin typeface="Trebuchet MS"/>
-                <a:cs typeface="Trebuchet MS"/>
-              </a:rPr>
-              <a:t> </a:t>
-            </a:r>
-            <a:r>
-              <a:rPr sz="1400" spc="-20" dirty="0">
-                <a:solidFill>
-                  <a:srgbClr val="F5F8FA"/>
-                </a:solidFill>
-                <a:latin typeface="Trebuchet MS"/>
-                <a:cs typeface="Trebuchet MS"/>
-              </a:rPr>
-              <a:t>целостность</a:t>
-            </a:r>
-            <a:r>
-              <a:rPr sz="1400" spc="-105" dirty="0">
-                <a:solidFill>
-                  <a:srgbClr val="F5F8FA"/>
-                </a:solidFill>
-                <a:latin typeface="Trebuchet MS"/>
-                <a:cs typeface="Trebuchet MS"/>
-              </a:rPr>
-              <a:t> </a:t>
-            </a:r>
-            <a:r>
-              <a:rPr sz="1400" dirty="0">
-                <a:solidFill>
-                  <a:srgbClr val="F5F8FA"/>
-                </a:solidFill>
-                <a:latin typeface="Trebuchet MS"/>
-                <a:cs typeface="Trebuchet MS"/>
-              </a:rPr>
-              <a:t>через</a:t>
-            </a:r>
-            <a:r>
-              <a:rPr sz="1400" spc="-120" dirty="0">
-                <a:solidFill>
-                  <a:srgbClr val="F5F8FA"/>
-                </a:solidFill>
-                <a:latin typeface="Trebuchet MS"/>
-                <a:cs typeface="Trebuchet MS"/>
-              </a:rPr>
-              <a:t> </a:t>
-            </a:r>
-            <a:r>
-              <a:rPr sz="1400" spc="85" dirty="0">
-                <a:solidFill>
-                  <a:srgbClr val="F5F8FA"/>
-                </a:solidFill>
-                <a:latin typeface="Trebuchet MS"/>
-                <a:cs typeface="Trebuchet MS"/>
-              </a:rPr>
-              <a:t>GCM</a:t>
-            </a:r>
-            <a:r>
-              <a:rPr sz="1400" spc="-105" dirty="0">
-                <a:solidFill>
-                  <a:srgbClr val="F5F8FA"/>
-                </a:solidFill>
-                <a:latin typeface="Trebuchet MS"/>
-                <a:cs typeface="Trebuchet MS"/>
-              </a:rPr>
-              <a:t> </a:t>
-            </a:r>
-            <a:r>
-              <a:rPr sz="1400" spc="-10" dirty="0">
-                <a:solidFill>
-                  <a:srgbClr val="F5F8FA"/>
-                </a:solidFill>
-                <a:latin typeface="Trebuchet MS"/>
-                <a:cs typeface="Trebuchet MS"/>
-              </a:rPr>
-              <a:t>authTag; </a:t>
-            </a:r>
-            <a:r>
-              <a:rPr sz="1400" spc="-25" dirty="0">
-                <a:solidFill>
-                  <a:srgbClr val="F5F8FA"/>
-                </a:solidFill>
-                <a:latin typeface="Trebuchet MS"/>
-                <a:cs typeface="Trebuchet MS"/>
-              </a:rPr>
-              <a:t>разделить</a:t>
-            </a:r>
-            <a:r>
-              <a:rPr sz="1400" spc="-114" dirty="0">
-                <a:solidFill>
-                  <a:srgbClr val="F5F8FA"/>
-                </a:solidFill>
-                <a:latin typeface="Trebuchet MS"/>
-                <a:cs typeface="Trebuchet MS"/>
-              </a:rPr>
-              <a:t> </a:t>
-            </a:r>
-            <a:r>
-              <a:rPr sz="1400" spc="-20" dirty="0">
-                <a:solidFill>
-                  <a:srgbClr val="F5F8FA"/>
-                </a:solidFill>
-                <a:latin typeface="Trebuchet MS"/>
-                <a:cs typeface="Trebuchet MS"/>
-              </a:rPr>
-              <a:t>чат</a:t>
-            </a:r>
-            <a:r>
-              <a:rPr sz="1400" spc="-110" dirty="0">
-                <a:solidFill>
-                  <a:srgbClr val="F5F8FA"/>
-                </a:solidFill>
-                <a:latin typeface="Trebuchet MS"/>
-                <a:cs typeface="Trebuchet MS"/>
-              </a:rPr>
-              <a:t> </a:t>
-            </a:r>
-            <a:r>
-              <a:rPr sz="1400" dirty="0">
-                <a:solidFill>
-                  <a:srgbClr val="F5F8FA"/>
-                </a:solidFill>
-                <a:latin typeface="Trebuchet MS"/>
-                <a:cs typeface="Trebuchet MS"/>
-              </a:rPr>
-              <a:t>и</a:t>
-            </a:r>
-            <a:r>
-              <a:rPr sz="1400" spc="-114" dirty="0">
-                <a:solidFill>
-                  <a:srgbClr val="F5F8FA"/>
-                </a:solidFill>
-                <a:latin typeface="Trebuchet MS"/>
-                <a:cs typeface="Trebuchet MS"/>
-              </a:rPr>
-              <a:t> </a:t>
-            </a:r>
-            <a:r>
-              <a:rPr sz="1400" spc="-20" dirty="0">
-                <a:solidFill>
-                  <a:srgbClr val="F5F8FA"/>
-                </a:solidFill>
-                <a:latin typeface="Trebuchet MS"/>
-                <a:cs typeface="Trebuchet MS"/>
-              </a:rPr>
-              <a:t>датчики</a:t>
-            </a:r>
-            <a:r>
-              <a:rPr sz="1400" spc="-110" dirty="0">
-                <a:solidFill>
-                  <a:srgbClr val="F5F8FA"/>
-                </a:solidFill>
-                <a:latin typeface="Trebuchet MS"/>
-                <a:cs typeface="Trebuchet MS"/>
-              </a:rPr>
-              <a:t> </a:t>
-            </a:r>
-            <a:r>
-              <a:rPr sz="1400" dirty="0">
-                <a:solidFill>
-                  <a:srgbClr val="F5F8FA"/>
-                </a:solidFill>
-                <a:latin typeface="Trebuchet MS"/>
-                <a:cs typeface="Trebuchet MS"/>
-              </a:rPr>
-              <a:t>по</a:t>
-            </a:r>
-            <a:r>
-              <a:rPr sz="1400" spc="-105" dirty="0">
-                <a:solidFill>
-                  <a:srgbClr val="F5F8FA"/>
-                </a:solidFill>
-                <a:latin typeface="Trebuchet MS"/>
-                <a:cs typeface="Trebuchet MS"/>
-              </a:rPr>
-              <a:t> </a:t>
-            </a:r>
-            <a:r>
-              <a:rPr sz="1400" spc="-10" dirty="0">
-                <a:solidFill>
-                  <a:srgbClr val="F5F8FA"/>
-                </a:solidFill>
-                <a:latin typeface="Trebuchet MS"/>
-                <a:cs typeface="Trebuchet MS"/>
-              </a:rPr>
-              <a:t>разным</a:t>
-            </a:r>
-            <a:r>
-              <a:rPr sz="1400" spc="-110" dirty="0">
-                <a:solidFill>
-                  <a:srgbClr val="F5F8FA"/>
-                </a:solidFill>
-                <a:latin typeface="Trebuchet MS"/>
-                <a:cs typeface="Trebuchet MS"/>
-              </a:rPr>
-              <a:t> </a:t>
-            </a:r>
-            <a:r>
-              <a:rPr sz="1400" spc="-10" dirty="0">
-                <a:solidFill>
-                  <a:srgbClr val="F5F8FA"/>
-                </a:solidFill>
-                <a:latin typeface="Trebuchet MS"/>
-                <a:cs typeface="Trebuchet MS"/>
-              </a:rPr>
-              <a:t>topics;</a:t>
-            </a:r>
-            <a:endParaRPr sz="1400" dirty="0">
-              <a:latin typeface="Trebuchet MS"/>
-              <a:cs typeface="Trebuchet MS"/>
-            </a:endParaRPr>
-          </a:p>
-          <a:p>
-            <a:pPr marL="12700">
+              <a:rPr lang="ru-RU" sz="1400" spc="-25" dirty="0" smtClean="0">
+                <a:solidFill>
+                  <a:srgbClr val="F5F8FA"/>
+                </a:solidFill>
+                <a:latin typeface="Trebuchet MS"/>
+                <a:cs typeface="Trebuchet MS"/>
+              </a:rPr>
+              <a:t>• Конфиденциальность: исключение возможности чтения содержимого сообщений в открытом виде на любом этапе жизненного цикла.</a:t>
+            </a:r>
+          </a:p>
+          <a:p>
+            <a:pPr marL="12700" marR="92710">
               <a:lnSpc>
                 <a:spcPct val="100000"/>
               </a:lnSpc>
+              <a:spcBef>
+                <a:spcPts val="105"/>
+              </a:spcBef>
             </a:pPr>
             <a:r>
-              <a:rPr sz="1400" spc="-25" dirty="0">
-                <a:solidFill>
-                  <a:srgbClr val="F5F8FA"/>
-                </a:solidFill>
-                <a:latin typeface="Trebuchet MS"/>
-                <a:cs typeface="Trebuchet MS"/>
-              </a:rPr>
-              <a:t>не</a:t>
-            </a:r>
-            <a:r>
-              <a:rPr sz="1400" spc="-125" dirty="0">
-                <a:solidFill>
-                  <a:srgbClr val="F5F8FA"/>
-                </a:solidFill>
-                <a:latin typeface="Trebuchet MS"/>
-                <a:cs typeface="Trebuchet MS"/>
-              </a:rPr>
-              <a:t> </a:t>
-            </a:r>
-            <a:r>
-              <a:rPr sz="1400" spc="-35" dirty="0">
-                <a:solidFill>
-                  <a:srgbClr val="F5F8FA"/>
-                </a:solidFill>
-                <a:latin typeface="Trebuchet MS"/>
-                <a:cs typeface="Trebuchet MS"/>
-              </a:rPr>
-              <a:t>дать</a:t>
-            </a:r>
-            <a:r>
-              <a:rPr sz="1400" spc="-125" dirty="0">
-                <a:solidFill>
-                  <a:srgbClr val="F5F8FA"/>
-                </a:solidFill>
-                <a:latin typeface="Trebuchet MS"/>
-                <a:cs typeface="Trebuchet MS"/>
-              </a:rPr>
-              <a:t> </a:t>
-            </a:r>
-            <a:r>
-              <a:rPr sz="1400" spc="-45" dirty="0">
-                <a:solidFill>
-                  <a:srgbClr val="F5F8FA"/>
-                </a:solidFill>
-                <a:latin typeface="Trebuchet MS"/>
-                <a:cs typeface="Trebuchet MS"/>
-              </a:rPr>
-              <a:t>frontend</a:t>
-            </a:r>
-            <a:r>
-              <a:rPr sz="1400" spc="-110" dirty="0">
-                <a:solidFill>
-                  <a:srgbClr val="F5F8FA"/>
-                </a:solidFill>
-                <a:latin typeface="Trebuchet MS"/>
-                <a:cs typeface="Trebuchet MS"/>
-              </a:rPr>
-              <a:t> </a:t>
-            </a:r>
-            <a:r>
-              <a:rPr sz="1400" spc="-10" dirty="0">
-                <a:solidFill>
-                  <a:srgbClr val="F5F8FA"/>
-                </a:solidFill>
-                <a:latin typeface="Trebuchet MS"/>
-                <a:cs typeface="Trebuchet MS"/>
-              </a:rPr>
-              <a:t>обойти</a:t>
-            </a:r>
-            <a:r>
-              <a:rPr sz="1400" spc="-145" dirty="0">
-                <a:solidFill>
-                  <a:srgbClr val="F5F8FA"/>
-                </a:solidFill>
-                <a:latin typeface="Trebuchet MS"/>
-                <a:cs typeface="Trebuchet MS"/>
-              </a:rPr>
-              <a:t> </a:t>
-            </a:r>
-            <a:r>
-              <a:rPr sz="1400" dirty="0">
-                <a:solidFill>
-                  <a:srgbClr val="F5F8FA"/>
-                </a:solidFill>
-                <a:latin typeface="Trebuchet MS"/>
-                <a:cs typeface="Trebuchet MS"/>
-              </a:rPr>
-              <a:t>API</a:t>
-            </a:r>
-            <a:r>
-              <a:rPr sz="1400" spc="-120" dirty="0">
-                <a:solidFill>
-                  <a:srgbClr val="F5F8FA"/>
-                </a:solidFill>
-                <a:latin typeface="Trebuchet MS"/>
-                <a:cs typeface="Trebuchet MS"/>
-              </a:rPr>
-              <a:t> </a:t>
-            </a:r>
-            <a:r>
-              <a:rPr sz="1400" dirty="0">
-                <a:solidFill>
-                  <a:srgbClr val="F5F8FA"/>
-                </a:solidFill>
-                <a:latin typeface="Trebuchet MS"/>
-                <a:cs typeface="Trebuchet MS"/>
-              </a:rPr>
-              <a:t>и</a:t>
-            </a:r>
-            <a:r>
-              <a:rPr sz="1400" spc="-120" dirty="0">
-                <a:solidFill>
-                  <a:srgbClr val="F5F8FA"/>
-                </a:solidFill>
-                <a:latin typeface="Trebuchet MS"/>
-                <a:cs typeface="Trebuchet MS"/>
-              </a:rPr>
-              <a:t> </a:t>
-            </a:r>
-            <a:r>
-              <a:rPr sz="1400" spc="-10" dirty="0">
-                <a:solidFill>
-                  <a:srgbClr val="F5F8FA"/>
-                </a:solidFill>
-                <a:latin typeface="Trebuchet MS"/>
-                <a:cs typeface="Trebuchet MS"/>
-              </a:rPr>
-              <a:t>политику;</a:t>
-            </a:r>
-            <a:endParaRPr sz="1400" dirty="0">
-              <a:latin typeface="Trebuchet MS"/>
-              <a:cs typeface="Trebuchet MS"/>
-            </a:endParaRPr>
-          </a:p>
-          <a:p>
-            <a:pPr marL="12700" marR="5080">
+              <a:rPr lang="ru-RU" sz="1400" spc="-25" dirty="0" smtClean="0">
+                <a:solidFill>
+                  <a:srgbClr val="F5F8FA"/>
+                </a:solidFill>
+                <a:latin typeface="Trebuchet MS"/>
+                <a:cs typeface="Trebuchet MS"/>
+              </a:rPr>
+              <a:t>• Целостность: гарантия неизменности и подлинности данных при транспортировке и хранении.</a:t>
+            </a:r>
+          </a:p>
+          <a:p>
+            <a:pPr marL="12700" marR="92710">
               <a:lnSpc>
                 <a:spcPct val="100000"/>
               </a:lnSpc>
+              <a:spcBef>
+                <a:spcPts val="105"/>
+              </a:spcBef>
             </a:pPr>
             <a:r>
-              <a:rPr sz="1400" spc="-35" dirty="0">
-                <a:solidFill>
-                  <a:srgbClr val="F5F8FA"/>
-                </a:solidFill>
-                <a:latin typeface="Trebuchet MS"/>
-                <a:cs typeface="Trebuchet MS"/>
-              </a:rPr>
-              <a:t>дать</a:t>
-            </a:r>
-            <a:r>
-              <a:rPr sz="1400" spc="-105" dirty="0">
-                <a:solidFill>
-                  <a:srgbClr val="F5F8FA"/>
-                </a:solidFill>
-                <a:latin typeface="Trebuchet MS"/>
-                <a:cs typeface="Trebuchet MS"/>
-              </a:rPr>
-              <a:t> </a:t>
-            </a:r>
-            <a:r>
-              <a:rPr sz="1400" spc="-10" dirty="0">
-                <a:solidFill>
-                  <a:srgbClr val="F5F8FA"/>
-                </a:solidFill>
-                <a:latin typeface="Trebuchet MS"/>
-                <a:cs typeface="Trebuchet MS"/>
-              </a:rPr>
-              <a:t>наблюдаемость</a:t>
-            </a:r>
-            <a:r>
-              <a:rPr sz="1400" spc="-100" dirty="0">
-                <a:solidFill>
-                  <a:srgbClr val="F5F8FA"/>
-                </a:solidFill>
-                <a:latin typeface="Trebuchet MS"/>
-                <a:cs typeface="Trebuchet MS"/>
-              </a:rPr>
-              <a:t> </a:t>
-            </a:r>
-            <a:r>
-              <a:rPr sz="1400" dirty="0">
-                <a:solidFill>
-                  <a:srgbClr val="F5F8FA"/>
-                </a:solidFill>
-                <a:latin typeface="Trebuchet MS"/>
-                <a:cs typeface="Trebuchet MS"/>
-              </a:rPr>
-              <a:t>без</a:t>
-            </a:r>
-            <a:r>
-              <a:rPr sz="1400" spc="-105" dirty="0">
-                <a:solidFill>
-                  <a:srgbClr val="F5F8FA"/>
-                </a:solidFill>
-                <a:latin typeface="Trebuchet MS"/>
-                <a:cs typeface="Trebuchet MS"/>
-              </a:rPr>
-              <a:t> </a:t>
-            </a:r>
-            <a:r>
-              <a:rPr sz="1400" spc="-20" dirty="0">
-                <a:solidFill>
-                  <a:srgbClr val="F5F8FA"/>
-                </a:solidFill>
-                <a:latin typeface="Trebuchet MS"/>
-                <a:cs typeface="Trebuchet MS"/>
-              </a:rPr>
-              <a:t>доступа</a:t>
-            </a:r>
-            <a:r>
-              <a:rPr sz="1400" spc="-95" dirty="0">
-                <a:solidFill>
-                  <a:srgbClr val="F5F8FA"/>
-                </a:solidFill>
-                <a:latin typeface="Trebuchet MS"/>
-                <a:cs typeface="Trebuchet MS"/>
-              </a:rPr>
-              <a:t> </a:t>
-            </a:r>
-            <a:r>
-              <a:rPr sz="1400" spc="-50" dirty="0">
-                <a:solidFill>
-                  <a:srgbClr val="F5F8FA"/>
-                </a:solidFill>
-                <a:latin typeface="Trebuchet MS"/>
-                <a:cs typeface="Trebuchet MS"/>
-              </a:rPr>
-              <a:t>к</a:t>
-            </a:r>
-            <a:r>
-              <a:rPr sz="1400" spc="-90" dirty="0">
-                <a:solidFill>
-                  <a:srgbClr val="F5F8FA"/>
-                </a:solidFill>
-                <a:latin typeface="Trebuchet MS"/>
-                <a:cs typeface="Trebuchet MS"/>
-              </a:rPr>
-              <a:t> </a:t>
-            </a:r>
-            <a:r>
-              <a:rPr sz="1400" spc="-10" dirty="0">
-                <a:solidFill>
-                  <a:srgbClr val="F5F8FA"/>
-                </a:solidFill>
-                <a:latin typeface="Trebuchet MS"/>
-                <a:cs typeface="Trebuchet MS"/>
-              </a:rPr>
-              <a:t>управлению сообщениями.</a:t>
+              <a:rPr lang="ru-RU" sz="1400" spc="-25" dirty="0" smtClean="0">
+                <a:solidFill>
+                  <a:srgbClr val="F5F8FA"/>
+                </a:solidFill>
+                <a:latin typeface="Trebuchet MS"/>
+                <a:cs typeface="Trebuchet MS"/>
+              </a:rPr>
+              <a:t>• Изоляция доменов: разграничение пользовательских и служебных информационных потоков для предотвращения взаимного влияния.</a:t>
+            </a:r>
+          </a:p>
+          <a:p>
+            <a:pPr marL="12700" marR="92710">
+              <a:lnSpc>
+                <a:spcPct val="100000"/>
+              </a:lnSpc>
+              <a:spcBef>
+                <a:spcPts val="105"/>
+              </a:spcBef>
+            </a:pPr>
+            <a:r>
+              <a:rPr lang="ru-RU" sz="1400" spc="-25" dirty="0" smtClean="0">
+                <a:solidFill>
+                  <a:srgbClr val="F5F8FA"/>
+                </a:solidFill>
+                <a:latin typeface="Trebuchet MS"/>
+                <a:cs typeface="Trebuchet MS"/>
+              </a:rPr>
+              <a:t>• Необходимость прохождения контроля: исключение возможности обхода архитектурных политик безопасности и точек </a:t>
+            </a:r>
+            <a:r>
+              <a:rPr lang="ru-RU" sz="1400" spc="-25" dirty="0" err="1" smtClean="0">
+                <a:solidFill>
+                  <a:srgbClr val="F5F8FA"/>
+                </a:solidFill>
+                <a:latin typeface="Trebuchet MS"/>
+                <a:cs typeface="Trebuchet MS"/>
+              </a:rPr>
+              <a:t>валидации</a:t>
+            </a:r>
+            <a:r>
+              <a:rPr lang="ru-RU" sz="1400" spc="-25" dirty="0" smtClean="0">
+                <a:solidFill>
+                  <a:srgbClr val="F5F8FA"/>
+                </a:solidFill>
+                <a:latin typeface="Trebuchet MS"/>
+                <a:cs typeface="Trebuchet MS"/>
+              </a:rPr>
+              <a:t>.</a:t>
+            </a:r>
+          </a:p>
+          <a:p>
+            <a:pPr marL="12700" marR="92710">
+              <a:lnSpc>
+                <a:spcPct val="100000"/>
+              </a:lnSpc>
+              <a:spcBef>
+                <a:spcPts val="105"/>
+              </a:spcBef>
+            </a:pPr>
+            <a:r>
+              <a:rPr lang="ru-RU" sz="1400" spc="-25" dirty="0" smtClean="0">
+                <a:solidFill>
+                  <a:srgbClr val="F5F8FA"/>
+                </a:solidFill>
+                <a:latin typeface="Trebuchet MS"/>
+                <a:cs typeface="Trebuchet MS"/>
+              </a:rPr>
+              <a:t>• Аудиторская наблюдаемость: обеспечение мониторинга состояния системы без предоставления прав на модификацию данных.</a:t>
             </a:r>
             <a:endParaRPr sz="1400" dirty="0">
               <a:latin typeface="Trebuchet MS"/>
@@ -22255,14 +21773,16 @@
         </p:nvSpPr>
         <p:spPr>
           <a:xfrm>
-            <a:off x="6126479" y="1664207"/>
+            <a:off x="5562600" y="1664207"/>
             <a:ext cx="4023360" cy="411480"/>
           </a:xfrm>
           <a:prstGeom prst="rect">
             <a:avLst/>
           </a:prstGeom>
           <a:solidFill>
-            <a:srgbClr val="318537"/>
+            <a:schemeClr val="tx2">
+              <a:lumMod val="50000"/>
+            </a:schemeClr>
           </a:solidFill>
           <a:ln w="15240">
             <a:solidFill>
@@ -22284,7 +21804,7 @@
                 <a:spcPts val="270"/>
               </a:spcBef>
             </a:pPr>
-            <a:endParaRPr sz="700">
+            <a:endParaRPr sz="700" dirty="0">
               <a:latin typeface="Times New Roman"/>
               <a:cs typeface="Times New Roman"/>
             </a:endParaRPr>
@@ -22325,7 +21845,7 @@
               </a:rPr>
               <a:t>безопасности</a:t>
             </a:r>
-            <a:endParaRPr sz="700">
+            <a:endParaRPr sz="700" dirty="0">
               <a:latin typeface="Tahoma"/>
               <a:cs typeface="Tahoma"/>
             </a:endParaRPr>
@@ -22340,8 +21860,8 @@
         </p:nvSpPr>
         <p:spPr>
           <a:xfrm>
-            <a:off x="6251828" y="3113354"/>
-            <a:ext cx="4271010" cy="1520190"/>
+            <a:off x="5562600" y="2120732"/>
+            <a:ext cx="5577840" cy="4171014"/>
           </a:xfrm>
           <a:prstGeom prst="rect">
             <a:avLst/>
@@ -22362,630 +21882,559 @@
               </a:spcBef>
             </a:pPr>
             <a:r>
-              <a:rPr sz="1400" spc="-25" dirty="0">
-                <a:solidFill>
-                  <a:srgbClr val="F5F8FA"/>
-                </a:solidFill>
-                <a:latin typeface="Trebuchet MS"/>
-                <a:cs typeface="Trebuchet MS"/>
-              </a:rPr>
-              <a:t>проект</a:t>
-            </a:r>
-            <a:r>
-              <a:rPr sz="1400" spc="-150" dirty="0">
-                <a:solidFill>
-                  <a:srgbClr val="F5F8FA"/>
-                </a:solidFill>
-                <a:latin typeface="Trebuchet MS"/>
-                <a:cs typeface="Trebuchet MS"/>
-              </a:rPr>
-              <a:t> </a:t>
-            </a:r>
-            <a:r>
-              <a:rPr sz="1400" spc="-15" dirty="0">
-                <a:solidFill>
-                  <a:srgbClr val="F5F8FA"/>
-                </a:solidFill>
-                <a:latin typeface="Trebuchet MS"/>
-                <a:cs typeface="Trebuchet MS"/>
-              </a:rPr>
-              <a:t>учебный</a:t>
-            </a:r>
-            <a:r>
-              <a:rPr sz="1400" spc="-155" dirty="0">
-                <a:solidFill>
-                  <a:srgbClr val="F5F8FA"/>
-                </a:solidFill>
-                <a:latin typeface="Trebuchet MS"/>
-                <a:cs typeface="Trebuchet MS"/>
-              </a:rPr>
-              <a:t> </a:t>
-            </a:r>
-            <a:r>
-              <a:rPr sz="1400" dirty="0">
-                <a:solidFill>
-                  <a:srgbClr val="F5F8FA"/>
-                </a:solidFill>
-                <a:latin typeface="Trebuchet MS"/>
-                <a:cs typeface="Trebuchet MS"/>
-              </a:rPr>
-              <a:t>и</a:t>
-            </a:r>
-            <a:r>
-              <a:rPr sz="1400" spc="-130" dirty="0">
-                <a:solidFill>
-                  <a:srgbClr val="F5F8FA"/>
-                </a:solidFill>
-                <a:latin typeface="Trebuchet MS"/>
-                <a:cs typeface="Trebuchet MS"/>
-              </a:rPr>
-              <a:t> </a:t>
-            </a:r>
-            <a:r>
-              <a:rPr sz="1400" spc="-10" dirty="0">
-                <a:solidFill>
-                  <a:srgbClr val="F5F8FA"/>
-                </a:solidFill>
-                <a:latin typeface="Trebuchet MS"/>
-                <a:cs typeface="Trebuchet MS"/>
-              </a:rPr>
-              <a:t>запускается</a:t>
-            </a:r>
-            <a:r>
-              <a:rPr sz="1400" spc="-110" dirty="0">
-                <a:solidFill>
-                  <a:srgbClr val="F5F8FA"/>
-                </a:solidFill>
-                <a:latin typeface="Trebuchet MS"/>
-                <a:cs typeface="Trebuchet MS"/>
-              </a:rPr>
-              <a:t> </a:t>
-            </a:r>
-            <a:r>
-              <a:rPr sz="1400" spc="-10" dirty="0">
-                <a:solidFill>
-                  <a:srgbClr val="F5F8FA"/>
-                </a:solidFill>
-                <a:latin typeface="Trebuchet MS"/>
-                <a:cs typeface="Trebuchet MS"/>
-              </a:rPr>
-              <a:t>локально;</a:t>
-            </a:r>
-            <a:endParaRPr sz="1400">
-              <a:latin typeface="Trebuchet MS"/>
-              <a:cs typeface="Trebuchet MS"/>
-            </a:endParaRPr>
+              <a:rPr lang="ru-RU" sz="1400" dirty="0" smtClean="0">
+                <a:solidFill>
+                  <a:schemeClr val="bg1"/>
+                </a:solidFill>
+                <a:latin typeface="Trebuchet MS"/>
+                <a:cs typeface="Trebuchet MS"/>
+              </a:rPr>
+              <a:t>• Локальное развёртывание: проект запускается в изолированной среде </a:t>
+            </a:r>
+            <a:r>
+              <a:rPr lang="ru-RU" sz="1400" dirty="0" err="1" smtClean="0">
+                <a:solidFill>
+                  <a:schemeClr val="bg1"/>
+                </a:solidFill>
+                <a:latin typeface="Trebuchet MS"/>
+                <a:cs typeface="Trebuchet MS"/>
+              </a:rPr>
+              <a:t>Docker</a:t>
+            </a:r>
+            <a:r>
+              <a:rPr lang="ru-RU" sz="1400" dirty="0" smtClean="0">
+                <a:solidFill>
+                  <a:schemeClr val="bg1"/>
+                </a:solidFill>
+                <a:latin typeface="Trebuchet MS"/>
+                <a:cs typeface="Trebuchet MS"/>
+              </a:rPr>
+              <a:t> </a:t>
+            </a:r>
+            <a:r>
+              <a:rPr lang="ru-RU" sz="1400" dirty="0" err="1" smtClean="0">
+                <a:solidFill>
+                  <a:schemeClr val="bg1"/>
+                </a:solidFill>
+                <a:latin typeface="Trebuchet MS"/>
+                <a:cs typeface="Trebuchet MS"/>
+              </a:rPr>
+              <a:t>Compose</a:t>
+            </a:r>
+            <a:r>
+              <a:rPr lang="ru-RU" sz="1400" dirty="0" smtClean="0">
+                <a:solidFill>
+                  <a:schemeClr val="bg1"/>
+                </a:solidFill>
+                <a:latin typeface="Trebuchet MS"/>
+                <a:cs typeface="Trebuchet MS"/>
+              </a:rPr>
+              <a:t> на одной рабочей станции; все компоненты доступны исключительно через </a:t>
+            </a:r>
+            <a:r>
+              <a:rPr lang="ru-RU" sz="1400" dirty="0" err="1" smtClean="0">
+                <a:solidFill>
+                  <a:schemeClr val="bg1"/>
+                </a:solidFill>
+                <a:latin typeface="Trebuchet MS"/>
+                <a:cs typeface="Trebuchet MS"/>
+              </a:rPr>
+              <a:t>localhost</a:t>
+            </a:r>
+            <a:r>
+              <a:rPr lang="ru-RU" sz="1400" dirty="0" smtClean="0">
+                <a:solidFill>
+                  <a:schemeClr val="bg1"/>
+                </a:solidFill>
+                <a:latin typeface="Trebuchet MS"/>
+                <a:cs typeface="Trebuchet MS"/>
+              </a:rPr>
+              <a:t>.</a:t>
+            </a:r>
           </a:p>
           <a:p>
             <a:pPr marL="12700">
               <a:lnSpc>
                 <a:spcPct val="100000"/>
               </a:lnSpc>
+              <a:spcBef>
+                <a:spcPts val="105"/>
+              </a:spcBef>
             </a:pPr>
             <a:r>
-              <a:rPr sz="1400" spc="-30" dirty="0">
-                <a:solidFill>
-                  <a:srgbClr val="F5F8FA"/>
-                </a:solidFill>
-                <a:latin typeface="Trebuchet MS"/>
-                <a:cs typeface="Trebuchet MS"/>
-              </a:rPr>
-              <a:t>секрет</a:t>
-            </a:r>
-            <a:r>
-              <a:rPr sz="1400" spc="-125" dirty="0">
-                <a:solidFill>
-                  <a:srgbClr val="F5F8FA"/>
-                </a:solidFill>
-                <a:latin typeface="Trebuchet MS"/>
-                <a:cs typeface="Trebuchet MS"/>
-              </a:rPr>
-              <a:t> </a:t>
-            </a:r>
-            <a:r>
-              <a:rPr sz="1400" spc="-10" dirty="0">
-                <a:solidFill>
-                  <a:srgbClr val="F5F8FA"/>
-                </a:solidFill>
-                <a:latin typeface="Trebuchet MS"/>
-                <a:cs typeface="Trebuchet MS"/>
-              </a:rPr>
-              <a:t>шифрования</a:t>
-            </a:r>
-            <a:r>
-              <a:rPr sz="1400" spc="-130" dirty="0">
-                <a:solidFill>
-                  <a:srgbClr val="F5F8FA"/>
-                </a:solidFill>
-                <a:latin typeface="Trebuchet MS"/>
-                <a:cs typeface="Trebuchet MS"/>
-              </a:rPr>
-              <a:t> </a:t>
-            </a:r>
-            <a:r>
-              <a:rPr sz="1400" spc="-10" dirty="0">
-                <a:solidFill>
-                  <a:srgbClr val="F5F8FA"/>
-                </a:solidFill>
-                <a:latin typeface="Trebuchet MS"/>
-                <a:cs typeface="Trebuchet MS"/>
-              </a:rPr>
-              <a:t>задается</a:t>
-            </a:r>
-            <a:r>
-              <a:rPr sz="1400" spc="-95" dirty="0">
-                <a:solidFill>
-                  <a:srgbClr val="F5F8FA"/>
-                </a:solidFill>
-                <a:latin typeface="Trebuchet MS"/>
-                <a:cs typeface="Trebuchet MS"/>
-              </a:rPr>
-              <a:t> </a:t>
-            </a:r>
-            <a:r>
-              <a:rPr sz="1400" dirty="0">
-                <a:solidFill>
-                  <a:srgbClr val="F5F8FA"/>
-                </a:solidFill>
-                <a:latin typeface="Trebuchet MS"/>
-                <a:cs typeface="Trebuchet MS"/>
-              </a:rPr>
-              <a:t>через</a:t>
-            </a:r>
-            <a:r>
-              <a:rPr sz="1400" spc="-135" dirty="0">
-                <a:solidFill>
-                  <a:srgbClr val="F5F8FA"/>
-                </a:solidFill>
-                <a:latin typeface="Trebuchet MS"/>
-                <a:cs typeface="Trebuchet MS"/>
-              </a:rPr>
-              <a:t> </a:t>
-            </a:r>
-            <a:r>
-              <a:rPr sz="1400" spc="-20" dirty="0">
-                <a:solidFill>
-                  <a:srgbClr val="F5F8FA"/>
-                </a:solidFill>
-                <a:latin typeface="Trebuchet MS"/>
-                <a:cs typeface="Trebuchet MS"/>
-              </a:rPr>
-              <a:t>env;</a:t>
-            </a:r>
-            <a:endParaRPr sz="1400">
-              <a:latin typeface="Trebuchet MS"/>
-              <a:cs typeface="Trebuchet MS"/>
-            </a:endParaRPr>
-          </a:p>
-          <a:p>
-            <a:pPr marL="12700" marR="15875">
-              <a:lnSpc>
-                <a:spcPct val="100000"/>
-              </a:lnSpc>
-            </a:pPr>
-            <a:r>
-              <a:rPr sz="1400" spc="-40" dirty="0">
-                <a:solidFill>
-                  <a:srgbClr val="F5F8FA"/>
-                </a:solidFill>
-                <a:latin typeface="Trebuchet MS"/>
-                <a:cs typeface="Trebuchet MS"/>
-              </a:rPr>
-              <a:t>Kafka</a:t>
-            </a:r>
-            <a:r>
-              <a:rPr sz="1400" spc="-80" dirty="0">
-                <a:solidFill>
-                  <a:srgbClr val="F5F8FA"/>
-                </a:solidFill>
-                <a:latin typeface="Trebuchet MS"/>
-                <a:cs typeface="Trebuchet MS"/>
-              </a:rPr>
-              <a:t> </a:t>
-            </a:r>
-            <a:r>
-              <a:rPr sz="1400" spc="-20" dirty="0">
-                <a:solidFill>
-                  <a:srgbClr val="F5F8FA"/>
-                </a:solidFill>
-                <a:latin typeface="Trebuchet MS"/>
-                <a:cs typeface="Trebuchet MS"/>
-              </a:rPr>
-              <a:t>в</a:t>
-            </a:r>
-            <a:r>
-              <a:rPr sz="1400" spc="-90" dirty="0">
-                <a:solidFill>
-                  <a:srgbClr val="F5F8FA"/>
-                </a:solidFill>
-                <a:latin typeface="Trebuchet MS"/>
-                <a:cs typeface="Trebuchet MS"/>
-              </a:rPr>
-              <a:t> </a:t>
-            </a:r>
-            <a:r>
-              <a:rPr sz="1400" spc="-20" dirty="0">
-                <a:solidFill>
-                  <a:srgbClr val="F5F8FA"/>
-                </a:solidFill>
-                <a:latin typeface="Trebuchet MS"/>
-                <a:cs typeface="Trebuchet MS"/>
-              </a:rPr>
-              <a:t>демо</a:t>
-            </a:r>
-            <a:r>
-              <a:rPr sz="1400" spc="-125" dirty="0">
-                <a:solidFill>
-                  <a:srgbClr val="F5F8FA"/>
-                </a:solidFill>
-                <a:latin typeface="Trebuchet MS"/>
-                <a:cs typeface="Trebuchet MS"/>
-              </a:rPr>
-              <a:t> </a:t>
-            </a:r>
-            <a:r>
-              <a:rPr sz="1400" dirty="0">
-                <a:solidFill>
-                  <a:srgbClr val="F5F8FA"/>
-                </a:solidFill>
-                <a:latin typeface="Trebuchet MS"/>
-                <a:cs typeface="Trebuchet MS"/>
-              </a:rPr>
-              <a:t>без</a:t>
-            </a:r>
-            <a:r>
-              <a:rPr sz="1400" spc="-100" dirty="0">
-                <a:solidFill>
-                  <a:srgbClr val="F5F8FA"/>
-                </a:solidFill>
-                <a:latin typeface="Trebuchet MS"/>
-                <a:cs typeface="Trebuchet MS"/>
-              </a:rPr>
-              <a:t> </a:t>
-            </a:r>
-            <a:r>
-              <a:rPr sz="1400" spc="-35" dirty="0">
-                <a:solidFill>
-                  <a:srgbClr val="F5F8FA"/>
-                </a:solidFill>
-                <a:latin typeface="Trebuchet MS"/>
-                <a:cs typeface="Trebuchet MS"/>
-              </a:rPr>
-              <a:t>TLS/SASL,</a:t>
-            </a:r>
-            <a:r>
-              <a:rPr sz="1400" spc="-130" dirty="0">
-                <a:solidFill>
-                  <a:srgbClr val="F5F8FA"/>
-                </a:solidFill>
-                <a:latin typeface="Trebuchet MS"/>
-                <a:cs typeface="Trebuchet MS"/>
-              </a:rPr>
-              <a:t> </a:t>
-            </a:r>
-            <a:r>
-              <a:rPr sz="1400" dirty="0">
-                <a:solidFill>
-                  <a:srgbClr val="F5F8FA"/>
-                </a:solidFill>
-                <a:latin typeface="Trebuchet MS"/>
-                <a:cs typeface="Trebuchet MS"/>
-              </a:rPr>
-              <a:t>но</a:t>
-            </a:r>
-            <a:r>
-              <a:rPr sz="1400" spc="-110" dirty="0">
-                <a:solidFill>
-                  <a:srgbClr val="F5F8FA"/>
-                </a:solidFill>
-                <a:latin typeface="Trebuchet MS"/>
-                <a:cs typeface="Trebuchet MS"/>
-              </a:rPr>
-              <a:t> </a:t>
-            </a:r>
-            <a:r>
-              <a:rPr sz="1400" spc="-40" dirty="0">
-                <a:solidFill>
-                  <a:srgbClr val="F5F8FA"/>
-                </a:solidFill>
-                <a:latin typeface="Trebuchet MS"/>
-                <a:cs typeface="Trebuchet MS"/>
-              </a:rPr>
-              <a:t>архитектура</a:t>
-            </a:r>
-            <a:r>
-              <a:rPr sz="1400" spc="-105" dirty="0">
-                <a:solidFill>
-                  <a:srgbClr val="F5F8FA"/>
-                </a:solidFill>
-                <a:latin typeface="Trebuchet MS"/>
-                <a:cs typeface="Trebuchet MS"/>
-              </a:rPr>
-              <a:t> </a:t>
-            </a:r>
-            <a:r>
-              <a:rPr sz="1400" spc="-10" dirty="0">
-                <a:solidFill>
-                  <a:srgbClr val="F5F8FA"/>
-                </a:solidFill>
-                <a:latin typeface="Trebuchet MS"/>
-                <a:cs typeface="Trebuchet MS"/>
-              </a:rPr>
-              <a:t>допускает усиление;</a:t>
-            </a:r>
-            <a:endParaRPr sz="1400">
-              <a:latin typeface="Trebuchet MS"/>
-              <a:cs typeface="Trebuchet MS"/>
-            </a:endParaRPr>
-          </a:p>
-          <a:p>
-            <a:pPr marL="12700" marR="5080">
-              <a:lnSpc>
-                <a:spcPct val="100000"/>
-              </a:lnSpc>
-            </a:pPr>
-            <a:r>
-              <a:rPr sz="1400" spc="-20" dirty="0">
-                <a:solidFill>
-                  <a:srgbClr val="F5F8FA"/>
-                </a:solidFill>
-                <a:latin typeface="Trebuchet MS"/>
-                <a:cs typeface="Trebuchet MS"/>
-              </a:rPr>
-              <a:t>локальная</a:t>
-            </a:r>
-            <a:r>
-              <a:rPr sz="1400" spc="-105" dirty="0">
-                <a:solidFill>
-                  <a:srgbClr val="F5F8FA"/>
-                </a:solidFill>
-                <a:latin typeface="Trebuchet MS"/>
-                <a:cs typeface="Trebuchet MS"/>
-              </a:rPr>
-              <a:t> </a:t>
-            </a:r>
-            <a:r>
-              <a:rPr sz="1400" dirty="0">
-                <a:solidFill>
-                  <a:srgbClr val="F5F8FA"/>
-                </a:solidFill>
-                <a:latin typeface="Trebuchet MS"/>
-                <a:cs typeface="Trebuchet MS"/>
-              </a:rPr>
-              <a:t>БД</a:t>
-            </a:r>
-            <a:r>
-              <a:rPr sz="1400" spc="-95" dirty="0">
-                <a:solidFill>
-                  <a:srgbClr val="F5F8FA"/>
-                </a:solidFill>
-                <a:latin typeface="Trebuchet MS"/>
-                <a:cs typeface="Trebuchet MS"/>
-              </a:rPr>
-              <a:t> </a:t>
-            </a:r>
-            <a:r>
-              <a:rPr sz="1400" spc="265" dirty="0">
-                <a:solidFill>
-                  <a:srgbClr val="F5F8FA"/>
-                </a:solidFill>
-                <a:latin typeface="Trebuchet MS"/>
-                <a:cs typeface="Trebuchet MS"/>
-              </a:rPr>
-              <a:t>—</a:t>
-            </a:r>
-            <a:r>
-              <a:rPr sz="1400" spc="-110" dirty="0">
-                <a:solidFill>
-                  <a:srgbClr val="F5F8FA"/>
-                </a:solidFill>
-                <a:latin typeface="Trebuchet MS"/>
-                <a:cs typeface="Trebuchet MS"/>
-              </a:rPr>
-              <a:t> </a:t>
-            </a:r>
-            <a:r>
-              <a:rPr sz="1400" spc="-10" dirty="0">
-                <a:solidFill>
-                  <a:srgbClr val="F5F8FA"/>
-                </a:solidFill>
-                <a:latin typeface="Trebuchet MS"/>
-                <a:cs typeface="Trebuchet MS"/>
-              </a:rPr>
-              <a:t>локальное</a:t>
-            </a:r>
-            <a:r>
-              <a:rPr sz="1400" spc="-95" dirty="0">
-                <a:solidFill>
-                  <a:srgbClr val="F5F8FA"/>
-                </a:solidFill>
-                <a:latin typeface="Trebuchet MS"/>
-                <a:cs typeface="Trebuchet MS"/>
-              </a:rPr>
-              <a:t> </a:t>
-            </a:r>
-            <a:r>
-              <a:rPr sz="1400" spc="-10" dirty="0">
-                <a:solidFill>
-                  <a:srgbClr val="F5F8FA"/>
-                </a:solidFill>
-                <a:latin typeface="Trebuchet MS"/>
-                <a:cs typeface="Trebuchet MS"/>
-              </a:rPr>
-              <a:t>хранилище</a:t>
-            </a:r>
-            <a:r>
-              <a:rPr sz="1400" spc="-120" dirty="0">
-                <a:solidFill>
-                  <a:srgbClr val="F5F8FA"/>
-                </a:solidFill>
-                <a:latin typeface="Trebuchet MS"/>
-                <a:cs typeface="Trebuchet MS"/>
-              </a:rPr>
-              <a:t> </a:t>
-            </a:r>
-            <a:r>
-              <a:rPr sz="1400" spc="-20" dirty="0">
-                <a:solidFill>
-                  <a:srgbClr val="F5F8FA"/>
-                </a:solidFill>
-                <a:latin typeface="Trebuchet MS"/>
-                <a:cs typeface="Trebuchet MS"/>
-              </a:rPr>
-              <a:t>приложения; </a:t>
-            </a:r>
-            <a:r>
-              <a:rPr sz="1400" dirty="0">
-                <a:solidFill>
-                  <a:srgbClr val="F5F8FA"/>
-                </a:solidFill>
-                <a:latin typeface="Trebuchet MS"/>
-                <a:cs typeface="Trebuchet MS"/>
-              </a:rPr>
-              <a:t>внешние</a:t>
-            </a:r>
-            <a:r>
-              <a:rPr sz="1400" spc="-130" dirty="0">
-                <a:solidFill>
-                  <a:srgbClr val="F5F8FA"/>
-                </a:solidFill>
-                <a:latin typeface="Trebuchet MS"/>
-                <a:cs typeface="Trebuchet MS"/>
-              </a:rPr>
-              <a:t> </a:t>
-            </a:r>
-            <a:r>
-              <a:rPr sz="1400" spc="-20" dirty="0">
-                <a:solidFill>
-                  <a:srgbClr val="F5F8FA"/>
-                </a:solidFill>
-                <a:latin typeface="Trebuchet MS"/>
-                <a:cs typeface="Trebuchet MS"/>
-              </a:rPr>
-              <a:t>реальные</a:t>
-            </a:r>
-            <a:r>
-              <a:rPr sz="1400" spc="-114" dirty="0">
-                <a:solidFill>
-                  <a:srgbClr val="F5F8FA"/>
-                </a:solidFill>
-                <a:latin typeface="Trebuchet MS"/>
-                <a:cs typeface="Trebuchet MS"/>
-              </a:rPr>
-              <a:t> </a:t>
-            </a:r>
-            <a:r>
-              <a:rPr sz="1400" spc="-35" dirty="0">
-                <a:solidFill>
-                  <a:srgbClr val="F5F8FA"/>
-                </a:solidFill>
-                <a:latin typeface="Trebuchet MS"/>
-                <a:cs typeface="Trebuchet MS"/>
-              </a:rPr>
-              <a:t>аккаунты</a:t>
-            </a:r>
-            <a:r>
-              <a:rPr sz="1400" spc="-90" dirty="0">
-                <a:solidFill>
-                  <a:srgbClr val="F5F8FA"/>
-                </a:solidFill>
-                <a:latin typeface="Trebuchet MS"/>
-                <a:cs typeface="Trebuchet MS"/>
-              </a:rPr>
-              <a:t> </a:t>
-            </a:r>
-            <a:r>
-              <a:rPr sz="1400" dirty="0">
-                <a:solidFill>
-                  <a:srgbClr val="F5F8FA"/>
-                </a:solidFill>
-                <a:latin typeface="Trebuchet MS"/>
-                <a:cs typeface="Trebuchet MS"/>
-              </a:rPr>
-              <a:t>и</a:t>
-            </a:r>
-            <a:r>
-              <a:rPr sz="1400" spc="-110" dirty="0">
-                <a:solidFill>
-                  <a:srgbClr val="F5F8FA"/>
-                </a:solidFill>
-                <a:latin typeface="Trebuchet MS"/>
-                <a:cs typeface="Trebuchet MS"/>
-              </a:rPr>
-              <a:t> </a:t>
-            </a:r>
-            <a:r>
-              <a:rPr sz="1400" spc="-65" dirty="0">
-                <a:solidFill>
-                  <a:srgbClr val="F5F8FA"/>
-                </a:solidFill>
-                <a:latin typeface="Trebuchet MS"/>
-                <a:cs typeface="Trebuchet MS"/>
-              </a:rPr>
-              <a:t>Telegram</a:t>
-            </a:r>
-            <a:r>
-              <a:rPr sz="1400" spc="-140" dirty="0">
-                <a:solidFill>
-                  <a:srgbClr val="F5F8FA"/>
-                </a:solidFill>
-                <a:latin typeface="Trebuchet MS"/>
-                <a:cs typeface="Trebuchet MS"/>
-              </a:rPr>
-              <a:t> </a:t>
-            </a:r>
-            <a:r>
-              <a:rPr sz="1400" dirty="0">
-                <a:solidFill>
-                  <a:srgbClr val="F5F8FA"/>
-                </a:solidFill>
-                <a:latin typeface="Trebuchet MS"/>
-                <a:cs typeface="Trebuchet MS"/>
-              </a:rPr>
-              <a:t>API</a:t>
-            </a:r>
-            <a:r>
-              <a:rPr sz="1400" spc="-114" dirty="0">
-                <a:solidFill>
-                  <a:srgbClr val="F5F8FA"/>
-                </a:solidFill>
-                <a:latin typeface="Trebuchet MS"/>
-                <a:cs typeface="Trebuchet MS"/>
-              </a:rPr>
-              <a:t> </a:t>
-            </a:r>
-            <a:r>
-              <a:rPr sz="1400" spc="-25" dirty="0">
-                <a:solidFill>
-                  <a:srgbClr val="F5F8FA"/>
-                </a:solidFill>
-                <a:latin typeface="Trebuchet MS"/>
-                <a:cs typeface="Trebuchet MS"/>
-              </a:rPr>
-              <a:t>не</a:t>
-            </a:r>
-            <a:endParaRPr sz="1400">
-              <a:latin typeface="Trebuchet MS"/>
-              <a:cs typeface="Trebuchet MS"/>
-            </a:endParaRPr>
+              <a:rPr lang="ru-RU" sz="1400" dirty="0" smtClean="0">
+                <a:solidFill>
+                  <a:schemeClr val="bg1"/>
+                </a:solidFill>
+                <a:latin typeface="Trebuchet MS"/>
+                <a:cs typeface="Trebuchet MS"/>
+              </a:rPr>
+              <a:t>• Управление секретами: мастер-ключ шифрования задаётся через переменную окружения LIGHT_CRYPTO_SECRET; в </a:t>
+            </a:r>
+            <a:r>
+              <a:rPr lang="ru-RU" sz="1400" dirty="0" err="1" smtClean="0">
+                <a:solidFill>
+                  <a:schemeClr val="bg1"/>
+                </a:solidFill>
+                <a:latin typeface="Trebuchet MS"/>
+                <a:cs typeface="Trebuchet MS"/>
+              </a:rPr>
+              <a:t>продакшене</a:t>
+            </a:r>
+            <a:r>
+              <a:rPr lang="ru-RU" sz="1400" dirty="0" smtClean="0">
+                <a:solidFill>
+                  <a:schemeClr val="bg1"/>
+                </a:solidFill>
+                <a:latin typeface="Trebuchet MS"/>
+                <a:cs typeface="Trebuchet MS"/>
+              </a:rPr>
+              <a:t> требуется интеграция с внешним хранилищем секретов (</a:t>
+            </a:r>
+            <a:r>
+              <a:rPr lang="ru-RU" sz="1400" dirty="0" err="1" smtClean="0">
+                <a:solidFill>
+                  <a:schemeClr val="bg1"/>
+                </a:solidFill>
+                <a:latin typeface="Trebuchet MS"/>
+                <a:cs typeface="Trebuchet MS"/>
+              </a:rPr>
+              <a:t>HashiCorp</a:t>
+            </a:r>
+            <a:r>
+              <a:rPr lang="ru-RU" sz="1400" dirty="0" smtClean="0">
+                <a:solidFill>
+                  <a:schemeClr val="bg1"/>
+                </a:solidFill>
+                <a:latin typeface="Trebuchet MS"/>
+                <a:cs typeface="Trebuchet MS"/>
+              </a:rPr>
+              <a:t> </a:t>
+            </a:r>
+            <a:r>
+              <a:rPr lang="ru-RU" sz="1400" dirty="0" err="1" smtClean="0">
+                <a:solidFill>
+                  <a:schemeClr val="bg1"/>
+                </a:solidFill>
+                <a:latin typeface="Trebuchet MS"/>
+                <a:cs typeface="Trebuchet MS"/>
+              </a:rPr>
+              <a:t>Vault</a:t>
+            </a:r>
+            <a:r>
+              <a:rPr lang="ru-RU" sz="1400" dirty="0" smtClean="0">
+                <a:solidFill>
+                  <a:schemeClr val="bg1"/>
+                </a:solidFill>
+                <a:latin typeface="Trebuchet MS"/>
+                <a:cs typeface="Trebuchet MS"/>
+              </a:rPr>
+              <a:t>).</a:t>
+            </a:r>
           </a:p>
           <a:p>
             <a:pPr marL="12700">
               <a:lnSpc>
                 <a:spcPct val="100000"/>
               </a:lnSpc>
+              <a:spcBef>
+                <a:spcPts val="105"/>
+              </a:spcBef>
             </a:pPr>
             <a:r>
-              <a:rPr sz="1400" spc="-10" dirty="0">
-                <a:solidFill>
-                  <a:srgbClr val="F5F8FA"/>
-                </a:solidFill>
-                <a:latin typeface="Trebuchet MS"/>
-                <a:cs typeface="Trebuchet MS"/>
-              </a:rPr>
-              <a:t>используются.</a:t>
-            </a:r>
-            <a:endParaRPr sz="1400">
+              <a:rPr lang="ru-RU" sz="1400" dirty="0" smtClean="0">
+                <a:solidFill>
+                  <a:schemeClr val="bg1"/>
+                </a:solidFill>
+                <a:latin typeface="Trebuchet MS"/>
+                <a:cs typeface="Trebuchet MS"/>
+              </a:rPr>
+              <a:t>• Транспортная защита </a:t>
+            </a:r>
+            <a:r>
+              <a:rPr lang="ru-RU" sz="1400" dirty="0" err="1" smtClean="0">
+                <a:solidFill>
+                  <a:schemeClr val="bg1"/>
+                </a:solidFill>
+                <a:latin typeface="Trebuchet MS"/>
+                <a:cs typeface="Trebuchet MS"/>
+              </a:rPr>
+              <a:t>Kafka</a:t>
+            </a:r>
+            <a:r>
+              <a:rPr lang="ru-RU" sz="1400" dirty="0" smtClean="0">
+                <a:solidFill>
+                  <a:schemeClr val="bg1"/>
+                </a:solidFill>
+                <a:latin typeface="Trebuchet MS"/>
+                <a:cs typeface="Trebuchet MS"/>
+              </a:rPr>
+              <a:t>: в </a:t>
+            </a:r>
+            <a:r>
+              <a:rPr lang="ru-RU" sz="1400" dirty="0" err="1" smtClean="0">
+                <a:solidFill>
+                  <a:schemeClr val="bg1"/>
+                </a:solidFill>
+                <a:latin typeface="Trebuchet MS"/>
+                <a:cs typeface="Trebuchet MS"/>
+              </a:rPr>
+              <a:t>демо</a:t>
+            </a:r>
+            <a:r>
+              <a:rPr lang="ru-RU" sz="1400" dirty="0" smtClean="0">
+                <a:solidFill>
+                  <a:schemeClr val="bg1"/>
+                </a:solidFill>
+                <a:latin typeface="Trebuchet MS"/>
+                <a:cs typeface="Trebuchet MS"/>
+              </a:rPr>
+              <a:t>-конфигурации брокер работает без TLS-шифрования и SASL-аутентификации; архитектура допускает усиление без изменения бизнес-логики.</a:t>
+            </a:r>
+          </a:p>
+          <a:p>
+            <a:pPr marL="12700">
+              <a:lnSpc>
+                <a:spcPct val="100000"/>
+              </a:lnSpc>
+              <a:spcBef>
+                <a:spcPts val="105"/>
+              </a:spcBef>
+            </a:pPr>
+            <a:r>
+              <a:rPr lang="ru-RU" sz="1400" dirty="0" smtClean="0">
+                <a:solidFill>
+                  <a:schemeClr val="bg1"/>
+                </a:solidFill>
+                <a:latin typeface="Trebuchet MS"/>
+                <a:cs typeface="Trebuchet MS"/>
+              </a:rPr>
+              <a:t>• Хранение данных: </a:t>
+            </a:r>
+            <a:r>
+              <a:rPr lang="ru-RU" sz="1400" dirty="0" err="1" smtClean="0">
+                <a:solidFill>
+                  <a:schemeClr val="bg1"/>
+                </a:solidFill>
+                <a:latin typeface="Trebuchet MS"/>
+                <a:cs typeface="Trebuchet MS"/>
+              </a:rPr>
+              <a:t>PostgreSQL</a:t>
+            </a:r>
+            <a:r>
+              <a:rPr lang="ru-RU" sz="1400" dirty="0" smtClean="0">
+                <a:solidFill>
+                  <a:schemeClr val="bg1"/>
+                </a:solidFill>
+                <a:latin typeface="Trebuchet MS"/>
+                <a:cs typeface="Trebuchet MS"/>
+              </a:rPr>
+              <a:t> используется как локальное хранилище без TDE (</a:t>
+            </a:r>
+            <a:r>
+              <a:rPr lang="ru-RU" sz="1400" dirty="0" err="1" smtClean="0">
+                <a:solidFill>
+                  <a:schemeClr val="bg1"/>
+                </a:solidFill>
+                <a:latin typeface="Trebuchet MS"/>
+                <a:cs typeface="Trebuchet MS"/>
+              </a:rPr>
+              <a:t>Transparent</a:t>
+            </a:r>
+            <a:r>
+              <a:rPr lang="ru-RU" sz="1400" dirty="0" smtClean="0">
+                <a:solidFill>
+                  <a:schemeClr val="bg1"/>
+                </a:solidFill>
+                <a:latin typeface="Trebuchet MS"/>
+                <a:cs typeface="Trebuchet MS"/>
+              </a:rPr>
+              <a:t> </a:t>
+            </a:r>
+            <a:r>
+              <a:rPr lang="ru-RU" sz="1400" dirty="0" err="1" smtClean="0">
+                <a:solidFill>
+                  <a:schemeClr val="bg1"/>
+                </a:solidFill>
+                <a:latin typeface="Trebuchet MS"/>
+                <a:cs typeface="Trebuchet MS"/>
+              </a:rPr>
+              <a:t>Data</a:t>
+            </a:r>
+            <a:r>
+              <a:rPr lang="ru-RU" sz="1400" dirty="0" smtClean="0">
+                <a:solidFill>
+                  <a:schemeClr val="bg1"/>
+                </a:solidFill>
+                <a:latin typeface="Trebuchet MS"/>
+                <a:cs typeface="Trebuchet MS"/>
+              </a:rPr>
+              <a:t> </a:t>
+            </a:r>
+            <a:r>
+              <a:rPr lang="ru-RU" sz="1400" dirty="0" err="1" smtClean="0">
+                <a:solidFill>
+                  <a:schemeClr val="bg1"/>
+                </a:solidFill>
+                <a:latin typeface="Trebuchet MS"/>
+                <a:cs typeface="Trebuchet MS"/>
+              </a:rPr>
+              <a:t>Encryption</a:t>
+            </a:r>
+            <a:r>
+              <a:rPr lang="ru-RU" sz="1400" dirty="0" smtClean="0">
+                <a:solidFill>
+                  <a:schemeClr val="bg1"/>
+                </a:solidFill>
+                <a:latin typeface="Trebuchet MS"/>
+                <a:cs typeface="Trebuchet MS"/>
+              </a:rPr>
+              <a:t>); недостаток компенсируется </a:t>
+            </a:r>
+            <a:r>
+              <a:rPr lang="ru-RU" sz="1400" dirty="0" err="1" smtClean="0">
+                <a:solidFill>
+                  <a:schemeClr val="bg1"/>
+                </a:solidFill>
+                <a:latin typeface="Trebuchet MS"/>
+                <a:cs typeface="Trebuchet MS"/>
+              </a:rPr>
+              <a:t>application-layer</a:t>
+            </a:r>
+            <a:r>
+              <a:rPr lang="ru-RU" sz="1400" dirty="0" smtClean="0">
+                <a:solidFill>
+                  <a:schemeClr val="bg1"/>
+                </a:solidFill>
+                <a:latin typeface="Trebuchet MS"/>
+                <a:cs typeface="Trebuchet MS"/>
+              </a:rPr>
+              <a:t> </a:t>
+            </a:r>
+            <a:r>
+              <a:rPr lang="ru-RU" sz="1400" dirty="0" err="1" smtClean="0">
+                <a:solidFill>
+                  <a:schemeClr val="bg1"/>
+                </a:solidFill>
+                <a:latin typeface="Trebuchet MS"/>
+                <a:cs typeface="Trebuchet MS"/>
+              </a:rPr>
+              <a:t>encryption</a:t>
+            </a:r>
+            <a:r>
+              <a:rPr lang="ru-RU" sz="1400" dirty="0" smtClean="0">
+                <a:solidFill>
+                  <a:schemeClr val="bg1"/>
+                </a:solidFill>
+                <a:latin typeface="Trebuchet MS"/>
+                <a:cs typeface="Trebuchet MS"/>
+              </a:rPr>
+              <a:t>.</a:t>
+            </a:r>
+          </a:p>
+          <a:p>
+            <a:pPr marL="12700">
+              <a:lnSpc>
+                <a:spcPct val="100000"/>
+              </a:lnSpc>
+              <a:spcBef>
+                <a:spcPts val="105"/>
+              </a:spcBef>
+            </a:pPr>
+            <a:r>
+              <a:rPr lang="ru-RU" sz="1400" dirty="0" smtClean="0">
+                <a:solidFill>
+                  <a:schemeClr val="bg1"/>
+                </a:solidFill>
+                <a:latin typeface="Trebuchet MS"/>
+                <a:cs typeface="Trebuchet MS"/>
+              </a:rPr>
+              <a:t>• Мониторинг: учётные данные </a:t>
+            </a:r>
+            <a:r>
+              <a:rPr lang="ru-RU" sz="1400" dirty="0" err="1" smtClean="0">
+                <a:solidFill>
+                  <a:schemeClr val="bg1"/>
+                </a:solidFill>
+                <a:latin typeface="Trebuchet MS"/>
+                <a:cs typeface="Trebuchet MS"/>
+              </a:rPr>
+              <a:t>Grafana</a:t>
+            </a:r>
+            <a:r>
+              <a:rPr lang="ru-RU" sz="1400" dirty="0" smtClean="0">
+                <a:solidFill>
+                  <a:schemeClr val="bg1"/>
+                </a:solidFill>
+                <a:latin typeface="Trebuchet MS"/>
+                <a:cs typeface="Trebuchet MS"/>
+              </a:rPr>
+              <a:t> (</a:t>
+            </a:r>
+            <a:r>
+              <a:rPr lang="ru-RU" sz="1400" dirty="0" err="1" smtClean="0">
+                <a:solidFill>
+                  <a:schemeClr val="bg1"/>
+                </a:solidFill>
+                <a:latin typeface="Trebuchet MS"/>
+                <a:cs typeface="Trebuchet MS"/>
+              </a:rPr>
+              <a:t>admin</a:t>
+            </a:r>
+            <a:r>
+              <a:rPr lang="ru-RU" sz="1400" dirty="0" smtClean="0">
+                <a:solidFill>
+                  <a:schemeClr val="bg1"/>
+                </a:solidFill>
+                <a:latin typeface="Trebuchet MS"/>
+                <a:cs typeface="Trebuchet MS"/>
+              </a:rPr>
+              <a:t>/</a:t>
+            </a:r>
+            <a:r>
+              <a:rPr lang="ru-RU" sz="1400" dirty="0" err="1" smtClean="0">
+                <a:solidFill>
+                  <a:schemeClr val="bg1"/>
+                </a:solidFill>
+                <a:latin typeface="Trebuchet MS"/>
+                <a:cs typeface="Trebuchet MS"/>
+              </a:rPr>
+              <a:t>admin</a:t>
+            </a:r>
+            <a:r>
+              <a:rPr lang="ru-RU" sz="1400" dirty="0" smtClean="0">
+                <a:solidFill>
+                  <a:schemeClr val="bg1"/>
+                </a:solidFill>
+                <a:latin typeface="Trebuchet MS"/>
+                <a:cs typeface="Trebuchet MS"/>
+              </a:rPr>
+              <a:t>) используются по умолчанию; в </a:t>
+            </a:r>
+            <a:r>
+              <a:rPr lang="ru-RU" sz="1400" dirty="0" err="1" smtClean="0">
+                <a:solidFill>
+                  <a:schemeClr val="bg1"/>
+                </a:solidFill>
+                <a:latin typeface="Trebuchet MS"/>
+                <a:cs typeface="Trebuchet MS"/>
+              </a:rPr>
+              <a:t>продакшене</a:t>
+            </a:r>
+            <a:r>
+              <a:rPr lang="ru-RU" sz="1400" dirty="0" smtClean="0">
+                <a:solidFill>
+                  <a:schemeClr val="bg1"/>
+                </a:solidFill>
+                <a:latin typeface="Trebuchet MS"/>
+                <a:cs typeface="Trebuchet MS"/>
+              </a:rPr>
+              <a:t> необходима настройка аутентификации и </a:t>
+            </a:r>
+            <a:r>
+              <a:rPr lang="ru-RU" sz="1400" dirty="0" err="1" smtClean="0">
+                <a:solidFill>
+                  <a:schemeClr val="bg1"/>
+                </a:solidFill>
+                <a:latin typeface="Trebuchet MS"/>
+                <a:cs typeface="Trebuchet MS"/>
+              </a:rPr>
+              <a:t>reverse</a:t>
+            </a:r>
+            <a:r>
+              <a:rPr lang="ru-RU" sz="1400" dirty="0" smtClean="0">
+                <a:solidFill>
+                  <a:schemeClr val="bg1"/>
+                </a:solidFill>
+                <a:latin typeface="Trebuchet MS"/>
+                <a:cs typeface="Trebuchet MS"/>
+              </a:rPr>
+              <a:t> </a:t>
+            </a:r>
+            <a:r>
+              <a:rPr lang="ru-RU" sz="1400" dirty="0" err="1" smtClean="0">
+                <a:solidFill>
+                  <a:schemeClr val="bg1"/>
+                </a:solidFill>
+                <a:latin typeface="Trebuchet MS"/>
+                <a:cs typeface="Trebuchet MS"/>
+              </a:rPr>
+              <a:t>proxy</a:t>
+            </a:r>
+            <a:r>
+              <a:rPr lang="ru-RU" sz="1400" dirty="0" smtClean="0">
+                <a:solidFill>
+                  <a:schemeClr val="bg1"/>
+                </a:solidFill>
+                <a:latin typeface="Trebuchet MS"/>
+                <a:cs typeface="Trebuchet MS"/>
+              </a:rPr>
+              <a:t>.</a:t>
+            </a:r>
+          </a:p>
+          <a:p>
+            <a:pPr marL="12700">
+              <a:lnSpc>
+                <a:spcPct val="100000"/>
+              </a:lnSpc>
+              <a:spcBef>
+                <a:spcPts val="105"/>
+              </a:spcBef>
+            </a:pPr>
+            <a:r>
+              <a:rPr lang="ru-RU" sz="1400" dirty="0" smtClean="0">
+                <a:solidFill>
+                  <a:schemeClr val="bg1"/>
+                </a:solidFill>
+                <a:latin typeface="Trebuchet MS"/>
+                <a:cs typeface="Trebuchet MS"/>
+              </a:rPr>
+              <a:t>• Отсутствие внешних интеграций: аутентификация реализована внутри системы без </a:t>
+            </a:r>
+            <a:r>
+              <a:rPr lang="ru-RU" sz="1400" dirty="0" err="1" smtClean="0">
+                <a:solidFill>
+                  <a:schemeClr val="bg1"/>
+                </a:solidFill>
+                <a:latin typeface="Trebuchet MS"/>
+                <a:cs typeface="Trebuchet MS"/>
+              </a:rPr>
+              <a:t>OAuth</a:t>
+            </a:r>
+            <a:r>
+              <a:rPr lang="ru-RU" sz="1400" dirty="0" smtClean="0">
+                <a:solidFill>
+                  <a:schemeClr val="bg1"/>
+                </a:solidFill>
+                <a:latin typeface="Trebuchet MS"/>
+                <a:cs typeface="Trebuchet MS"/>
+              </a:rPr>
+              <a:t>-провайдеров; </a:t>
+            </a:r>
+            <a:r>
+              <a:rPr lang="ru-RU" sz="1400" dirty="0" err="1" smtClean="0">
+                <a:solidFill>
+                  <a:schemeClr val="bg1"/>
+                </a:solidFill>
+                <a:latin typeface="Trebuchet MS"/>
+                <a:cs typeface="Trebuchet MS"/>
+              </a:rPr>
+              <a:t>Telegram</a:t>
+            </a:r>
+            <a:r>
+              <a:rPr lang="ru-RU" sz="1400" dirty="0" smtClean="0">
+                <a:solidFill>
+                  <a:schemeClr val="bg1"/>
+                </a:solidFill>
+                <a:latin typeface="Trebuchet MS"/>
+                <a:cs typeface="Trebuchet MS"/>
+              </a:rPr>
+              <a:t> API и внешние аккаунты не используются.</a:t>
+            </a:r>
+            <a:endParaRPr sz="1400" dirty="0">
+              <a:solidFill>
+                <a:schemeClr val="bg1"/>
+              </a:solidFill>
               <a:latin typeface="Trebuchet MS"/>
               <a:cs typeface="Trebuchet MS"/>
             </a:endParaRPr>
@@ -23024,1731 +22473,30 @@
           <a:chExt cx="0" cy="0"/>
         </a:xfrm>
       </p:grpSpPr>
-      <p:sp>
-        <p:nvSpPr>
-          <p:cNvPr id="2" name="object 2"/>
-          <p:cNvSpPr txBox="1"/>
+      <p:pic>
+        <p:nvPicPr>
+          <p:cNvPr id="16" name="Рисунок 15"/>
+          <p:cNvPicPr>
+            <a:picLocks noChangeAspect="1"/>
+          </p:cNvPicPr>
           <p:nvPr/>
-        </p:nvSpPr>
+        </p:nvPicPr>
+        <p:blipFill>
+          <a:blip r:embed="rId2"/>
+          <a:stretch>
+            <a:fillRect/>
+          </a:stretch>
+        </p:blipFill>
         <p:spPr>
           <a:xfrm>
-            <a:off x="581659" y="331088"/>
-            <a:ext cx="439420" cy="170180"/>
+            <a:off x="-851" y="-33821"/>
+            <a:ext cx="12193702" cy="6925642"/>
           </a:xfrm>
           <a:prstGeom prst="rect">
             <a:avLst/>
           </a:prstGeom>
         </p:spPr>
-        <p:txBody>
-          <a:bodyPr vert="horz" wrap="square" lIns="0" tIns="12065" rIns="0" bIns="0" rtlCol="0">
-            <a:spAutoFit/>
-          </a:bodyPr>
-          <a:lstStyle/>
-          <a:p>
-            <a:pPr marL="12700">
-              <a:lnSpc>
-                <a:spcPct val="100000"/>
-              </a:lnSpc>
-              <a:spcBef>
-                <a:spcPts val="95"/>
-              </a:spcBef>
-            </a:pPr>
-            <a:r>
-              <a:rPr sz="950" b="1" spc="-60" dirty="0">
-                <a:solidFill>
-                  <a:srgbClr val="1F9BD1"/>
-                </a:solidFill>
-                <a:latin typeface="Tahoma"/>
-                <a:cs typeface="Tahoma"/>
-              </a:rPr>
-              <a:t>POLICY</a:t>
-            </a:r>
-            <a:endParaRPr sz="950">
-              <a:latin typeface="Tahoma"/>
-              <a:cs typeface="Tahoma"/>
-            </a:endParaRPr>
-          </a:p>
-        </p:txBody>
-      </p:sp>
-      <p:sp>
-        <p:nvSpPr>
-          <p:cNvPr id="3" name="object 3" descr="$PPTXTitle"/>
-          <p:cNvSpPr txBox="1">
-            <a:spLocks noGrp="1"/>
-          </p:cNvSpPr>
-          <p:nvPr>
-            <p:ph type="title"/>
-          </p:nvPr>
-        </p:nvSpPr>
-        <p:spPr>
-          <a:prstGeom prst="rect">
-            <a:avLst/>
-          </a:prstGeom>
-        </p:spPr>
-        <p:txBody>
-          <a:bodyPr vert="horz" wrap="square" lIns="0" tIns="12700" rIns="0" bIns="0" rtlCol="0">
-            <a:spAutoFit/>
-          </a:bodyPr>
-          <a:lstStyle/>
-          <a:p>
-            <a:pPr marL="12700">
-              <a:lnSpc>
-                <a:spcPct val="100000"/>
-              </a:lnSpc>
-              <a:spcBef>
-                <a:spcPts val="100"/>
-              </a:spcBef>
-            </a:pPr>
-            <a:r>
-              <a:rPr spc="-185" dirty="0"/>
-              <a:t>Архитектура</a:t>
-            </a:r>
-            <a:r>
-              <a:rPr spc="-175" dirty="0"/>
-              <a:t> </a:t>
-            </a:r>
-            <a:r>
-              <a:rPr spc="-150" dirty="0"/>
-              <a:t>политики</a:t>
-            </a:r>
-          </a:p>
-        </p:txBody>
-      </p:sp>
-      <p:sp>
-        <p:nvSpPr>
-          <p:cNvPr id="4" name="object 4"/>
-          <p:cNvSpPr/>
-          <p:nvPr/>
-        </p:nvSpPr>
-        <p:spPr>
-          <a:xfrm>
-            <a:off x="502919" y="1298447"/>
-            <a:ext cx="11155680" cy="0"/>
-          </a:xfrm>
-          <a:custGeom>
-            <a:avLst/>
-            <a:gdLst/>
-            <a:ahLst/>
-            <a:cxnLst/>
-            <a:rect l="l" t="t" r="r" b="b"/>
-            <a:pathLst>
-              <a:path w="11155680">
-                <a:moveTo>
-                  <a:pt x="0" y="0"/>
-                </a:moveTo>
-                <a:lnTo>
-                  <a:pt x="11155680" y="0"/>
-                </a:lnTo>
-              </a:path>
-            </a:pathLst>
-          </a:custGeom>
-          <a:ln w="13970">
-            <a:solidFill>
-              <a:srgbClr val="304355"/>
-            </a:solidFill>
-          </a:ln>
-        </p:spPr>
-        <p:txBody>
-          <a:bodyPr wrap="square" lIns="0" tIns="0" rIns="0" bIns="0" rtlCol="0"/>
-          <a:lstStyle/>
-          <a:p>
-            <a:endParaRPr/>
-          </a:p>
-        </p:txBody>
-      </p:sp>
-      <p:sp>
-        <p:nvSpPr>
-          <p:cNvPr id="5" name="object 5"/>
-          <p:cNvSpPr/>
-          <p:nvPr/>
-        </p:nvSpPr>
-        <p:spPr>
-          <a:xfrm>
-            <a:off x="502919" y="6336791"/>
-            <a:ext cx="11155680" cy="0"/>
-          </a:xfrm>
-          <a:custGeom>
-            <a:avLst/>
-            <a:gdLst/>
-            <a:ahLst/>
-            <a:cxnLst/>
-            <a:rect l="l" t="t" r="r" b="b"/>
-            <a:pathLst>
-              <a:path w="11155680">
-                <a:moveTo>
-                  <a:pt x="0" y="0"/>
-                </a:moveTo>
-                <a:lnTo>
-                  <a:pt x="11155680" y="0"/>
-                </a:lnTo>
-              </a:path>
-            </a:pathLst>
-          </a:custGeom>
-          <a:ln w="8890">
-            <a:solidFill>
-              <a:srgbClr val="304355"/>
-            </a:solidFill>
-          </a:ln>
-        </p:spPr>
-        <p:txBody>
-          <a:bodyPr wrap="square" lIns="0" tIns="0" rIns="0" bIns="0" rtlCol="0"/>
-          <a:lstStyle/>
-          <a:p>
-            <a:endParaRPr/>
-          </a:p>
-        </p:txBody>
-      </p:sp>
-      <p:sp>
-        <p:nvSpPr>
-          <p:cNvPr id="6" name="object 6"/>
-          <p:cNvSpPr txBox="1"/>
-          <p:nvPr/>
-        </p:nvSpPr>
-        <p:spPr>
-          <a:xfrm>
-            <a:off x="914400" y="1783079"/>
-            <a:ext cx="2331720" cy="868680"/>
-          </a:xfrm>
-          <a:prstGeom prst="rect">
-            <a:avLst/>
-          </a:prstGeom>
-          <a:solidFill>
-            <a:srgbClr val="318537"/>
-          </a:solidFill>
-          <a:ln w="15239">
-            <a:solidFill>
-              <a:srgbClr val="304355"/>
-            </a:solidFill>
-          </a:ln>
-        </p:spPr>
-        <p:txBody>
-          <a:bodyPr vert="horz" wrap="square" lIns="0" tIns="19050" rIns="0" bIns="0" rtlCol="0">
-            <a:spAutoFit/>
-          </a:bodyPr>
-          <a:lstStyle/>
-          <a:p>
-            <a:pPr>
-              <a:lnSpc>
-                <a:spcPct val="100000"/>
-              </a:lnSpc>
-              <a:spcBef>
-                <a:spcPts val="150"/>
-              </a:spcBef>
-            </a:pPr>
-            <a:endParaRPr sz="1350">
-              <a:latin typeface="Times New Roman"/>
-              <a:cs typeface="Times New Roman"/>
-            </a:endParaRPr>
-          </a:p>
-          <a:p>
-            <a:pPr marL="219075" marR="906780">
-              <a:lnSpc>
-                <a:spcPct val="100000"/>
-              </a:lnSpc>
-            </a:pPr>
-            <a:r>
-              <a:rPr sz="1350" b="1" spc="-70" dirty="0">
-                <a:solidFill>
-                  <a:srgbClr val="F5F8FA"/>
-                </a:solidFill>
-                <a:latin typeface="Tahoma"/>
-                <a:cs typeface="Tahoma"/>
-              </a:rPr>
-              <a:t>Policy</a:t>
-            </a:r>
-            <a:r>
-              <a:rPr sz="1350" b="1" spc="-75" dirty="0">
-                <a:solidFill>
-                  <a:srgbClr val="F5F8FA"/>
-                </a:solidFill>
-                <a:latin typeface="Tahoma"/>
-                <a:cs typeface="Tahoma"/>
-              </a:rPr>
-              <a:t> </a:t>
-            </a:r>
-            <a:r>
-              <a:rPr sz="1350" b="1" spc="-45" dirty="0">
-                <a:solidFill>
-                  <a:srgbClr val="F5F8FA"/>
-                </a:solidFill>
-                <a:latin typeface="Tahoma"/>
-                <a:cs typeface="Tahoma"/>
-              </a:rPr>
-              <a:t>Decision </a:t>
-            </a:r>
-            <a:r>
-              <a:rPr sz="1350" b="1" spc="-90" dirty="0">
-                <a:solidFill>
-                  <a:srgbClr val="F5F8FA"/>
-                </a:solidFill>
-                <a:latin typeface="Tahoma"/>
-                <a:cs typeface="Tahoma"/>
-              </a:rPr>
-              <a:t>LiteBroker</a:t>
-            </a:r>
-            <a:r>
-              <a:rPr sz="1350" b="1" spc="-70" dirty="0">
-                <a:solidFill>
-                  <a:srgbClr val="F5F8FA"/>
-                </a:solidFill>
-                <a:latin typeface="Tahoma"/>
-                <a:cs typeface="Tahoma"/>
-              </a:rPr>
-              <a:t> </a:t>
-            </a:r>
-            <a:r>
-              <a:rPr sz="1350" b="1" spc="-25" dirty="0">
-                <a:solidFill>
-                  <a:srgbClr val="F5F8FA"/>
-                </a:solidFill>
-                <a:latin typeface="Tahoma"/>
-                <a:cs typeface="Tahoma"/>
-              </a:rPr>
-              <a:t>API</a:t>
-            </a:r>
-            <a:endParaRPr sz="1350">
-              <a:latin typeface="Tahoma"/>
-              <a:cs typeface="Tahoma"/>
-            </a:endParaRPr>
-          </a:p>
-        </p:txBody>
-      </p:sp>
-      <p:sp>
-        <p:nvSpPr>
-          <p:cNvPr id="7" name="object 7"/>
-          <p:cNvSpPr txBox="1"/>
-          <p:nvPr/>
-        </p:nvSpPr>
-        <p:spPr>
-          <a:xfrm>
-            <a:off x="3749040" y="1783079"/>
-            <a:ext cx="2331720" cy="868680"/>
-          </a:xfrm>
-          <a:prstGeom prst="rect">
-            <a:avLst/>
-          </a:prstGeom>
-          <a:solidFill>
-            <a:srgbClr val="1F9BD1"/>
-          </a:solidFill>
-          <a:ln w="15240">
-            <a:solidFill>
-              <a:srgbClr val="304355"/>
-            </a:solidFill>
-          </a:ln>
-        </p:spPr>
-        <p:txBody>
-          <a:bodyPr vert="horz" wrap="square" lIns="0" tIns="19050" rIns="0" bIns="0" rtlCol="0">
-            <a:spAutoFit/>
-          </a:bodyPr>
-          <a:lstStyle/>
-          <a:p>
-            <a:pPr>
-              <a:lnSpc>
-                <a:spcPct val="100000"/>
-              </a:lnSpc>
-              <a:spcBef>
-                <a:spcPts val="150"/>
-              </a:spcBef>
-            </a:pPr>
-            <a:endParaRPr sz="1350">
-              <a:latin typeface="Times New Roman"/>
-              <a:cs typeface="Times New Roman"/>
-            </a:endParaRPr>
-          </a:p>
-          <a:p>
-            <a:pPr marL="219710" marR="584200">
-              <a:lnSpc>
-                <a:spcPct val="100000"/>
-              </a:lnSpc>
-            </a:pPr>
-            <a:r>
-              <a:rPr sz="1350" b="1" spc="-70" dirty="0">
-                <a:solidFill>
-                  <a:srgbClr val="F5F8FA"/>
-                </a:solidFill>
-                <a:latin typeface="Tahoma"/>
-                <a:cs typeface="Tahoma"/>
-              </a:rPr>
-              <a:t>Policy</a:t>
-            </a:r>
-            <a:r>
-              <a:rPr sz="1350" b="1" spc="-85" dirty="0">
-                <a:solidFill>
-                  <a:srgbClr val="F5F8FA"/>
-                </a:solidFill>
-                <a:latin typeface="Tahoma"/>
-                <a:cs typeface="Tahoma"/>
-              </a:rPr>
-              <a:t> </a:t>
-            </a:r>
-            <a:r>
-              <a:rPr sz="1350" b="1" spc="-65" dirty="0">
-                <a:solidFill>
-                  <a:srgbClr val="F5F8FA"/>
-                </a:solidFill>
-                <a:latin typeface="Tahoma"/>
-                <a:cs typeface="Tahoma"/>
-              </a:rPr>
-              <a:t>Enforcement </a:t>
-            </a:r>
-            <a:r>
-              <a:rPr sz="1350" b="1" spc="-114" dirty="0">
-                <a:solidFill>
-                  <a:srgbClr val="F5F8FA"/>
-                </a:solidFill>
-                <a:latin typeface="Tahoma"/>
-                <a:cs typeface="Tahoma"/>
-              </a:rPr>
-              <a:t>HTTP</a:t>
-            </a:r>
-            <a:r>
-              <a:rPr sz="1350" b="1" spc="-100" dirty="0">
-                <a:solidFill>
-                  <a:srgbClr val="F5F8FA"/>
-                </a:solidFill>
-                <a:latin typeface="Tahoma"/>
-                <a:cs typeface="Tahoma"/>
-              </a:rPr>
-              <a:t> </a:t>
-            </a:r>
-            <a:r>
-              <a:rPr sz="1350" b="1" spc="-75" dirty="0">
-                <a:solidFill>
-                  <a:srgbClr val="F5F8FA"/>
-                </a:solidFill>
-                <a:latin typeface="Tahoma"/>
-                <a:cs typeface="Tahoma"/>
-              </a:rPr>
-              <a:t>routes</a:t>
-            </a:r>
-            <a:r>
-              <a:rPr sz="1350" b="1" spc="-105" dirty="0">
-                <a:solidFill>
-                  <a:srgbClr val="F5F8FA"/>
-                </a:solidFill>
-                <a:latin typeface="Tahoma"/>
-                <a:cs typeface="Tahoma"/>
-              </a:rPr>
-              <a:t> </a:t>
-            </a:r>
-            <a:r>
-              <a:rPr sz="1350" b="1" spc="-385" dirty="0">
-                <a:solidFill>
-                  <a:srgbClr val="F5F8FA"/>
-                </a:solidFill>
-                <a:latin typeface="Tahoma"/>
-                <a:cs typeface="Tahoma"/>
-              </a:rPr>
-              <a:t>+</a:t>
-            </a:r>
-            <a:r>
-              <a:rPr sz="1350" b="1" spc="-95" dirty="0">
-                <a:solidFill>
-                  <a:srgbClr val="F5F8FA"/>
-                </a:solidFill>
-                <a:latin typeface="Tahoma"/>
-                <a:cs typeface="Tahoma"/>
-              </a:rPr>
-              <a:t> </a:t>
-            </a:r>
-            <a:r>
-              <a:rPr sz="1350" b="1" spc="-20" dirty="0">
-                <a:solidFill>
-                  <a:srgbClr val="F5F8FA"/>
-                </a:solidFill>
-                <a:latin typeface="Tahoma"/>
-                <a:cs typeface="Tahoma"/>
-              </a:rPr>
-              <a:t>auth</a:t>
-            </a:r>
-            <a:endParaRPr sz="1350">
-              <a:latin typeface="Tahoma"/>
-              <a:cs typeface="Tahoma"/>
-            </a:endParaRPr>
-          </a:p>
-        </p:txBody>
-      </p:sp>
-      <p:sp>
-        <p:nvSpPr>
-          <p:cNvPr id="8" name="object 8"/>
-          <p:cNvSpPr txBox="1"/>
-          <p:nvPr/>
-        </p:nvSpPr>
-        <p:spPr>
-          <a:xfrm>
-            <a:off x="6583680" y="1783079"/>
-            <a:ext cx="2240280" cy="868680"/>
-          </a:xfrm>
-          <a:prstGeom prst="rect">
-            <a:avLst/>
-          </a:prstGeom>
-          <a:solidFill>
-            <a:srgbClr val="6E49A1"/>
-          </a:solidFill>
-          <a:ln w="15240">
-            <a:solidFill>
-              <a:srgbClr val="304355"/>
-            </a:solidFill>
-          </a:ln>
-        </p:spPr>
-        <p:txBody>
-          <a:bodyPr vert="horz" wrap="square" lIns="0" tIns="19050" rIns="0" bIns="0" rtlCol="0">
-            <a:spAutoFit/>
-          </a:bodyPr>
-          <a:lstStyle/>
-          <a:p>
-            <a:pPr>
-              <a:lnSpc>
-                <a:spcPct val="100000"/>
-              </a:lnSpc>
-              <a:spcBef>
-                <a:spcPts val="150"/>
-              </a:spcBef>
-            </a:pPr>
-            <a:endParaRPr sz="1350">
-              <a:latin typeface="Times New Roman"/>
-              <a:cs typeface="Times New Roman"/>
-            </a:endParaRPr>
-          </a:p>
-          <a:p>
-            <a:pPr marL="220345" marR="770890">
-              <a:lnSpc>
-                <a:spcPct val="100000"/>
-              </a:lnSpc>
-            </a:pPr>
-            <a:r>
-              <a:rPr sz="1350" b="1" spc="-75" dirty="0">
-                <a:solidFill>
-                  <a:srgbClr val="F5F8FA"/>
-                </a:solidFill>
-                <a:latin typeface="Tahoma"/>
-                <a:cs typeface="Tahoma"/>
-              </a:rPr>
-              <a:t>Message</a:t>
-            </a:r>
-            <a:r>
-              <a:rPr sz="1350" b="1" spc="-65" dirty="0">
-                <a:solidFill>
-                  <a:srgbClr val="F5F8FA"/>
-                </a:solidFill>
-                <a:latin typeface="Tahoma"/>
-                <a:cs typeface="Tahoma"/>
-              </a:rPr>
-              <a:t> </a:t>
-            </a:r>
-            <a:r>
-              <a:rPr sz="1350" b="1" spc="-90" dirty="0">
-                <a:solidFill>
-                  <a:srgbClr val="F5F8FA"/>
-                </a:solidFill>
-                <a:latin typeface="Tahoma"/>
-                <a:cs typeface="Tahoma"/>
-              </a:rPr>
-              <a:t>Broker </a:t>
-            </a:r>
-            <a:r>
-              <a:rPr sz="1350" b="1" spc="-95" dirty="0">
-                <a:solidFill>
-                  <a:srgbClr val="F5F8FA"/>
-                </a:solidFill>
-                <a:latin typeface="Tahoma"/>
-                <a:cs typeface="Tahoma"/>
-              </a:rPr>
-              <a:t>Kafka</a:t>
-            </a:r>
-            <a:r>
-              <a:rPr sz="1350" b="1" spc="-85" dirty="0">
-                <a:solidFill>
-                  <a:srgbClr val="F5F8FA"/>
-                </a:solidFill>
-                <a:latin typeface="Tahoma"/>
-                <a:cs typeface="Tahoma"/>
-              </a:rPr>
-              <a:t> </a:t>
-            </a:r>
-            <a:r>
-              <a:rPr sz="1350" b="1" spc="-10" dirty="0">
-                <a:solidFill>
-                  <a:srgbClr val="F5F8FA"/>
-                </a:solidFill>
-                <a:latin typeface="Tahoma"/>
-                <a:cs typeface="Tahoma"/>
-              </a:rPr>
-              <a:t>topics</a:t>
-            </a:r>
-            <a:endParaRPr sz="1350">
-              <a:latin typeface="Tahoma"/>
-              <a:cs typeface="Tahoma"/>
-            </a:endParaRPr>
-          </a:p>
-        </p:txBody>
-      </p:sp>
-      <p:sp>
-        <p:nvSpPr>
-          <p:cNvPr id="9" name="object 9"/>
-          <p:cNvSpPr txBox="1"/>
-          <p:nvPr/>
-        </p:nvSpPr>
-        <p:spPr>
-          <a:xfrm>
-            <a:off x="9189719" y="1783079"/>
-            <a:ext cx="2240280" cy="868680"/>
-          </a:xfrm>
-          <a:prstGeom prst="rect">
-            <a:avLst/>
-          </a:prstGeom>
-          <a:solidFill>
-            <a:srgbClr val="E39B37"/>
-          </a:solidFill>
-          <a:ln w="15240">
-            <a:solidFill>
-              <a:srgbClr val="304355"/>
-            </a:solidFill>
-          </a:ln>
-        </p:spPr>
-        <p:txBody>
-          <a:bodyPr vert="horz" wrap="square" lIns="0" tIns="143510" rIns="0" bIns="0" rtlCol="0">
-            <a:spAutoFit/>
-          </a:bodyPr>
-          <a:lstStyle/>
-          <a:p>
-            <a:pPr marL="220345" marR="262255">
-              <a:lnSpc>
-                <a:spcPct val="90100"/>
-              </a:lnSpc>
-              <a:spcBef>
-                <a:spcPts val="1130"/>
-              </a:spcBef>
-            </a:pPr>
-            <a:r>
-              <a:rPr sz="1350" b="1" spc="-10" dirty="0">
-                <a:solidFill>
-                  <a:srgbClr val="F5F8FA"/>
-                </a:solidFill>
-                <a:latin typeface="Tahoma"/>
-                <a:cs typeface="Tahoma"/>
-              </a:rPr>
-              <a:t>Observation </a:t>
-            </a:r>
-            <a:r>
-              <a:rPr sz="1350" b="1" spc="-95" dirty="0">
-                <a:solidFill>
-                  <a:srgbClr val="F5F8FA"/>
-                </a:solidFill>
-                <a:latin typeface="Tahoma"/>
-                <a:cs typeface="Tahoma"/>
-              </a:rPr>
-              <a:t>Prometheus/Loki/Graf </a:t>
-            </a:r>
-            <a:r>
-              <a:rPr sz="1350" b="1" spc="-25" dirty="0">
-                <a:solidFill>
-                  <a:srgbClr val="F5F8FA"/>
-                </a:solidFill>
-                <a:latin typeface="Tahoma"/>
-                <a:cs typeface="Tahoma"/>
-              </a:rPr>
-              <a:t>ana</a:t>
-            </a:r>
-            <a:endParaRPr sz="1350">
-              <a:latin typeface="Tahoma"/>
-              <a:cs typeface="Tahoma"/>
-            </a:endParaRPr>
-          </a:p>
-        </p:txBody>
-      </p:sp>
-      <p:sp>
-        <p:nvSpPr>
-          <p:cNvPr id="10" name="object 10"/>
-          <p:cNvSpPr/>
-          <p:nvPr/>
-        </p:nvSpPr>
-        <p:spPr>
-          <a:xfrm>
-            <a:off x="3319271" y="2183892"/>
-            <a:ext cx="384175" cy="76200"/>
-          </a:xfrm>
-          <a:custGeom>
-            <a:avLst/>
-            <a:gdLst/>
-            <a:ahLst/>
-            <a:cxnLst/>
-            <a:rect l="l" t="t" r="r" b="b"/>
-            <a:pathLst>
-              <a:path w="384175" h="76200">
-                <a:moveTo>
-                  <a:pt x="307848" y="0"/>
-                </a:moveTo>
-                <a:lnTo>
-                  <a:pt x="307848" y="76200"/>
-                </a:lnTo>
-                <a:lnTo>
-                  <a:pt x="364998" y="47625"/>
-                </a:lnTo>
-                <a:lnTo>
-                  <a:pt x="320548" y="47625"/>
-                </a:lnTo>
-                <a:lnTo>
-                  <a:pt x="320548" y="28575"/>
-                </a:lnTo>
-                <a:lnTo>
-                  <a:pt x="364998" y="28575"/>
-                </a:lnTo>
-                <a:lnTo>
-                  <a:pt x="307848" y="0"/>
-                </a:lnTo>
-                <a:close/>
-              </a:path>
-              <a:path w="384175" h="76200">
-                <a:moveTo>
-                  <a:pt x="307848" y="28575"/>
-                </a:moveTo>
-                <a:lnTo>
-                  <a:pt x="0" y="28575"/>
-                </a:lnTo>
-                <a:lnTo>
-                  <a:pt x="0" y="47625"/>
-                </a:lnTo>
-                <a:lnTo>
-                  <a:pt x="307848" y="47625"/>
-                </a:lnTo>
-                <a:lnTo>
-                  <a:pt x="307848" y="28575"/>
-                </a:lnTo>
-                <a:close/>
-              </a:path>
-              <a:path w="384175" h="76200">
-                <a:moveTo>
-                  <a:pt x="364998" y="28575"/>
-                </a:moveTo>
-                <a:lnTo>
-                  <a:pt x="320548" y="28575"/>
-                </a:lnTo>
-                <a:lnTo>
-                  <a:pt x="320548" y="47625"/>
-                </a:lnTo>
-                <a:lnTo>
-                  <a:pt x="364998" y="47625"/>
-                </a:lnTo>
-                <a:lnTo>
-                  <a:pt x="384048" y="38100"/>
-                </a:lnTo>
-                <a:lnTo>
-                  <a:pt x="364998" y="28575"/>
-                </a:lnTo>
-                <a:close/>
-              </a:path>
-            </a:pathLst>
-          </a:custGeom>
-          <a:solidFill>
-            <a:srgbClr val="FFFFFF"/>
-          </a:solidFill>
-        </p:spPr>
-        <p:txBody>
-          <a:bodyPr wrap="square" lIns="0" tIns="0" rIns="0" bIns="0" rtlCol="0"/>
-          <a:lstStyle/>
-          <a:p>
-            <a:endParaRPr/>
-          </a:p>
-        </p:txBody>
-      </p:sp>
-      <p:sp>
-        <p:nvSpPr>
-          <p:cNvPr id="11" name="object 11"/>
-          <p:cNvSpPr/>
-          <p:nvPr/>
-        </p:nvSpPr>
-        <p:spPr>
-          <a:xfrm>
-            <a:off x="6153911" y="2183892"/>
-            <a:ext cx="384175" cy="76200"/>
-          </a:xfrm>
-          <a:custGeom>
-            <a:avLst/>
-            <a:gdLst/>
-            <a:ahLst/>
-            <a:cxnLst/>
-            <a:rect l="l" t="t" r="r" b="b"/>
-            <a:pathLst>
-              <a:path w="384175" h="76200">
-                <a:moveTo>
-                  <a:pt x="307848" y="0"/>
-                </a:moveTo>
-                <a:lnTo>
-                  <a:pt x="307848" y="76200"/>
-                </a:lnTo>
-                <a:lnTo>
-                  <a:pt x="364997" y="47625"/>
-                </a:lnTo>
-                <a:lnTo>
-                  <a:pt x="320548" y="47625"/>
-                </a:lnTo>
-                <a:lnTo>
-                  <a:pt x="320548" y="28575"/>
-                </a:lnTo>
-                <a:lnTo>
-                  <a:pt x="364997" y="28575"/>
-                </a:lnTo>
-                <a:lnTo>
-                  <a:pt x="307848" y="0"/>
-                </a:lnTo>
-                <a:close/>
-              </a:path>
-              <a:path w="384175" h="76200">
-                <a:moveTo>
-                  <a:pt x="307848" y="28575"/>
-                </a:moveTo>
-                <a:lnTo>
-                  <a:pt x="0" y="28575"/>
-                </a:lnTo>
-                <a:lnTo>
-                  <a:pt x="0" y="47625"/>
-                </a:lnTo>
-                <a:lnTo>
-                  <a:pt x="307848" y="47625"/>
-                </a:lnTo>
-                <a:lnTo>
-                  <a:pt x="307848" y="28575"/>
-                </a:lnTo>
-                <a:close/>
-              </a:path>
-              <a:path w="384175" h="76200">
-                <a:moveTo>
-                  <a:pt x="364997" y="28575"/>
-                </a:moveTo>
-                <a:lnTo>
-                  <a:pt x="320548" y="28575"/>
-                </a:lnTo>
-                <a:lnTo>
-                  <a:pt x="320548" y="47625"/>
-                </a:lnTo>
-                <a:lnTo>
-                  <a:pt x="364997" y="47625"/>
-                </a:lnTo>
-                <a:lnTo>
-                  <a:pt x="384047" y="38100"/>
-                </a:lnTo>
-                <a:lnTo>
-                  <a:pt x="364997" y="28575"/>
-                </a:lnTo>
-                <a:close/>
-              </a:path>
-            </a:pathLst>
-          </a:custGeom>
-          <a:solidFill>
-            <a:srgbClr val="FFFFFF"/>
-          </a:solidFill>
-        </p:spPr>
-        <p:txBody>
-          <a:bodyPr wrap="square" lIns="0" tIns="0" rIns="0" bIns="0" rtlCol="0"/>
-          <a:lstStyle/>
-          <a:p>
-            <a:endParaRPr/>
-          </a:p>
-        </p:txBody>
-      </p:sp>
-      <p:sp>
-        <p:nvSpPr>
-          <p:cNvPr id="12" name="object 12"/>
-          <p:cNvSpPr/>
-          <p:nvPr/>
-        </p:nvSpPr>
-        <p:spPr>
-          <a:xfrm>
-            <a:off x="8869680" y="2183892"/>
-            <a:ext cx="274320" cy="76200"/>
-          </a:xfrm>
-          <a:custGeom>
-            <a:avLst/>
-            <a:gdLst/>
-            <a:ahLst/>
-            <a:cxnLst/>
-            <a:rect l="l" t="t" r="r" b="b"/>
-            <a:pathLst>
-              <a:path w="274320" h="76200">
-                <a:moveTo>
-                  <a:pt x="198120" y="0"/>
-                </a:moveTo>
-                <a:lnTo>
-                  <a:pt x="198120" y="76200"/>
-                </a:lnTo>
-                <a:lnTo>
-                  <a:pt x="255270" y="47625"/>
-                </a:lnTo>
-                <a:lnTo>
-                  <a:pt x="210820" y="47625"/>
-                </a:lnTo>
-                <a:lnTo>
-                  <a:pt x="210820" y="28575"/>
-                </a:lnTo>
-                <a:lnTo>
-                  <a:pt x="255270" y="28575"/>
-                </a:lnTo>
-                <a:lnTo>
-                  <a:pt x="198120" y="0"/>
-                </a:lnTo>
-                <a:close/>
-              </a:path>
-              <a:path w="274320" h="76200">
-                <a:moveTo>
-                  <a:pt x="198120" y="28575"/>
-                </a:moveTo>
-                <a:lnTo>
-                  <a:pt x="0" y="28575"/>
-                </a:lnTo>
-                <a:lnTo>
-                  <a:pt x="0" y="47625"/>
-                </a:lnTo>
-                <a:lnTo>
-                  <a:pt x="198120" y="47625"/>
-                </a:lnTo>
-                <a:lnTo>
-                  <a:pt x="198120" y="28575"/>
-                </a:lnTo>
-                <a:close/>
-              </a:path>
-              <a:path w="274320" h="76200">
-                <a:moveTo>
-                  <a:pt x="255270" y="28575"/>
-                </a:moveTo>
-                <a:lnTo>
-                  <a:pt x="210820" y="28575"/>
-                </a:lnTo>
-                <a:lnTo>
-                  <a:pt x="210820" y="47625"/>
-                </a:lnTo>
-                <a:lnTo>
-                  <a:pt x="255270" y="47625"/>
-                </a:lnTo>
-                <a:lnTo>
-                  <a:pt x="274320" y="38100"/>
-                </a:lnTo>
-                <a:lnTo>
-                  <a:pt x="255270" y="28575"/>
-                </a:lnTo>
-                <a:close/>
-              </a:path>
-            </a:pathLst>
-          </a:custGeom>
-          <a:solidFill>
-            <a:srgbClr val="FFFFFF"/>
-          </a:solidFill>
-        </p:spPr>
-        <p:txBody>
-          <a:bodyPr wrap="square" lIns="0" tIns="0" rIns="0" bIns="0" rtlCol="0"/>
-          <a:lstStyle/>
-          <a:p>
-            <a:endParaRPr/>
-          </a:p>
-        </p:txBody>
-      </p:sp>
-      <p:sp>
-        <p:nvSpPr>
-          <p:cNvPr id="13" name="object 13"/>
-          <p:cNvSpPr txBox="1"/>
-          <p:nvPr/>
-        </p:nvSpPr>
-        <p:spPr>
-          <a:xfrm>
-            <a:off x="993139" y="3836289"/>
-            <a:ext cx="8208009" cy="897255"/>
-          </a:xfrm>
-          <a:prstGeom prst="rect">
-            <a:avLst/>
-          </a:prstGeom>
-        </p:spPr>
-        <p:txBody>
-          <a:bodyPr vert="horz" wrap="square" lIns="0" tIns="15875" rIns="0" bIns="0" rtlCol="0">
-            <a:spAutoFit/>
-          </a:bodyPr>
-          <a:lstStyle/>
-          <a:p>
-            <a:pPr marL="12700">
-              <a:lnSpc>
-                <a:spcPct val="100000"/>
-              </a:lnSpc>
-              <a:spcBef>
-                <a:spcPts val="125"/>
-              </a:spcBef>
-            </a:pPr>
-            <a:r>
-              <a:rPr sz="1400" dirty="0">
-                <a:solidFill>
-                  <a:srgbClr val="F5F8FA"/>
-                </a:solidFill>
-                <a:latin typeface="Trebuchet MS"/>
-                <a:cs typeface="Trebuchet MS"/>
-              </a:rPr>
-              <a:t>Разрешены</a:t>
-            </a:r>
-            <a:r>
-              <a:rPr sz="1400" spc="-35" dirty="0">
-                <a:solidFill>
-                  <a:srgbClr val="F5F8FA"/>
-                </a:solidFill>
-                <a:latin typeface="Trebuchet MS"/>
-                <a:cs typeface="Trebuchet MS"/>
-              </a:rPr>
-              <a:t> </a:t>
-            </a:r>
-            <a:r>
-              <a:rPr sz="1400" spc="-20" dirty="0">
-                <a:solidFill>
-                  <a:srgbClr val="F5F8FA"/>
-                </a:solidFill>
-                <a:latin typeface="Trebuchet MS"/>
-                <a:cs typeface="Trebuchet MS"/>
-              </a:rPr>
-              <a:t>только</a:t>
-            </a:r>
-            <a:r>
-              <a:rPr sz="1400" spc="-45" dirty="0">
-                <a:solidFill>
-                  <a:srgbClr val="F5F8FA"/>
-                </a:solidFill>
-                <a:latin typeface="Trebuchet MS"/>
-                <a:cs typeface="Trebuchet MS"/>
-              </a:rPr>
-              <a:t> </a:t>
-            </a:r>
-            <a:r>
-              <a:rPr sz="1400" dirty="0">
-                <a:solidFill>
-                  <a:srgbClr val="F5F8FA"/>
-                </a:solidFill>
-                <a:latin typeface="Trebuchet MS"/>
-                <a:cs typeface="Trebuchet MS"/>
-              </a:rPr>
-              <a:t>операции</a:t>
-            </a:r>
-            <a:r>
-              <a:rPr sz="1400" spc="15" dirty="0">
-                <a:solidFill>
-                  <a:srgbClr val="F5F8FA"/>
-                </a:solidFill>
-                <a:latin typeface="Trebuchet MS"/>
-                <a:cs typeface="Trebuchet MS"/>
-              </a:rPr>
-              <a:t> </a:t>
-            </a:r>
-            <a:r>
-              <a:rPr sz="1400" dirty="0">
-                <a:solidFill>
-                  <a:srgbClr val="F5F8FA"/>
-                </a:solidFill>
-                <a:latin typeface="Trebuchet MS"/>
-                <a:cs typeface="Trebuchet MS"/>
-              </a:rPr>
-              <a:t>через</a:t>
-            </a:r>
-            <a:r>
-              <a:rPr sz="1400" spc="-40" dirty="0">
-                <a:solidFill>
-                  <a:srgbClr val="F5F8FA"/>
-                </a:solidFill>
-                <a:latin typeface="Trebuchet MS"/>
-                <a:cs typeface="Trebuchet MS"/>
-              </a:rPr>
-              <a:t> </a:t>
-            </a:r>
-            <a:r>
-              <a:rPr sz="1400" spc="-25" dirty="0">
-                <a:solidFill>
-                  <a:srgbClr val="F5F8FA"/>
-                </a:solidFill>
-                <a:latin typeface="Trebuchet MS"/>
-                <a:cs typeface="Trebuchet MS"/>
-              </a:rPr>
-              <a:t>API:</a:t>
-            </a:r>
-            <a:r>
-              <a:rPr sz="1400" spc="-30" dirty="0">
-                <a:solidFill>
-                  <a:srgbClr val="F5F8FA"/>
-                </a:solidFill>
-                <a:latin typeface="Trebuchet MS"/>
-                <a:cs typeface="Trebuchet MS"/>
-              </a:rPr>
-              <a:t> </a:t>
-            </a:r>
-            <a:r>
-              <a:rPr sz="1400" spc="-10" dirty="0">
-                <a:solidFill>
-                  <a:srgbClr val="F5F8FA"/>
-                </a:solidFill>
-                <a:latin typeface="Trebuchet MS"/>
-                <a:cs typeface="Trebuchet MS"/>
-              </a:rPr>
-              <a:t>login/register/users/messages/sensors/metrics.</a:t>
-            </a:r>
-            <a:endParaRPr sz="1400">
-              <a:latin typeface="Trebuchet MS"/>
-              <a:cs typeface="Trebuchet MS"/>
-            </a:endParaRPr>
-          </a:p>
-          <a:p>
-            <a:pPr marL="12700" marR="5080">
-              <a:lnSpc>
-                <a:spcPct val="102099"/>
-              </a:lnSpc>
-            </a:pPr>
-            <a:r>
-              <a:rPr sz="1400" spc="-40" dirty="0">
-                <a:solidFill>
-                  <a:srgbClr val="F5F8FA"/>
-                </a:solidFill>
-                <a:latin typeface="Trebuchet MS"/>
-                <a:cs typeface="Trebuchet MS"/>
-              </a:rPr>
-              <a:t>Для</a:t>
-            </a:r>
-            <a:r>
-              <a:rPr sz="1400" spc="-60" dirty="0">
-                <a:solidFill>
-                  <a:srgbClr val="F5F8FA"/>
-                </a:solidFill>
-                <a:latin typeface="Trebuchet MS"/>
-                <a:cs typeface="Trebuchet MS"/>
-              </a:rPr>
-              <a:t> </a:t>
-            </a:r>
-            <a:r>
-              <a:rPr sz="1400" dirty="0">
-                <a:solidFill>
-                  <a:srgbClr val="F5F8FA"/>
-                </a:solidFill>
-                <a:latin typeface="Trebuchet MS"/>
-                <a:cs typeface="Trebuchet MS"/>
-              </a:rPr>
-              <a:t>сообщений</a:t>
-            </a:r>
-            <a:r>
-              <a:rPr sz="1400" spc="-55" dirty="0">
-                <a:solidFill>
-                  <a:srgbClr val="F5F8FA"/>
-                </a:solidFill>
-                <a:latin typeface="Trebuchet MS"/>
-                <a:cs typeface="Trebuchet MS"/>
-              </a:rPr>
-              <a:t> </a:t>
-            </a:r>
-            <a:r>
-              <a:rPr sz="1400" spc="-10" dirty="0">
-                <a:solidFill>
-                  <a:srgbClr val="F5F8FA"/>
-                </a:solidFill>
-                <a:latin typeface="Trebuchet MS"/>
-                <a:cs typeface="Trebuchet MS"/>
-              </a:rPr>
-              <a:t>обязательны:</a:t>
-            </a:r>
-            <a:r>
-              <a:rPr sz="1400" spc="-60" dirty="0">
-                <a:solidFill>
-                  <a:srgbClr val="F5F8FA"/>
-                </a:solidFill>
-                <a:latin typeface="Trebuchet MS"/>
-                <a:cs typeface="Trebuchet MS"/>
-              </a:rPr>
-              <a:t> </a:t>
-            </a:r>
-            <a:r>
-              <a:rPr sz="1400" dirty="0">
-                <a:solidFill>
-                  <a:srgbClr val="F5F8FA"/>
-                </a:solidFill>
-                <a:latin typeface="Trebuchet MS"/>
-                <a:cs typeface="Trebuchet MS"/>
-              </a:rPr>
-              <a:t>авторизованный</a:t>
-            </a:r>
-            <a:r>
-              <a:rPr sz="1400" spc="-15" dirty="0">
-                <a:solidFill>
-                  <a:srgbClr val="F5F8FA"/>
-                </a:solidFill>
-                <a:latin typeface="Trebuchet MS"/>
-                <a:cs typeface="Trebuchet MS"/>
-              </a:rPr>
-              <a:t> </a:t>
-            </a:r>
-            <a:r>
-              <a:rPr sz="1400" spc="-10" dirty="0">
-                <a:solidFill>
-                  <a:srgbClr val="F5F8FA"/>
-                </a:solidFill>
-                <a:latin typeface="Trebuchet MS"/>
-                <a:cs typeface="Trebuchet MS"/>
-              </a:rPr>
-              <a:t>пользователь,</a:t>
-            </a:r>
-            <a:r>
-              <a:rPr sz="1400" spc="-40" dirty="0">
-                <a:solidFill>
-                  <a:srgbClr val="F5F8FA"/>
-                </a:solidFill>
-                <a:latin typeface="Trebuchet MS"/>
-                <a:cs typeface="Trebuchet MS"/>
-              </a:rPr>
-              <a:t> </a:t>
-            </a:r>
-            <a:r>
-              <a:rPr sz="1400" dirty="0">
-                <a:solidFill>
-                  <a:srgbClr val="F5F8FA"/>
-                </a:solidFill>
-                <a:latin typeface="Trebuchet MS"/>
-                <a:cs typeface="Trebuchet MS"/>
-              </a:rPr>
-              <a:t>выбранный</a:t>
-            </a:r>
-            <a:r>
-              <a:rPr sz="1400" spc="-20" dirty="0">
-                <a:solidFill>
-                  <a:srgbClr val="F5F8FA"/>
-                </a:solidFill>
-                <a:latin typeface="Trebuchet MS"/>
-                <a:cs typeface="Trebuchet MS"/>
-              </a:rPr>
-              <a:t> </a:t>
-            </a:r>
-            <a:r>
-              <a:rPr sz="1400" spc="-45" dirty="0">
-                <a:solidFill>
-                  <a:srgbClr val="F5F8FA"/>
-                </a:solidFill>
-                <a:latin typeface="Trebuchet MS"/>
-                <a:cs typeface="Trebuchet MS"/>
-              </a:rPr>
-              <a:t>recipient,</a:t>
-            </a:r>
-            <a:r>
-              <a:rPr sz="1400" spc="-60" dirty="0">
-                <a:solidFill>
-                  <a:srgbClr val="F5F8FA"/>
-                </a:solidFill>
-                <a:latin typeface="Trebuchet MS"/>
-                <a:cs typeface="Trebuchet MS"/>
-              </a:rPr>
-              <a:t> </a:t>
-            </a:r>
-            <a:r>
-              <a:rPr sz="1400" spc="-25" dirty="0">
-                <a:solidFill>
-                  <a:srgbClr val="F5F8FA"/>
-                </a:solidFill>
-                <a:latin typeface="Trebuchet MS"/>
-                <a:cs typeface="Trebuchet MS"/>
-              </a:rPr>
-              <a:t>crypto</a:t>
-            </a:r>
-            <a:r>
-              <a:rPr sz="1400" spc="-60" dirty="0">
-                <a:solidFill>
-                  <a:srgbClr val="F5F8FA"/>
-                </a:solidFill>
-                <a:latin typeface="Trebuchet MS"/>
-                <a:cs typeface="Trebuchet MS"/>
-              </a:rPr>
-              <a:t> </a:t>
-            </a:r>
-            <a:r>
-              <a:rPr sz="1400" spc="-10" dirty="0">
-                <a:solidFill>
-                  <a:srgbClr val="F5F8FA"/>
-                </a:solidFill>
-                <a:latin typeface="Trebuchet MS"/>
-                <a:cs typeface="Trebuchet MS"/>
-              </a:rPr>
-              <a:t>container. </a:t>
-            </a:r>
-            <a:r>
-              <a:rPr sz="1400" spc="-40" dirty="0">
-                <a:solidFill>
-                  <a:srgbClr val="F5F8FA"/>
-                </a:solidFill>
-                <a:latin typeface="Trebuchet MS"/>
-                <a:cs typeface="Trebuchet MS"/>
-              </a:rPr>
-              <a:t>Для</a:t>
-            </a:r>
-            <a:r>
-              <a:rPr sz="1400" spc="-55" dirty="0">
-                <a:solidFill>
-                  <a:srgbClr val="F5F8FA"/>
-                </a:solidFill>
-                <a:latin typeface="Trebuchet MS"/>
-                <a:cs typeface="Trebuchet MS"/>
-              </a:rPr>
-              <a:t> </a:t>
-            </a:r>
-            <a:r>
-              <a:rPr sz="1400" spc="-10" dirty="0">
-                <a:solidFill>
-                  <a:srgbClr val="F5F8FA"/>
-                </a:solidFill>
-                <a:latin typeface="Trebuchet MS"/>
-                <a:cs typeface="Trebuchet MS"/>
-              </a:rPr>
-              <a:t>каждого</a:t>
-            </a:r>
-            <a:r>
-              <a:rPr sz="1400" spc="-55" dirty="0">
-                <a:solidFill>
-                  <a:srgbClr val="F5F8FA"/>
-                </a:solidFill>
-                <a:latin typeface="Trebuchet MS"/>
-                <a:cs typeface="Trebuchet MS"/>
-              </a:rPr>
-              <a:t> </a:t>
-            </a:r>
-            <a:r>
-              <a:rPr sz="1400" dirty="0">
-                <a:solidFill>
-                  <a:srgbClr val="F5F8FA"/>
-                </a:solidFill>
-                <a:latin typeface="Trebuchet MS"/>
-                <a:cs typeface="Trebuchet MS"/>
-              </a:rPr>
-              <a:t>домена</a:t>
-            </a:r>
-            <a:r>
-              <a:rPr sz="1400" spc="-65" dirty="0">
-                <a:solidFill>
-                  <a:srgbClr val="F5F8FA"/>
-                </a:solidFill>
-                <a:latin typeface="Trebuchet MS"/>
-                <a:cs typeface="Trebuchet MS"/>
-              </a:rPr>
-              <a:t> </a:t>
-            </a:r>
-            <a:r>
-              <a:rPr sz="1400" dirty="0">
-                <a:solidFill>
-                  <a:srgbClr val="F5F8FA"/>
-                </a:solidFill>
-                <a:latin typeface="Trebuchet MS"/>
-                <a:cs typeface="Trebuchet MS"/>
-              </a:rPr>
-              <a:t>задается</a:t>
-            </a:r>
-            <a:r>
-              <a:rPr sz="1400" spc="-35" dirty="0">
-                <a:solidFill>
-                  <a:srgbClr val="F5F8FA"/>
-                </a:solidFill>
-                <a:latin typeface="Trebuchet MS"/>
-                <a:cs typeface="Trebuchet MS"/>
-              </a:rPr>
-              <a:t> </a:t>
-            </a:r>
-            <a:r>
-              <a:rPr sz="1400" dirty="0">
-                <a:solidFill>
-                  <a:srgbClr val="F5F8FA"/>
-                </a:solidFill>
-                <a:latin typeface="Trebuchet MS"/>
-                <a:cs typeface="Trebuchet MS"/>
-              </a:rPr>
-              <a:t>разрешенный</a:t>
-            </a:r>
-            <a:r>
-              <a:rPr sz="1400" spc="-45" dirty="0">
-                <a:solidFill>
-                  <a:srgbClr val="F5F8FA"/>
-                </a:solidFill>
-                <a:latin typeface="Trebuchet MS"/>
-                <a:cs typeface="Trebuchet MS"/>
-              </a:rPr>
-              <a:t> </a:t>
-            </a:r>
-            <a:r>
-              <a:rPr sz="1400" spc="-20" dirty="0">
-                <a:solidFill>
-                  <a:srgbClr val="F5F8FA"/>
-                </a:solidFill>
-                <a:latin typeface="Trebuchet MS"/>
-                <a:cs typeface="Trebuchet MS"/>
-              </a:rPr>
-              <a:t>тип</a:t>
-            </a:r>
-            <a:r>
-              <a:rPr sz="1400" spc="-45" dirty="0">
-                <a:solidFill>
-                  <a:srgbClr val="F5F8FA"/>
-                </a:solidFill>
-                <a:latin typeface="Trebuchet MS"/>
-                <a:cs typeface="Trebuchet MS"/>
-              </a:rPr>
-              <a:t> </a:t>
-            </a:r>
-            <a:r>
-              <a:rPr sz="1400" spc="-10" dirty="0">
-                <a:solidFill>
-                  <a:srgbClr val="F5F8FA"/>
-                </a:solidFill>
-                <a:latin typeface="Trebuchet MS"/>
-                <a:cs typeface="Trebuchet MS"/>
-              </a:rPr>
-              <a:t>взаимодействия:</a:t>
-            </a:r>
-            <a:r>
-              <a:rPr sz="1400" spc="5" dirty="0">
-                <a:solidFill>
-                  <a:srgbClr val="F5F8FA"/>
-                </a:solidFill>
-                <a:latin typeface="Trebuchet MS"/>
-                <a:cs typeface="Trebuchet MS"/>
-              </a:rPr>
-              <a:t> </a:t>
-            </a:r>
-            <a:r>
-              <a:rPr sz="1400" spc="-10" dirty="0">
-                <a:solidFill>
-                  <a:srgbClr val="F5F8FA"/>
-                </a:solidFill>
-                <a:latin typeface="Trebuchet MS"/>
-                <a:cs typeface="Trebuchet MS"/>
-              </a:rPr>
-              <a:t>chat</a:t>
-            </a:r>
-            <a:r>
-              <a:rPr sz="1400" spc="-50" dirty="0">
-                <a:solidFill>
-                  <a:srgbClr val="F5F8FA"/>
-                </a:solidFill>
-                <a:latin typeface="Trebuchet MS"/>
-                <a:cs typeface="Trebuchet MS"/>
-              </a:rPr>
-              <a:t> </a:t>
-            </a:r>
-            <a:r>
-              <a:rPr sz="1400" spc="-20" dirty="0">
-                <a:solidFill>
-                  <a:srgbClr val="F5F8FA"/>
-                </a:solidFill>
-                <a:latin typeface="Trebuchet MS"/>
-                <a:cs typeface="Trebuchet MS"/>
-              </a:rPr>
-              <a:t>topic</a:t>
-            </a:r>
-            <a:r>
-              <a:rPr sz="1400" spc="-60" dirty="0">
-                <a:solidFill>
-                  <a:srgbClr val="F5F8FA"/>
-                </a:solidFill>
-                <a:latin typeface="Trebuchet MS"/>
-                <a:cs typeface="Trebuchet MS"/>
-              </a:rPr>
-              <a:t> </a:t>
-            </a:r>
-            <a:r>
-              <a:rPr sz="1400" spc="-10" dirty="0">
-                <a:solidFill>
-                  <a:srgbClr val="F5F8FA"/>
-                </a:solidFill>
-                <a:latin typeface="Trebuchet MS"/>
-                <a:cs typeface="Trebuchet MS"/>
-              </a:rPr>
-              <a:t>или</a:t>
-            </a:r>
-            <a:r>
-              <a:rPr sz="1400" spc="-35" dirty="0">
-                <a:solidFill>
-                  <a:srgbClr val="F5F8FA"/>
-                </a:solidFill>
-                <a:latin typeface="Trebuchet MS"/>
-                <a:cs typeface="Trebuchet MS"/>
-              </a:rPr>
-              <a:t> </a:t>
-            </a:r>
-            <a:r>
-              <a:rPr sz="1400" dirty="0">
-                <a:solidFill>
-                  <a:srgbClr val="F5F8FA"/>
-                </a:solidFill>
-                <a:latin typeface="Trebuchet MS"/>
-                <a:cs typeface="Trebuchet MS"/>
-              </a:rPr>
-              <a:t>sensor</a:t>
-            </a:r>
-            <a:r>
-              <a:rPr sz="1400" spc="-70" dirty="0">
-                <a:solidFill>
-                  <a:srgbClr val="F5F8FA"/>
-                </a:solidFill>
-                <a:latin typeface="Trebuchet MS"/>
-                <a:cs typeface="Trebuchet MS"/>
-              </a:rPr>
-              <a:t> </a:t>
-            </a:r>
-            <a:r>
-              <a:rPr sz="1400" spc="-10" dirty="0">
-                <a:solidFill>
-                  <a:srgbClr val="F5F8FA"/>
-                </a:solidFill>
-                <a:latin typeface="Trebuchet MS"/>
-                <a:cs typeface="Trebuchet MS"/>
-              </a:rPr>
-              <a:t>topic.</a:t>
-            </a:r>
-            <a:endParaRPr sz="1400">
-              <a:latin typeface="Trebuchet MS"/>
-              <a:cs typeface="Trebuchet MS"/>
-            </a:endParaRPr>
-          </a:p>
-          <a:p>
-            <a:pPr marL="12700">
-              <a:lnSpc>
-                <a:spcPct val="100000"/>
-              </a:lnSpc>
-              <a:spcBef>
-                <a:spcPts val="40"/>
-              </a:spcBef>
-            </a:pPr>
-            <a:r>
-              <a:rPr sz="1400" spc="-10" dirty="0">
-                <a:solidFill>
-                  <a:srgbClr val="F5F8FA"/>
-                </a:solidFill>
-                <a:latin typeface="Trebuchet MS"/>
-                <a:cs typeface="Trebuchet MS"/>
-              </a:rPr>
-              <a:t>Все,</a:t>
-            </a:r>
-            <a:r>
-              <a:rPr sz="1400" spc="-75" dirty="0">
-                <a:solidFill>
-                  <a:srgbClr val="F5F8FA"/>
-                </a:solidFill>
-                <a:latin typeface="Trebuchet MS"/>
-                <a:cs typeface="Trebuchet MS"/>
-              </a:rPr>
-              <a:t> </a:t>
-            </a:r>
-            <a:r>
-              <a:rPr sz="1400" spc="-10" dirty="0">
-                <a:solidFill>
-                  <a:srgbClr val="F5F8FA"/>
-                </a:solidFill>
-                <a:latin typeface="Trebuchet MS"/>
-                <a:cs typeface="Trebuchet MS"/>
-              </a:rPr>
-              <a:t>что</a:t>
-            </a:r>
-            <a:r>
-              <a:rPr sz="1400" spc="-75" dirty="0">
-                <a:solidFill>
-                  <a:srgbClr val="F5F8FA"/>
-                </a:solidFill>
-                <a:latin typeface="Trebuchet MS"/>
-                <a:cs typeface="Trebuchet MS"/>
-              </a:rPr>
-              <a:t> </a:t>
-            </a:r>
-            <a:r>
-              <a:rPr sz="1400" dirty="0">
-                <a:solidFill>
-                  <a:srgbClr val="F5F8FA"/>
-                </a:solidFill>
-                <a:latin typeface="Trebuchet MS"/>
-                <a:cs typeface="Trebuchet MS"/>
-              </a:rPr>
-              <a:t>не</a:t>
-            </a:r>
-            <a:r>
-              <a:rPr sz="1400" spc="-75" dirty="0">
-                <a:solidFill>
-                  <a:srgbClr val="F5F8FA"/>
-                </a:solidFill>
-                <a:latin typeface="Trebuchet MS"/>
-                <a:cs typeface="Trebuchet MS"/>
-              </a:rPr>
-              <a:t> </a:t>
-            </a:r>
-            <a:r>
-              <a:rPr sz="1400" dirty="0">
-                <a:solidFill>
-                  <a:srgbClr val="F5F8FA"/>
-                </a:solidFill>
-                <a:latin typeface="Trebuchet MS"/>
-                <a:cs typeface="Trebuchet MS"/>
-              </a:rPr>
-              <a:t>описано</a:t>
-            </a:r>
-            <a:r>
-              <a:rPr sz="1400" spc="-30" dirty="0">
-                <a:solidFill>
-                  <a:srgbClr val="F5F8FA"/>
-                </a:solidFill>
-                <a:latin typeface="Trebuchet MS"/>
-                <a:cs typeface="Trebuchet MS"/>
-              </a:rPr>
-              <a:t> </a:t>
-            </a:r>
-            <a:r>
-              <a:rPr sz="1400" spc="-10" dirty="0">
-                <a:solidFill>
-                  <a:srgbClr val="F5F8FA"/>
-                </a:solidFill>
-                <a:latin typeface="Trebuchet MS"/>
-                <a:cs typeface="Trebuchet MS"/>
-              </a:rPr>
-              <a:t>в</a:t>
-            </a:r>
-            <a:r>
-              <a:rPr sz="1400" spc="-80" dirty="0">
-                <a:solidFill>
-                  <a:srgbClr val="F5F8FA"/>
-                </a:solidFill>
-                <a:latin typeface="Trebuchet MS"/>
-                <a:cs typeface="Trebuchet MS"/>
-              </a:rPr>
-              <a:t> </a:t>
-            </a:r>
-            <a:r>
-              <a:rPr sz="1400" spc="-25" dirty="0">
-                <a:solidFill>
-                  <a:srgbClr val="F5F8FA"/>
-                </a:solidFill>
-                <a:latin typeface="Trebuchet MS"/>
-                <a:cs typeface="Trebuchet MS"/>
-              </a:rPr>
-              <a:t>политике,</a:t>
-            </a:r>
-            <a:r>
-              <a:rPr sz="1400" spc="-30" dirty="0">
-                <a:solidFill>
-                  <a:srgbClr val="F5F8FA"/>
-                </a:solidFill>
-                <a:latin typeface="Trebuchet MS"/>
-                <a:cs typeface="Trebuchet MS"/>
-              </a:rPr>
-              <a:t> </a:t>
-            </a:r>
-            <a:r>
-              <a:rPr sz="1400" dirty="0">
-                <a:solidFill>
-                  <a:srgbClr val="F5F8FA"/>
-                </a:solidFill>
-                <a:latin typeface="Trebuchet MS"/>
-                <a:cs typeface="Trebuchet MS"/>
-              </a:rPr>
-              <a:t>считается</a:t>
-            </a:r>
-            <a:r>
-              <a:rPr sz="1400" spc="-60" dirty="0">
-                <a:solidFill>
-                  <a:srgbClr val="F5F8FA"/>
-                </a:solidFill>
-                <a:latin typeface="Trebuchet MS"/>
-                <a:cs typeface="Trebuchet MS"/>
-              </a:rPr>
-              <a:t> </a:t>
-            </a:r>
-            <a:r>
-              <a:rPr sz="1400" dirty="0">
-                <a:solidFill>
-                  <a:srgbClr val="F5F8FA"/>
-                </a:solidFill>
-                <a:latin typeface="Trebuchet MS"/>
-                <a:cs typeface="Trebuchet MS"/>
-              </a:rPr>
-              <a:t>неразрешенным</a:t>
-            </a:r>
-            <a:r>
-              <a:rPr sz="1400" spc="-60" dirty="0">
-                <a:solidFill>
-                  <a:srgbClr val="F5F8FA"/>
-                </a:solidFill>
-                <a:latin typeface="Trebuchet MS"/>
-                <a:cs typeface="Trebuchet MS"/>
-              </a:rPr>
-              <a:t> </a:t>
-            </a:r>
-            <a:r>
-              <a:rPr sz="1400" dirty="0">
-                <a:solidFill>
-                  <a:srgbClr val="F5F8FA"/>
-                </a:solidFill>
-                <a:latin typeface="Trebuchet MS"/>
-                <a:cs typeface="Trebuchet MS"/>
-              </a:rPr>
-              <a:t>по</a:t>
-            </a:r>
-            <a:r>
-              <a:rPr sz="1400" spc="-65" dirty="0">
-                <a:solidFill>
-                  <a:srgbClr val="F5F8FA"/>
-                </a:solidFill>
-                <a:latin typeface="Trebuchet MS"/>
-                <a:cs typeface="Trebuchet MS"/>
-              </a:rPr>
-              <a:t> </a:t>
-            </a:r>
-            <a:r>
-              <a:rPr sz="1400" spc="-10" dirty="0">
-                <a:solidFill>
-                  <a:srgbClr val="F5F8FA"/>
-                </a:solidFill>
-                <a:latin typeface="Trebuchet MS"/>
-                <a:cs typeface="Trebuchet MS"/>
-              </a:rPr>
-              <a:t>умолчанию.</a:t>
-            </a:r>
-            <a:endParaRPr sz="1400">
-              <a:latin typeface="Trebuchet MS"/>
-              <a:cs typeface="Trebuchet MS"/>
-            </a:endParaRPr>
-          </a:p>
-        </p:txBody>
-      </p:sp>
-      <p:sp>
-        <p:nvSpPr>
-          <p:cNvPr id="14" name="object 14"/>
-          <p:cNvSpPr txBox="1"/>
-          <p:nvPr/>
-        </p:nvSpPr>
-        <p:spPr>
-          <a:xfrm>
-            <a:off x="11421871" y="6408012"/>
-            <a:ext cx="160020" cy="180340"/>
-          </a:xfrm>
-          <a:prstGeom prst="rect">
-            <a:avLst/>
-          </a:prstGeom>
-        </p:spPr>
-        <p:txBody>
-          <a:bodyPr vert="horz" wrap="square" lIns="0" tIns="4445" rIns="0" bIns="0" rtlCol="0">
-            <a:spAutoFit/>
-          </a:bodyPr>
-          <a:lstStyle/>
-          <a:p>
-            <a:pPr marL="12700">
-              <a:lnSpc>
-                <a:spcPct val="100000"/>
-              </a:lnSpc>
-              <a:spcBef>
-                <a:spcPts val="35"/>
-              </a:spcBef>
-            </a:pPr>
-            <a:r>
-              <a:rPr sz="1000" spc="-25" dirty="0">
-                <a:solidFill>
-                  <a:srgbClr val="A9B5C2"/>
-                </a:solidFill>
-                <a:latin typeface="Trebuchet MS"/>
-                <a:cs typeface="Trebuchet MS"/>
-              </a:rPr>
-              <a:t>05</a:t>
-            </a:r>
-            <a:endParaRPr sz="1000">
-              <a:latin typeface="Trebuchet MS"/>
-              <a:cs typeface="Trebuchet MS"/>
-            </a:endParaRPr>
-          </a:p>
-        </p:txBody>
-      </p:sp>
+      </p:pic>
     </p:spTree>
   </p:cSld>
   <p:clrMapOvr>
@@ -24781,1975 +22529,30 @@
           <a:chExt cx="0" cy="0"/>
         </a:xfrm>
       </p:grpSpPr>
-      <p:sp>
-        <p:nvSpPr>
-          <p:cNvPr id="2" name="object 2"/>
-          <p:cNvSpPr txBox="1"/>
+      <p:pic>
+        <p:nvPicPr>
+          <p:cNvPr id="33" name="Рисунок 32"/>
+          <p:cNvPicPr>
+            <a:picLocks noChangeAspect="1"/>
+          </p:cNvPicPr>
           <p:nvPr/>
-        </p:nvSpPr>
+        </p:nvPicPr>
+        <p:blipFill>
+          <a:blip r:embed="rId2"/>
+          <a:stretch>
+            <a:fillRect/>
+          </a:stretch>
+        </p:blipFill>
         <p:spPr>
           <a:xfrm>
-            <a:off x="581659" y="331088"/>
-            <a:ext cx="647700" cy="170180"/>
+            <a:off x="-851" y="-33821"/>
+            <a:ext cx="12193702" cy="6925642"/>
           </a:xfrm>
           <a:prstGeom prst="rect">
             <a:avLst/>
           </a:prstGeom>
         </p:spPr>
-        <p:txBody>
-          <a:bodyPr vert="horz" wrap="square" lIns="0" tIns="12065" rIns="0" bIns="0" rtlCol="0">
-            <a:spAutoFit/>
-          </a:bodyPr>
-          <a:lstStyle/>
-          <a:p>
-            <a:pPr marL="12700">
-              <a:lnSpc>
-                <a:spcPct val="100000"/>
-              </a:lnSpc>
-              <a:spcBef>
-                <a:spcPts val="95"/>
-              </a:spcBef>
-            </a:pPr>
-            <a:r>
-              <a:rPr sz="950" b="1" spc="-35" dirty="0">
-                <a:solidFill>
-                  <a:srgbClr val="1F9BD1"/>
-                </a:solidFill>
-                <a:latin typeface="Tahoma"/>
-                <a:cs typeface="Tahoma"/>
-              </a:rPr>
-              <a:t>SEQUENCE</a:t>
-            </a:r>
-            <a:endParaRPr sz="950">
-              <a:latin typeface="Tahoma"/>
-              <a:cs typeface="Tahoma"/>
-            </a:endParaRPr>
-          </a:p>
-        </p:txBody>
-      </p:sp>
-      <p:sp>
-        <p:nvSpPr>
-          <p:cNvPr id="3" name="object 3" descr="$PPTXTitle"/>
-          <p:cNvSpPr txBox="1">
-            <a:spLocks noGrp="1"/>
-          </p:cNvSpPr>
-          <p:nvPr>
-            <p:ph type="title"/>
-          </p:nvPr>
-        </p:nvSpPr>
-        <p:spPr>
-          <a:prstGeom prst="rect">
-            <a:avLst/>
-          </a:prstGeom>
-        </p:spPr>
-        <p:txBody>
-          <a:bodyPr vert="horz" wrap="square" lIns="0" tIns="12700" rIns="0" bIns="0" rtlCol="0">
-            <a:spAutoFit/>
-          </a:bodyPr>
-          <a:lstStyle/>
-          <a:p>
-            <a:pPr marL="12700">
-              <a:lnSpc>
-                <a:spcPct val="100000"/>
-              </a:lnSpc>
-              <a:spcBef>
-                <a:spcPts val="100"/>
-              </a:spcBef>
-            </a:pPr>
-            <a:r>
-              <a:rPr spc="-165" dirty="0"/>
-              <a:t>Базовый</a:t>
-            </a:r>
-            <a:r>
-              <a:rPr spc="-200" dirty="0"/>
-              <a:t> </a:t>
-            </a:r>
-            <a:r>
-              <a:rPr spc="-110" dirty="0"/>
-              <a:t>сценарий</a:t>
-            </a:r>
-            <a:r>
-              <a:rPr spc="-190" dirty="0"/>
-              <a:t> </a:t>
-            </a:r>
-            <a:r>
-              <a:rPr spc="-170" dirty="0"/>
-              <a:t>отправки</a:t>
-            </a:r>
-            <a:r>
-              <a:rPr spc="-200" dirty="0"/>
-              <a:t> </a:t>
-            </a:r>
-            <a:r>
-              <a:rPr spc="-100" dirty="0"/>
-              <a:t>сообщения</a:t>
-            </a:r>
-          </a:p>
-        </p:txBody>
-      </p:sp>
-      <p:sp>
-        <p:nvSpPr>
-          <p:cNvPr id="4" name="object 4"/>
-          <p:cNvSpPr/>
-          <p:nvPr/>
-        </p:nvSpPr>
-        <p:spPr>
-          <a:xfrm>
-            <a:off x="502919" y="1298447"/>
-            <a:ext cx="11155680" cy="0"/>
-          </a:xfrm>
-          <a:custGeom>
-            <a:avLst/>
-            <a:gdLst/>
-            <a:ahLst/>
-            <a:cxnLst/>
-            <a:rect l="l" t="t" r="r" b="b"/>
-            <a:pathLst>
-              <a:path w="11155680">
-                <a:moveTo>
-                  <a:pt x="0" y="0"/>
-                </a:moveTo>
-                <a:lnTo>
-                  <a:pt x="11155680" y="0"/>
-                </a:lnTo>
-              </a:path>
-            </a:pathLst>
-          </a:custGeom>
-          <a:ln w="13970">
-            <a:solidFill>
-              <a:srgbClr val="304355"/>
-            </a:solidFill>
-          </a:ln>
-        </p:spPr>
-        <p:txBody>
-          <a:bodyPr wrap="square" lIns="0" tIns="0" rIns="0" bIns="0" rtlCol="0"/>
-          <a:lstStyle/>
-          <a:p>
-            <a:endParaRPr/>
-          </a:p>
-        </p:txBody>
-      </p:sp>
-      <p:sp>
-        <p:nvSpPr>
-          <p:cNvPr id="5" name="object 5"/>
-          <p:cNvSpPr/>
-          <p:nvPr/>
-        </p:nvSpPr>
-        <p:spPr>
-          <a:xfrm>
-            <a:off x="502919" y="6336791"/>
-            <a:ext cx="11155680" cy="0"/>
-          </a:xfrm>
-          <a:custGeom>
-            <a:avLst/>
-            <a:gdLst/>
-            <a:ahLst/>
-            <a:cxnLst/>
-            <a:rect l="l" t="t" r="r" b="b"/>
-            <a:pathLst>
-              <a:path w="11155680">
-                <a:moveTo>
-                  <a:pt x="0" y="0"/>
-                </a:moveTo>
-                <a:lnTo>
-                  <a:pt x="11155680" y="0"/>
-                </a:lnTo>
-              </a:path>
-            </a:pathLst>
-          </a:custGeom>
-          <a:ln w="8890">
-            <a:solidFill>
-              <a:srgbClr val="304355"/>
-            </a:solidFill>
-          </a:ln>
-        </p:spPr>
-        <p:txBody>
-          <a:bodyPr wrap="square" lIns="0" tIns="0" rIns="0" bIns="0" rtlCol="0"/>
-          <a:lstStyle/>
-          <a:p>
-            <a:endParaRPr/>
-          </a:p>
-        </p:txBody>
-      </p:sp>
-      <p:sp>
-        <p:nvSpPr>
-          <p:cNvPr id="6" name="object 6"/>
-          <p:cNvSpPr txBox="1"/>
-          <p:nvPr/>
-        </p:nvSpPr>
-        <p:spPr>
-          <a:xfrm>
-            <a:off x="777240" y="1600200"/>
-            <a:ext cx="1234440" cy="411480"/>
-          </a:xfrm>
-          <a:prstGeom prst="rect">
-            <a:avLst/>
-          </a:prstGeom>
-          <a:solidFill>
-            <a:srgbClr val="1F9BD1"/>
-          </a:solidFill>
-          <a:ln w="15239">
-            <a:solidFill>
-              <a:srgbClr val="304355"/>
-            </a:solidFill>
-          </a:ln>
-        </p:spPr>
-        <p:txBody>
-          <a:bodyPr vert="horz" wrap="square" lIns="0" tIns="34290" rIns="0" bIns="0" rtlCol="0">
-            <a:spAutoFit/>
-          </a:bodyPr>
-          <a:lstStyle/>
-          <a:p>
-            <a:pPr>
-              <a:lnSpc>
-                <a:spcPct val="100000"/>
-              </a:lnSpc>
-              <a:spcBef>
-                <a:spcPts val="270"/>
-              </a:spcBef>
-            </a:pPr>
-            <a:endParaRPr sz="700">
-              <a:latin typeface="Times New Roman"/>
-              <a:cs typeface="Times New Roman"/>
-            </a:endParaRPr>
-          </a:p>
-          <a:p>
-            <a:pPr marL="219075">
-              <a:lnSpc>
-                <a:spcPct val="100000"/>
-              </a:lnSpc>
-            </a:pPr>
-            <a:r>
-              <a:rPr sz="700" b="1" spc="-20" dirty="0">
-                <a:solidFill>
-                  <a:srgbClr val="F5F8FA"/>
-                </a:solidFill>
-                <a:latin typeface="Tahoma"/>
-                <a:cs typeface="Tahoma"/>
-              </a:rPr>
-              <a:t>User</a:t>
-            </a:r>
-            <a:endParaRPr sz="700">
-              <a:latin typeface="Tahoma"/>
-              <a:cs typeface="Tahoma"/>
-            </a:endParaRPr>
-          </a:p>
-        </p:txBody>
-      </p:sp>
-      <p:sp>
-        <p:nvSpPr>
-          <p:cNvPr id="7" name="object 7"/>
-          <p:cNvSpPr/>
-          <p:nvPr/>
-        </p:nvSpPr>
-        <p:spPr>
-          <a:xfrm>
-            <a:off x="1399032" y="2029967"/>
-            <a:ext cx="0" cy="3429000"/>
-          </a:xfrm>
-          <a:custGeom>
-            <a:avLst/>
-            <a:gdLst/>
-            <a:ahLst/>
-            <a:cxnLst/>
-            <a:rect l="l" t="t" r="r" b="b"/>
-            <a:pathLst>
-              <a:path h="3429000">
-                <a:moveTo>
-                  <a:pt x="0" y="0"/>
-                </a:moveTo>
-                <a:lnTo>
-                  <a:pt x="0" y="3429000"/>
-                </a:lnTo>
-              </a:path>
-            </a:pathLst>
-          </a:custGeom>
-          <a:ln w="12700">
-            <a:solidFill>
-              <a:srgbClr val="304355"/>
-            </a:solidFill>
-          </a:ln>
-        </p:spPr>
-        <p:txBody>
-          <a:bodyPr wrap="square" lIns="0" tIns="0" rIns="0" bIns="0" rtlCol="0"/>
-          <a:lstStyle/>
-          <a:p>
-            <a:endParaRPr/>
-          </a:p>
-        </p:txBody>
-      </p:sp>
-      <p:sp>
-        <p:nvSpPr>
-          <p:cNvPr id="8" name="object 8"/>
-          <p:cNvSpPr txBox="1"/>
-          <p:nvPr/>
-        </p:nvSpPr>
-        <p:spPr>
-          <a:xfrm>
-            <a:off x="2514600" y="1600200"/>
-            <a:ext cx="1234440" cy="411480"/>
-          </a:xfrm>
-          <a:prstGeom prst="rect">
-            <a:avLst/>
-          </a:prstGeom>
-          <a:solidFill>
-            <a:srgbClr val="151D27"/>
-          </a:solidFill>
-          <a:ln w="15240">
-            <a:solidFill>
-              <a:srgbClr val="304355"/>
-            </a:solidFill>
-          </a:ln>
-        </p:spPr>
-        <p:txBody>
-          <a:bodyPr vert="horz" wrap="square" lIns="0" tIns="34290" rIns="0" bIns="0" rtlCol="0">
-            <a:spAutoFit/>
-          </a:bodyPr>
-          <a:lstStyle/>
-          <a:p>
-            <a:pPr>
-              <a:lnSpc>
-                <a:spcPct val="100000"/>
-              </a:lnSpc>
-              <a:spcBef>
-                <a:spcPts val="270"/>
-              </a:spcBef>
-            </a:pPr>
-            <a:endParaRPr sz="700">
-              <a:latin typeface="Times New Roman"/>
-              <a:cs typeface="Times New Roman"/>
-            </a:endParaRPr>
-          </a:p>
-          <a:p>
-            <a:pPr marL="219710">
-              <a:lnSpc>
-                <a:spcPct val="100000"/>
-              </a:lnSpc>
-            </a:pPr>
-            <a:r>
-              <a:rPr sz="700" b="1" spc="-55" dirty="0">
-                <a:solidFill>
-                  <a:srgbClr val="F5F8FA"/>
-                </a:solidFill>
-                <a:latin typeface="Tahoma"/>
-                <a:cs typeface="Tahoma"/>
-              </a:rPr>
-              <a:t>Web</a:t>
-            </a:r>
-            <a:r>
-              <a:rPr sz="700" b="1" spc="-40" dirty="0">
-                <a:solidFill>
-                  <a:srgbClr val="F5F8FA"/>
-                </a:solidFill>
-                <a:latin typeface="Tahoma"/>
-                <a:cs typeface="Tahoma"/>
-              </a:rPr>
-              <a:t> </a:t>
-            </a:r>
-            <a:r>
-              <a:rPr sz="700" b="1" spc="-35" dirty="0">
-                <a:solidFill>
-                  <a:srgbClr val="F5F8FA"/>
-                </a:solidFill>
-                <a:latin typeface="Tahoma"/>
-                <a:cs typeface="Tahoma"/>
-              </a:rPr>
-              <a:t>UI</a:t>
-            </a:r>
-            <a:endParaRPr sz="700">
-              <a:latin typeface="Tahoma"/>
-              <a:cs typeface="Tahoma"/>
-            </a:endParaRPr>
-          </a:p>
-        </p:txBody>
-      </p:sp>
-      <p:sp>
-        <p:nvSpPr>
-          <p:cNvPr id="9" name="object 9"/>
-          <p:cNvSpPr/>
-          <p:nvPr/>
-        </p:nvSpPr>
-        <p:spPr>
-          <a:xfrm>
-            <a:off x="3136392" y="2029967"/>
-            <a:ext cx="0" cy="3429000"/>
-          </a:xfrm>
-          <a:custGeom>
-            <a:avLst/>
-            <a:gdLst/>
-            <a:ahLst/>
-            <a:cxnLst/>
-            <a:rect l="l" t="t" r="r" b="b"/>
-            <a:pathLst>
-              <a:path h="3429000">
-                <a:moveTo>
-                  <a:pt x="0" y="0"/>
-                </a:moveTo>
-                <a:lnTo>
-                  <a:pt x="0" y="3429000"/>
-                </a:lnTo>
-              </a:path>
-            </a:pathLst>
-          </a:custGeom>
-          <a:ln w="12700">
-            <a:solidFill>
-              <a:srgbClr val="304355"/>
-            </a:solidFill>
-          </a:ln>
-        </p:spPr>
-        <p:txBody>
-          <a:bodyPr wrap="square" lIns="0" tIns="0" rIns="0" bIns="0" rtlCol="0"/>
-          <a:lstStyle/>
-          <a:p>
-            <a:endParaRPr/>
-          </a:p>
-        </p:txBody>
-      </p:sp>
-      <p:sp>
-        <p:nvSpPr>
-          <p:cNvPr id="10" name="object 10"/>
-          <p:cNvSpPr txBox="1"/>
-          <p:nvPr/>
-        </p:nvSpPr>
-        <p:spPr>
-          <a:xfrm>
-            <a:off x="4480559" y="1600200"/>
-            <a:ext cx="1234440" cy="411480"/>
-          </a:xfrm>
-          <a:prstGeom prst="rect">
-            <a:avLst/>
-          </a:prstGeom>
-          <a:solidFill>
-            <a:srgbClr val="318537"/>
-          </a:solidFill>
-          <a:ln w="15240">
-            <a:solidFill>
-              <a:srgbClr val="304355"/>
-            </a:solidFill>
-          </a:ln>
-        </p:spPr>
-        <p:txBody>
-          <a:bodyPr vert="horz" wrap="square" lIns="0" tIns="34290" rIns="0" bIns="0" rtlCol="0">
-            <a:spAutoFit/>
-          </a:bodyPr>
-          <a:lstStyle/>
-          <a:p>
-            <a:pPr>
-              <a:lnSpc>
-                <a:spcPct val="100000"/>
-              </a:lnSpc>
-              <a:spcBef>
-                <a:spcPts val="270"/>
-              </a:spcBef>
-            </a:pPr>
-            <a:endParaRPr sz="700">
-              <a:latin typeface="Times New Roman"/>
-              <a:cs typeface="Times New Roman"/>
-            </a:endParaRPr>
-          </a:p>
-          <a:p>
-            <a:pPr marL="219710">
-              <a:lnSpc>
-                <a:spcPct val="100000"/>
-              </a:lnSpc>
-            </a:pPr>
-            <a:r>
-              <a:rPr sz="700" b="1" spc="-25" dirty="0">
-                <a:solidFill>
-                  <a:srgbClr val="F5F8FA"/>
-                </a:solidFill>
-                <a:latin typeface="Tahoma"/>
-                <a:cs typeface="Tahoma"/>
-              </a:rPr>
-              <a:t>API</a:t>
-            </a:r>
-            <a:endParaRPr sz="700">
-              <a:latin typeface="Tahoma"/>
-              <a:cs typeface="Tahoma"/>
-            </a:endParaRPr>
-          </a:p>
-        </p:txBody>
-      </p:sp>
-      <p:sp>
-        <p:nvSpPr>
-          <p:cNvPr id="11" name="object 11"/>
-          <p:cNvSpPr/>
-          <p:nvPr/>
-        </p:nvSpPr>
-        <p:spPr>
-          <a:xfrm>
-            <a:off x="5102352" y="2029967"/>
-            <a:ext cx="0" cy="3429000"/>
-          </a:xfrm>
-          <a:custGeom>
-            <a:avLst/>
-            <a:gdLst/>
-            <a:ahLst/>
-            <a:cxnLst/>
-            <a:rect l="l" t="t" r="r" b="b"/>
-            <a:pathLst>
-              <a:path h="3429000">
-                <a:moveTo>
-                  <a:pt x="0" y="0"/>
-                </a:moveTo>
-                <a:lnTo>
-                  <a:pt x="0" y="3429000"/>
-                </a:lnTo>
-              </a:path>
-            </a:pathLst>
-          </a:custGeom>
-          <a:ln w="12700">
-            <a:solidFill>
-              <a:srgbClr val="304355"/>
-            </a:solidFill>
-          </a:ln>
-        </p:spPr>
-        <p:txBody>
-          <a:bodyPr wrap="square" lIns="0" tIns="0" rIns="0" bIns="0" rtlCol="0"/>
-          <a:lstStyle/>
-          <a:p>
-            <a:endParaRPr/>
-          </a:p>
-        </p:txBody>
-      </p:sp>
-      <p:sp>
-        <p:nvSpPr>
-          <p:cNvPr id="12" name="object 12"/>
-          <p:cNvSpPr txBox="1"/>
-          <p:nvPr/>
-        </p:nvSpPr>
-        <p:spPr>
-          <a:xfrm>
-            <a:off x="6446520" y="1600200"/>
-            <a:ext cx="1234440" cy="411480"/>
-          </a:xfrm>
-          <a:prstGeom prst="rect">
-            <a:avLst/>
-          </a:prstGeom>
-          <a:solidFill>
-            <a:srgbClr val="318537"/>
-          </a:solidFill>
-          <a:ln w="15240">
-            <a:solidFill>
-              <a:srgbClr val="304355"/>
-            </a:solidFill>
-          </a:ln>
-        </p:spPr>
-        <p:txBody>
-          <a:bodyPr vert="horz" wrap="square" lIns="0" tIns="34290" rIns="0" bIns="0" rtlCol="0">
-            <a:spAutoFit/>
-          </a:bodyPr>
-          <a:lstStyle/>
-          <a:p>
-            <a:pPr>
-              <a:lnSpc>
-                <a:spcPct val="100000"/>
-              </a:lnSpc>
-              <a:spcBef>
-                <a:spcPts val="270"/>
-              </a:spcBef>
-            </a:pPr>
-            <a:endParaRPr sz="700">
-              <a:latin typeface="Times New Roman"/>
-              <a:cs typeface="Times New Roman"/>
-            </a:endParaRPr>
-          </a:p>
-          <a:p>
-            <a:pPr marL="220345">
-              <a:lnSpc>
-                <a:spcPct val="100000"/>
-              </a:lnSpc>
-            </a:pPr>
-            <a:r>
-              <a:rPr sz="700" b="1" spc="-10" dirty="0">
-                <a:solidFill>
-                  <a:srgbClr val="F5F8FA"/>
-                </a:solidFill>
-                <a:latin typeface="Tahoma"/>
-                <a:cs typeface="Tahoma"/>
-              </a:rPr>
-              <a:t>Crypto</a:t>
-            </a:r>
-            <a:endParaRPr sz="700">
-              <a:latin typeface="Tahoma"/>
-              <a:cs typeface="Tahoma"/>
-            </a:endParaRPr>
-          </a:p>
-        </p:txBody>
-      </p:sp>
-      <p:sp>
-        <p:nvSpPr>
-          <p:cNvPr id="13" name="object 13"/>
-          <p:cNvSpPr/>
-          <p:nvPr/>
-        </p:nvSpPr>
-        <p:spPr>
-          <a:xfrm>
-            <a:off x="7068311" y="2029967"/>
-            <a:ext cx="0" cy="3429000"/>
-          </a:xfrm>
-          <a:custGeom>
-            <a:avLst/>
-            <a:gdLst/>
-            <a:ahLst/>
-            <a:cxnLst/>
-            <a:rect l="l" t="t" r="r" b="b"/>
-            <a:pathLst>
-              <a:path h="3429000">
-                <a:moveTo>
-                  <a:pt x="0" y="0"/>
-                </a:moveTo>
-                <a:lnTo>
-                  <a:pt x="0" y="3429000"/>
-                </a:lnTo>
-              </a:path>
-            </a:pathLst>
-          </a:custGeom>
-          <a:ln w="12700">
-            <a:solidFill>
-              <a:srgbClr val="304355"/>
-            </a:solidFill>
-          </a:ln>
-        </p:spPr>
-        <p:txBody>
-          <a:bodyPr wrap="square" lIns="0" tIns="0" rIns="0" bIns="0" rtlCol="0"/>
-          <a:lstStyle/>
-          <a:p>
-            <a:endParaRPr/>
-          </a:p>
-        </p:txBody>
-      </p:sp>
-      <p:sp>
-        <p:nvSpPr>
-          <p:cNvPr id="14" name="object 14"/>
-          <p:cNvSpPr txBox="1"/>
-          <p:nvPr/>
-        </p:nvSpPr>
-        <p:spPr>
-          <a:xfrm>
-            <a:off x="8412480" y="1600200"/>
-            <a:ext cx="1234440" cy="411480"/>
-          </a:xfrm>
-          <a:prstGeom prst="rect">
-            <a:avLst/>
-          </a:prstGeom>
-          <a:solidFill>
-            <a:srgbClr val="151D27"/>
-          </a:solidFill>
-          <a:ln w="15240">
-            <a:solidFill>
-              <a:srgbClr val="304355"/>
-            </a:solidFill>
-          </a:ln>
-        </p:spPr>
-        <p:txBody>
-          <a:bodyPr vert="horz" wrap="square" lIns="0" tIns="34290" rIns="0" bIns="0" rtlCol="0">
-            <a:spAutoFit/>
-          </a:bodyPr>
-          <a:lstStyle/>
-          <a:p>
-            <a:pPr>
-              <a:lnSpc>
-                <a:spcPct val="100000"/>
-              </a:lnSpc>
-              <a:spcBef>
-                <a:spcPts val="270"/>
-              </a:spcBef>
-            </a:pPr>
-            <a:endParaRPr sz="700">
-              <a:latin typeface="Times New Roman"/>
-              <a:cs typeface="Times New Roman"/>
-            </a:endParaRPr>
-          </a:p>
-          <a:p>
-            <a:pPr marL="220345">
-              <a:lnSpc>
-                <a:spcPct val="100000"/>
-              </a:lnSpc>
-            </a:pPr>
-            <a:r>
-              <a:rPr sz="700" b="1" spc="-65" dirty="0">
-                <a:solidFill>
-                  <a:srgbClr val="F5F8FA"/>
-                </a:solidFill>
-                <a:latin typeface="Tahoma"/>
-                <a:cs typeface="Tahoma"/>
-              </a:rPr>
-              <a:t>локальная</a:t>
-            </a:r>
-            <a:r>
-              <a:rPr sz="700" b="1" spc="20" dirty="0">
-                <a:solidFill>
-                  <a:srgbClr val="F5F8FA"/>
-                </a:solidFill>
-                <a:latin typeface="Tahoma"/>
-                <a:cs typeface="Tahoma"/>
-              </a:rPr>
-              <a:t> </a:t>
-            </a:r>
-            <a:r>
-              <a:rPr sz="700" b="1" spc="-25" dirty="0">
-                <a:solidFill>
-                  <a:srgbClr val="F5F8FA"/>
-                </a:solidFill>
-                <a:latin typeface="Tahoma"/>
-                <a:cs typeface="Tahoma"/>
-              </a:rPr>
-              <a:t>БД</a:t>
-            </a:r>
-            <a:endParaRPr sz="700">
-              <a:latin typeface="Tahoma"/>
-              <a:cs typeface="Tahoma"/>
-            </a:endParaRPr>
-          </a:p>
-        </p:txBody>
-      </p:sp>
-      <p:sp>
-        <p:nvSpPr>
-          <p:cNvPr id="15" name="object 15"/>
-          <p:cNvSpPr/>
-          <p:nvPr/>
-        </p:nvSpPr>
-        <p:spPr>
-          <a:xfrm>
-            <a:off x="9034271" y="2029967"/>
-            <a:ext cx="0" cy="3429000"/>
-          </a:xfrm>
-          <a:custGeom>
-            <a:avLst/>
-            <a:gdLst/>
-            <a:ahLst/>
-            <a:cxnLst/>
-            <a:rect l="l" t="t" r="r" b="b"/>
-            <a:pathLst>
-              <a:path h="3429000">
-                <a:moveTo>
-                  <a:pt x="0" y="0"/>
-                </a:moveTo>
-                <a:lnTo>
-                  <a:pt x="0" y="3429000"/>
-                </a:lnTo>
-              </a:path>
-            </a:pathLst>
-          </a:custGeom>
-          <a:ln w="12700">
-            <a:solidFill>
-              <a:srgbClr val="304355"/>
-            </a:solidFill>
-          </a:ln>
-        </p:spPr>
-        <p:txBody>
-          <a:bodyPr wrap="square" lIns="0" tIns="0" rIns="0" bIns="0" rtlCol="0"/>
-          <a:lstStyle/>
-          <a:p>
-            <a:endParaRPr/>
-          </a:p>
-        </p:txBody>
-      </p:sp>
-      <p:sp>
-        <p:nvSpPr>
-          <p:cNvPr id="16" name="object 16"/>
-          <p:cNvSpPr txBox="1"/>
-          <p:nvPr/>
-        </p:nvSpPr>
-        <p:spPr>
-          <a:xfrm>
-            <a:off x="10195559" y="1600200"/>
-            <a:ext cx="1234440" cy="411480"/>
-          </a:xfrm>
-          <a:prstGeom prst="rect">
-            <a:avLst/>
-          </a:prstGeom>
-          <a:solidFill>
-            <a:srgbClr val="6E49A1"/>
-          </a:solidFill>
-          <a:ln w="15240">
-            <a:solidFill>
-              <a:srgbClr val="304355"/>
-            </a:solidFill>
-          </a:ln>
-        </p:spPr>
-        <p:txBody>
-          <a:bodyPr vert="horz" wrap="square" lIns="0" tIns="34290" rIns="0" bIns="0" rtlCol="0">
-            <a:spAutoFit/>
-          </a:bodyPr>
-          <a:lstStyle/>
-          <a:p>
-            <a:pPr>
-              <a:lnSpc>
-                <a:spcPct val="100000"/>
-              </a:lnSpc>
-              <a:spcBef>
-                <a:spcPts val="270"/>
-              </a:spcBef>
-            </a:pPr>
-            <a:endParaRPr sz="700">
-              <a:latin typeface="Times New Roman"/>
-              <a:cs typeface="Times New Roman"/>
-            </a:endParaRPr>
-          </a:p>
-          <a:p>
-            <a:pPr marL="220345">
-              <a:lnSpc>
-                <a:spcPct val="100000"/>
-              </a:lnSpc>
-            </a:pPr>
-            <a:r>
-              <a:rPr sz="700" b="1" spc="-10" dirty="0">
-                <a:solidFill>
-                  <a:srgbClr val="F5F8FA"/>
-                </a:solidFill>
-                <a:latin typeface="Tahoma"/>
-                <a:cs typeface="Tahoma"/>
-              </a:rPr>
-              <a:t>Kafka</a:t>
-            </a:r>
-            <a:endParaRPr sz="700">
-              <a:latin typeface="Tahoma"/>
-              <a:cs typeface="Tahoma"/>
-            </a:endParaRPr>
-          </a:p>
-        </p:txBody>
-      </p:sp>
-      <p:sp>
-        <p:nvSpPr>
-          <p:cNvPr id="17" name="object 17"/>
-          <p:cNvSpPr/>
-          <p:nvPr/>
-        </p:nvSpPr>
-        <p:spPr>
-          <a:xfrm>
-            <a:off x="1463039" y="2293620"/>
-            <a:ext cx="1554480" cy="76200"/>
-          </a:xfrm>
-          <a:custGeom>
-            <a:avLst/>
-            <a:gdLst/>
-            <a:ahLst/>
-            <a:cxnLst/>
-            <a:rect l="l" t="t" r="r" b="b"/>
-            <a:pathLst>
-              <a:path w="1554480" h="76200">
-                <a:moveTo>
-                  <a:pt x="1478280" y="0"/>
-                </a:moveTo>
-                <a:lnTo>
-                  <a:pt x="1478280" y="76200"/>
-                </a:lnTo>
-                <a:lnTo>
-                  <a:pt x="1539240" y="45719"/>
-                </a:lnTo>
-                <a:lnTo>
-                  <a:pt x="1490980" y="45719"/>
-                </a:lnTo>
-                <a:lnTo>
-                  <a:pt x="1490980" y="30479"/>
-                </a:lnTo>
-                <a:lnTo>
-                  <a:pt x="1539239" y="30479"/>
-                </a:lnTo>
-                <a:lnTo>
-                  <a:pt x="1478280" y="0"/>
-                </a:lnTo>
-                <a:close/>
-              </a:path>
-              <a:path w="1554480" h="76200">
-                <a:moveTo>
-                  <a:pt x="1478280" y="30479"/>
-                </a:moveTo>
-                <a:lnTo>
-                  <a:pt x="0" y="30479"/>
-                </a:lnTo>
-                <a:lnTo>
-                  <a:pt x="0" y="45719"/>
-                </a:lnTo>
-                <a:lnTo>
-                  <a:pt x="1478280" y="45719"/>
-                </a:lnTo>
-                <a:lnTo>
-                  <a:pt x="1478280" y="30479"/>
-                </a:lnTo>
-                <a:close/>
-              </a:path>
-              <a:path w="1554480" h="76200">
-                <a:moveTo>
-                  <a:pt x="1539239" y="30479"/>
-                </a:moveTo>
-                <a:lnTo>
-                  <a:pt x="1490980" y="30479"/>
-                </a:lnTo>
-                <a:lnTo>
-                  <a:pt x="1490980" y="45719"/>
-                </a:lnTo>
-                <a:lnTo>
-                  <a:pt x="1539240" y="45719"/>
-                </a:lnTo>
-                <a:lnTo>
-                  <a:pt x="1554480" y="38100"/>
-                </a:lnTo>
-                <a:lnTo>
-                  <a:pt x="1539239" y="30479"/>
-                </a:lnTo>
-                <a:close/>
-              </a:path>
-            </a:pathLst>
-          </a:custGeom>
-          <a:solidFill>
-            <a:srgbClr val="FFFFFF"/>
-          </a:solidFill>
-        </p:spPr>
-        <p:txBody>
-          <a:bodyPr wrap="square" lIns="0" tIns="0" rIns="0" bIns="0" rtlCol="0"/>
-          <a:lstStyle/>
-          <a:p>
-            <a:endParaRPr/>
-          </a:p>
-        </p:txBody>
-      </p:sp>
-      <p:grpSp>
-        <p:nvGrpSpPr>
-          <p:cNvPr id="18" name="object 18"/>
-          <p:cNvGrpSpPr/>
-          <p:nvPr/>
-        </p:nvGrpSpPr>
-        <p:grpSpPr>
-          <a:xfrm>
-            <a:off x="5166359" y="2023617"/>
-            <a:ext cx="5657850" cy="3441700"/>
-            <a:chOff x="5166359" y="2023617"/>
-            <a:chExt cx="5657850" cy="3441700"/>
-          </a:xfrm>
-        </p:grpSpPr>
-        <p:sp>
-          <p:nvSpPr>
-            <p:cNvPr id="19" name="object 19"/>
-            <p:cNvSpPr/>
-            <p:nvPr/>
-          </p:nvSpPr>
-          <p:spPr>
-            <a:xfrm>
-              <a:off x="10817351" y="2029967"/>
-              <a:ext cx="0" cy="3429000"/>
-            </a:xfrm>
-            <a:custGeom>
-              <a:avLst/>
-              <a:gdLst/>
-              <a:ahLst/>
-              <a:cxnLst/>
-              <a:rect l="l" t="t" r="r" b="b"/>
-              <a:pathLst>
-                <a:path h="3429000">
-                  <a:moveTo>
-                    <a:pt x="0" y="0"/>
-                  </a:moveTo>
-                  <a:lnTo>
-                    <a:pt x="0" y="3429000"/>
-                  </a:lnTo>
-                </a:path>
-              </a:pathLst>
-            </a:custGeom>
-            <a:ln w="12700">
-              <a:solidFill>
-                <a:srgbClr val="304355"/>
-              </a:solidFill>
-            </a:ln>
-          </p:spPr>
-          <p:txBody>
-            <a:bodyPr wrap="square" lIns="0" tIns="0" rIns="0" bIns="0" rtlCol="0"/>
-            <a:lstStyle/>
-            <a:p>
-              <a:endParaRPr/>
-            </a:p>
-          </p:txBody>
-        </p:sp>
-        <p:sp>
-          <p:nvSpPr>
-            <p:cNvPr id="20" name="object 20"/>
-            <p:cNvSpPr/>
-            <p:nvPr/>
-          </p:nvSpPr>
-          <p:spPr>
-            <a:xfrm>
-              <a:off x="5166359" y="3665219"/>
-              <a:ext cx="3749040" cy="76200"/>
-            </a:xfrm>
-            <a:custGeom>
-              <a:avLst/>
-              <a:gdLst/>
-              <a:ahLst/>
-              <a:cxnLst/>
-              <a:rect l="l" t="t" r="r" b="b"/>
-              <a:pathLst>
-                <a:path w="3749040" h="76200">
-                  <a:moveTo>
-                    <a:pt x="3672840" y="0"/>
-                  </a:moveTo>
-                  <a:lnTo>
-                    <a:pt x="3672840" y="76199"/>
-                  </a:lnTo>
-                  <a:lnTo>
-                    <a:pt x="3733799" y="45719"/>
-                  </a:lnTo>
-                  <a:lnTo>
-                    <a:pt x="3685540" y="45719"/>
-                  </a:lnTo>
-                  <a:lnTo>
-                    <a:pt x="3685540" y="30479"/>
-                  </a:lnTo>
-                  <a:lnTo>
-                    <a:pt x="3733799" y="30479"/>
-                  </a:lnTo>
-                  <a:lnTo>
-                    <a:pt x="3672840" y="0"/>
-                  </a:lnTo>
-                  <a:close/>
-                </a:path>
-                <a:path w="3749040" h="76200">
-                  <a:moveTo>
-                    <a:pt x="3672840" y="30479"/>
-                  </a:moveTo>
-                  <a:lnTo>
-                    <a:pt x="0" y="30479"/>
-                  </a:lnTo>
-                  <a:lnTo>
-                    <a:pt x="0" y="45719"/>
-                  </a:lnTo>
-                  <a:lnTo>
-                    <a:pt x="3672840" y="45719"/>
-                  </a:lnTo>
-                  <a:lnTo>
-                    <a:pt x="3672840" y="30479"/>
-                  </a:lnTo>
-                  <a:close/>
-                </a:path>
-                <a:path w="3749040" h="76200">
-                  <a:moveTo>
-                    <a:pt x="3733799" y="30479"/>
-                  </a:moveTo>
-                  <a:lnTo>
-                    <a:pt x="3685540" y="30479"/>
-                  </a:lnTo>
-                  <a:lnTo>
-                    <a:pt x="3685540" y="45719"/>
-                  </a:lnTo>
-                  <a:lnTo>
-                    <a:pt x="3733799" y="45719"/>
-                  </a:lnTo>
-                  <a:lnTo>
-                    <a:pt x="3749040" y="38099"/>
-                  </a:lnTo>
-                  <a:lnTo>
-                    <a:pt x="3733799" y="30479"/>
-                  </a:lnTo>
-                  <a:close/>
-                </a:path>
-              </a:pathLst>
-            </a:custGeom>
-            <a:solidFill>
-              <a:srgbClr val="FFFFFF"/>
-            </a:solidFill>
-          </p:spPr>
-          <p:txBody>
-            <a:bodyPr wrap="square" lIns="0" tIns="0" rIns="0" bIns="0" rtlCol="0"/>
-            <a:lstStyle/>
-            <a:p>
-              <a:endParaRPr/>
-            </a:p>
-          </p:txBody>
-        </p:sp>
-      </p:grpSp>
-      <p:sp>
-        <p:nvSpPr>
-          <p:cNvPr id="21" name="object 21"/>
-          <p:cNvSpPr txBox="1"/>
-          <p:nvPr/>
-        </p:nvSpPr>
-        <p:spPr>
-          <a:xfrm>
-            <a:off x="1900554" y="2140966"/>
-            <a:ext cx="679450" cy="132080"/>
-          </a:xfrm>
-          <a:prstGeom prst="rect">
-            <a:avLst/>
-          </a:prstGeom>
-        </p:spPr>
-        <p:txBody>
-          <a:bodyPr vert="horz" wrap="square" lIns="0" tIns="12065" rIns="0" bIns="0" rtlCol="0">
-            <a:spAutoFit/>
-          </a:bodyPr>
-          <a:lstStyle/>
-          <a:p>
-            <a:pPr marL="12700">
-              <a:lnSpc>
-                <a:spcPct val="100000"/>
-              </a:lnSpc>
-              <a:spcBef>
-                <a:spcPts val="95"/>
-              </a:spcBef>
-            </a:pPr>
-            <a:r>
-              <a:rPr sz="700" spc="-20" dirty="0">
-                <a:solidFill>
-                  <a:srgbClr val="A9B5C2"/>
-                </a:solidFill>
-                <a:latin typeface="Trebuchet MS"/>
-                <a:cs typeface="Trebuchet MS"/>
-              </a:rPr>
-              <a:t>select</a:t>
-            </a:r>
-            <a:r>
-              <a:rPr sz="700" spc="-30" dirty="0">
-                <a:solidFill>
-                  <a:srgbClr val="A9B5C2"/>
-                </a:solidFill>
-                <a:latin typeface="Trebuchet MS"/>
-                <a:cs typeface="Trebuchet MS"/>
-              </a:rPr>
-              <a:t> peer</a:t>
-            </a:r>
-            <a:r>
-              <a:rPr sz="700" spc="-50" dirty="0">
-                <a:solidFill>
-                  <a:srgbClr val="A9B5C2"/>
-                </a:solidFill>
-                <a:latin typeface="Trebuchet MS"/>
-                <a:cs typeface="Trebuchet MS"/>
-              </a:rPr>
-              <a:t> </a:t>
-            </a:r>
-            <a:r>
-              <a:rPr sz="700" dirty="0">
-                <a:solidFill>
-                  <a:srgbClr val="A9B5C2"/>
-                </a:solidFill>
-                <a:latin typeface="Trebuchet MS"/>
-                <a:cs typeface="Trebuchet MS"/>
-              </a:rPr>
-              <a:t>+</a:t>
-            </a:r>
-            <a:r>
-              <a:rPr sz="700" spc="-55" dirty="0">
-                <a:solidFill>
-                  <a:srgbClr val="A9B5C2"/>
-                </a:solidFill>
-                <a:latin typeface="Trebuchet MS"/>
-                <a:cs typeface="Trebuchet MS"/>
-              </a:rPr>
-              <a:t> </a:t>
-            </a:r>
-            <a:r>
-              <a:rPr sz="700" spc="-20" dirty="0">
-                <a:solidFill>
-                  <a:srgbClr val="A9B5C2"/>
-                </a:solidFill>
-                <a:latin typeface="Trebuchet MS"/>
-                <a:cs typeface="Trebuchet MS"/>
-              </a:rPr>
-              <a:t>text</a:t>
-            </a:r>
-            <a:endParaRPr sz="700">
-              <a:latin typeface="Trebuchet MS"/>
-              <a:cs typeface="Trebuchet MS"/>
-            </a:endParaRPr>
-          </a:p>
-        </p:txBody>
-      </p:sp>
-      <p:sp>
-        <p:nvSpPr>
-          <p:cNvPr id="22" name="object 22"/>
-          <p:cNvSpPr/>
-          <p:nvPr/>
-        </p:nvSpPr>
-        <p:spPr>
-          <a:xfrm>
-            <a:off x="3200400" y="2750820"/>
-            <a:ext cx="1783080" cy="76200"/>
-          </a:xfrm>
-          <a:custGeom>
-            <a:avLst/>
-            <a:gdLst/>
-            <a:ahLst/>
-            <a:cxnLst/>
-            <a:rect l="l" t="t" r="r" b="b"/>
-            <a:pathLst>
-              <a:path w="1783079" h="76200">
-                <a:moveTo>
-                  <a:pt x="1706879" y="0"/>
-                </a:moveTo>
-                <a:lnTo>
-                  <a:pt x="1706879" y="76200"/>
-                </a:lnTo>
-                <a:lnTo>
-                  <a:pt x="1767840" y="45719"/>
-                </a:lnTo>
-                <a:lnTo>
-                  <a:pt x="1719579" y="45719"/>
-                </a:lnTo>
-                <a:lnTo>
-                  <a:pt x="1719579" y="30479"/>
-                </a:lnTo>
-                <a:lnTo>
-                  <a:pt x="1767839" y="30479"/>
-                </a:lnTo>
-                <a:lnTo>
-                  <a:pt x="1706879" y="0"/>
-                </a:lnTo>
-                <a:close/>
-              </a:path>
-              <a:path w="1783079" h="76200">
-                <a:moveTo>
-                  <a:pt x="1706879" y="30479"/>
-                </a:moveTo>
-                <a:lnTo>
-                  <a:pt x="0" y="30479"/>
-                </a:lnTo>
-                <a:lnTo>
-                  <a:pt x="0" y="45719"/>
-                </a:lnTo>
-                <a:lnTo>
-                  <a:pt x="1706879" y="45719"/>
-                </a:lnTo>
-                <a:lnTo>
-                  <a:pt x="1706879" y="30479"/>
-                </a:lnTo>
-                <a:close/>
-              </a:path>
-              <a:path w="1783079" h="76200">
-                <a:moveTo>
-                  <a:pt x="1767839" y="30479"/>
-                </a:moveTo>
-                <a:lnTo>
-                  <a:pt x="1719579" y="30479"/>
-                </a:lnTo>
-                <a:lnTo>
-                  <a:pt x="1719579" y="45719"/>
-                </a:lnTo>
-                <a:lnTo>
-                  <a:pt x="1767840" y="45719"/>
-                </a:lnTo>
-                <a:lnTo>
-                  <a:pt x="1783079" y="38100"/>
-                </a:lnTo>
-                <a:lnTo>
-                  <a:pt x="1767839" y="30479"/>
-                </a:lnTo>
-                <a:close/>
-              </a:path>
-            </a:pathLst>
-          </a:custGeom>
-          <a:solidFill>
-            <a:srgbClr val="FFFFFF"/>
-          </a:solidFill>
-        </p:spPr>
-        <p:txBody>
-          <a:bodyPr wrap="square" lIns="0" tIns="0" rIns="0" bIns="0" rtlCol="0"/>
-          <a:lstStyle/>
-          <a:p>
-            <a:endParaRPr/>
-          </a:p>
-        </p:txBody>
-      </p:sp>
-      <p:sp>
-        <p:nvSpPr>
-          <p:cNvPr id="23" name="object 23"/>
-          <p:cNvSpPr txBox="1"/>
-          <p:nvPr/>
-        </p:nvSpPr>
-        <p:spPr>
-          <a:xfrm>
-            <a:off x="3682365" y="2598547"/>
-            <a:ext cx="819150" cy="132080"/>
-          </a:xfrm>
-          <a:prstGeom prst="rect">
-            <a:avLst/>
-          </a:prstGeom>
-        </p:spPr>
-        <p:txBody>
-          <a:bodyPr vert="horz" wrap="square" lIns="0" tIns="12065" rIns="0" bIns="0" rtlCol="0">
-            <a:spAutoFit/>
-          </a:bodyPr>
-          <a:lstStyle/>
-          <a:p>
-            <a:pPr marL="12700">
-              <a:lnSpc>
-                <a:spcPct val="100000"/>
-              </a:lnSpc>
-              <a:spcBef>
-                <a:spcPts val="95"/>
-              </a:spcBef>
-            </a:pPr>
-            <a:r>
-              <a:rPr sz="700" spc="-10" dirty="0">
-                <a:solidFill>
-                  <a:srgbClr val="A9B5C2"/>
-                </a:solidFill>
-                <a:latin typeface="Trebuchet MS"/>
-                <a:cs typeface="Trebuchet MS"/>
-              </a:rPr>
-              <a:t>POST</a:t>
-            </a:r>
-            <a:r>
-              <a:rPr sz="700" spc="-25" dirty="0">
-                <a:solidFill>
-                  <a:srgbClr val="A9B5C2"/>
-                </a:solidFill>
-                <a:latin typeface="Trebuchet MS"/>
-                <a:cs typeface="Trebuchet MS"/>
-              </a:rPr>
-              <a:t> </a:t>
-            </a:r>
-            <a:r>
-              <a:rPr sz="700" spc="-10" dirty="0">
-                <a:solidFill>
-                  <a:srgbClr val="A9B5C2"/>
-                </a:solidFill>
-                <a:latin typeface="Trebuchet MS"/>
-                <a:cs typeface="Trebuchet MS"/>
-              </a:rPr>
-              <a:t>/api/messages</a:t>
-            </a:r>
-            <a:endParaRPr sz="700">
-              <a:latin typeface="Trebuchet MS"/>
-              <a:cs typeface="Trebuchet MS"/>
-            </a:endParaRPr>
-          </a:p>
-        </p:txBody>
-      </p:sp>
-      <p:sp>
-        <p:nvSpPr>
-          <p:cNvPr id="24" name="object 24"/>
-          <p:cNvSpPr/>
-          <p:nvPr/>
-        </p:nvSpPr>
-        <p:spPr>
-          <a:xfrm>
-            <a:off x="5166359" y="3208020"/>
-            <a:ext cx="1783080" cy="76200"/>
-          </a:xfrm>
-          <a:custGeom>
-            <a:avLst/>
-            <a:gdLst/>
-            <a:ahLst/>
-            <a:cxnLst/>
-            <a:rect l="l" t="t" r="r" b="b"/>
-            <a:pathLst>
-              <a:path w="1783079" h="76200">
-                <a:moveTo>
-                  <a:pt x="1706880" y="0"/>
-                </a:moveTo>
-                <a:lnTo>
-                  <a:pt x="1706880" y="76200"/>
-                </a:lnTo>
-                <a:lnTo>
-                  <a:pt x="1767840" y="45719"/>
-                </a:lnTo>
-                <a:lnTo>
-                  <a:pt x="1719580" y="45719"/>
-                </a:lnTo>
-                <a:lnTo>
-                  <a:pt x="1719580" y="30479"/>
-                </a:lnTo>
-                <a:lnTo>
-                  <a:pt x="1767839" y="30479"/>
-                </a:lnTo>
-                <a:lnTo>
-                  <a:pt x="1706880" y="0"/>
-                </a:lnTo>
-                <a:close/>
-              </a:path>
-              <a:path w="1783079" h="76200">
-                <a:moveTo>
-                  <a:pt x="1706880" y="30479"/>
-                </a:moveTo>
-                <a:lnTo>
-                  <a:pt x="0" y="30479"/>
-                </a:lnTo>
-                <a:lnTo>
-                  <a:pt x="0" y="45719"/>
-                </a:lnTo>
-                <a:lnTo>
-                  <a:pt x="1706880" y="45719"/>
-                </a:lnTo>
-                <a:lnTo>
-                  <a:pt x="1706880" y="30479"/>
-                </a:lnTo>
-                <a:close/>
-              </a:path>
-              <a:path w="1783079" h="76200">
-                <a:moveTo>
-                  <a:pt x="1767839" y="30479"/>
-                </a:moveTo>
-                <a:lnTo>
-                  <a:pt x="1719580" y="30479"/>
-                </a:lnTo>
-                <a:lnTo>
-                  <a:pt x="1719580" y="45719"/>
-                </a:lnTo>
-                <a:lnTo>
-                  <a:pt x="1767840" y="45719"/>
-                </a:lnTo>
-                <a:lnTo>
-                  <a:pt x="1783080" y="38100"/>
-                </a:lnTo>
-                <a:lnTo>
-                  <a:pt x="1767839" y="30479"/>
-                </a:lnTo>
-                <a:close/>
-              </a:path>
-            </a:pathLst>
-          </a:custGeom>
-          <a:solidFill>
-            <a:srgbClr val="FFFFFF"/>
-          </a:solidFill>
-        </p:spPr>
-        <p:txBody>
-          <a:bodyPr wrap="square" lIns="0" tIns="0" rIns="0" bIns="0" rtlCol="0"/>
-          <a:lstStyle/>
-          <a:p>
-            <a:endParaRPr/>
-          </a:p>
-        </p:txBody>
-      </p:sp>
-      <p:sp>
-        <p:nvSpPr>
-          <p:cNvPr id="25" name="object 25"/>
-          <p:cNvSpPr txBox="1"/>
-          <p:nvPr/>
-        </p:nvSpPr>
-        <p:spPr>
-          <a:xfrm>
-            <a:off x="5704713" y="3055747"/>
-            <a:ext cx="708660" cy="132080"/>
-          </a:xfrm>
-          <a:prstGeom prst="rect">
-            <a:avLst/>
-          </a:prstGeom>
-        </p:spPr>
-        <p:txBody>
-          <a:bodyPr vert="horz" wrap="square" lIns="0" tIns="12065" rIns="0" bIns="0" rtlCol="0">
-            <a:spAutoFit/>
-          </a:bodyPr>
-          <a:lstStyle/>
-          <a:p>
-            <a:pPr marL="12700">
-              <a:lnSpc>
-                <a:spcPct val="100000"/>
-              </a:lnSpc>
-              <a:spcBef>
-                <a:spcPts val="95"/>
-              </a:spcBef>
-            </a:pPr>
-            <a:r>
-              <a:rPr sz="700" spc="-30" dirty="0">
-                <a:solidFill>
-                  <a:srgbClr val="A9B5C2"/>
-                </a:solidFill>
-                <a:latin typeface="Trebuchet MS"/>
-                <a:cs typeface="Trebuchet MS"/>
-              </a:rPr>
-              <a:t>encrypt</a:t>
-            </a:r>
-            <a:r>
-              <a:rPr sz="700" spc="10" dirty="0">
-                <a:solidFill>
-                  <a:srgbClr val="A9B5C2"/>
-                </a:solidFill>
-                <a:latin typeface="Trebuchet MS"/>
-                <a:cs typeface="Trebuchet MS"/>
-              </a:rPr>
-              <a:t> </a:t>
-            </a:r>
-            <a:r>
-              <a:rPr sz="700" dirty="0">
-                <a:solidFill>
-                  <a:srgbClr val="A9B5C2"/>
-                </a:solidFill>
-                <a:latin typeface="Trebuchet MS"/>
-                <a:cs typeface="Trebuchet MS"/>
-              </a:rPr>
-              <a:t>AES-</a:t>
-            </a:r>
-            <a:r>
-              <a:rPr sz="700" spc="-25" dirty="0">
-                <a:solidFill>
-                  <a:srgbClr val="A9B5C2"/>
-                </a:solidFill>
-                <a:latin typeface="Trebuchet MS"/>
-                <a:cs typeface="Trebuchet MS"/>
-              </a:rPr>
-              <a:t>GCM</a:t>
-            </a:r>
-            <a:endParaRPr sz="700">
-              <a:latin typeface="Trebuchet MS"/>
-              <a:cs typeface="Trebuchet MS"/>
-            </a:endParaRPr>
-          </a:p>
-        </p:txBody>
-      </p:sp>
-      <p:sp>
-        <p:nvSpPr>
-          <p:cNvPr id="26" name="object 26"/>
-          <p:cNvSpPr txBox="1"/>
-          <p:nvPr/>
-        </p:nvSpPr>
-        <p:spPr>
-          <a:xfrm>
-            <a:off x="6747764" y="3512947"/>
-            <a:ext cx="586105" cy="132080"/>
-          </a:xfrm>
-          <a:prstGeom prst="rect">
-            <a:avLst/>
-          </a:prstGeom>
-        </p:spPr>
-        <p:txBody>
-          <a:bodyPr vert="horz" wrap="square" lIns="0" tIns="12065" rIns="0" bIns="0" rtlCol="0">
-            <a:spAutoFit/>
-          </a:bodyPr>
-          <a:lstStyle/>
-          <a:p>
-            <a:pPr marL="12700">
-              <a:lnSpc>
-                <a:spcPct val="100000"/>
-              </a:lnSpc>
-              <a:spcBef>
-                <a:spcPts val="95"/>
-              </a:spcBef>
-            </a:pPr>
-            <a:r>
-              <a:rPr sz="700" spc="-10" dirty="0">
-                <a:solidFill>
-                  <a:srgbClr val="A9B5C2"/>
-                </a:solidFill>
-                <a:latin typeface="Trebuchet MS"/>
-                <a:cs typeface="Trebuchet MS"/>
-              </a:rPr>
-              <a:t>save</a:t>
-            </a:r>
-            <a:r>
-              <a:rPr sz="700" spc="-30" dirty="0">
-                <a:solidFill>
-                  <a:srgbClr val="A9B5C2"/>
-                </a:solidFill>
-                <a:latin typeface="Trebuchet MS"/>
-                <a:cs typeface="Trebuchet MS"/>
-              </a:rPr>
-              <a:t> </a:t>
-            </a:r>
-            <a:r>
-              <a:rPr sz="700" spc="-10" dirty="0">
-                <a:solidFill>
-                  <a:srgbClr val="A9B5C2"/>
-                </a:solidFill>
-                <a:latin typeface="Trebuchet MS"/>
-                <a:cs typeface="Trebuchet MS"/>
-              </a:rPr>
-              <a:t>container</a:t>
-            </a:r>
-            <a:endParaRPr sz="700">
-              <a:latin typeface="Trebuchet MS"/>
-              <a:cs typeface="Trebuchet MS"/>
-            </a:endParaRPr>
-          </a:p>
-        </p:txBody>
-      </p:sp>
-      <p:sp>
-        <p:nvSpPr>
-          <p:cNvPr id="27" name="object 27"/>
-          <p:cNvSpPr/>
-          <p:nvPr/>
-        </p:nvSpPr>
-        <p:spPr>
-          <a:xfrm>
-            <a:off x="5166359" y="4122420"/>
-            <a:ext cx="5532120" cy="76200"/>
-          </a:xfrm>
-          <a:custGeom>
-            <a:avLst/>
-            <a:gdLst/>
-            <a:ahLst/>
-            <a:cxnLst/>
-            <a:rect l="l" t="t" r="r" b="b"/>
-            <a:pathLst>
-              <a:path w="5532120" h="76200">
-                <a:moveTo>
-                  <a:pt x="5455920" y="0"/>
-                </a:moveTo>
-                <a:lnTo>
-                  <a:pt x="5455920" y="76199"/>
-                </a:lnTo>
-                <a:lnTo>
-                  <a:pt x="5516880" y="45719"/>
-                </a:lnTo>
-                <a:lnTo>
-                  <a:pt x="5468620" y="45719"/>
-                </a:lnTo>
-                <a:lnTo>
-                  <a:pt x="5468620" y="30479"/>
-                </a:lnTo>
-                <a:lnTo>
-                  <a:pt x="5516880" y="30479"/>
-                </a:lnTo>
-                <a:lnTo>
-                  <a:pt x="5455920" y="0"/>
-                </a:lnTo>
-                <a:close/>
-              </a:path>
-              <a:path w="5532120" h="76200">
-                <a:moveTo>
-                  <a:pt x="5455920" y="30479"/>
-                </a:moveTo>
-                <a:lnTo>
-                  <a:pt x="0" y="30479"/>
-                </a:lnTo>
-                <a:lnTo>
-                  <a:pt x="0" y="45719"/>
-                </a:lnTo>
-                <a:lnTo>
-                  <a:pt x="5455920" y="45719"/>
-                </a:lnTo>
-                <a:lnTo>
-                  <a:pt x="5455920" y="30479"/>
-                </a:lnTo>
-                <a:close/>
-              </a:path>
-              <a:path w="5532120" h="76200">
-                <a:moveTo>
-                  <a:pt x="5516880" y="30479"/>
-                </a:moveTo>
-                <a:lnTo>
-                  <a:pt x="5468620" y="30479"/>
-                </a:lnTo>
-                <a:lnTo>
-                  <a:pt x="5468620" y="45719"/>
-                </a:lnTo>
-                <a:lnTo>
-                  <a:pt x="5516880" y="45719"/>
-                </a:lnTo>
-                <a:lnTo>
-                  <a:pt x="5532120" y="38099"/>
-                </a:lnTo>
-                <a:lnTo>
-                  <a:pt x="5516880" y="30479"/>
-                </a:lnTo>
-                <a:close/>
-              </a:path>
-            </a:pathLst>
-          </a:custGeom>
-          <a:solidFill>
-            <a:srgbClr val="FFFFFF"/>
-          </a:solidFill>
-        </p:spPr>
-        <p:txBody>
-          <a:bodyPr wrap="square" lIns="0" tIns="0" rIns="0" bIns="0" rtlCol="0"/>
-          <a:lstStyle/>
-          <a:p>
-            <a:endParaRPr/>
-          </a:p>
-        </p:txBody>
-      </p:sp>
-      <p:sp>
-        <p:nvSpPr>
-          <p:cNvPr id="28" name="object 28"/>
-          <p:cNvSpPr txBox="1"/>
-          <p:nvPr/>
-        </p:nvSpPr>
-        <p:spPr>
-          <a:xfrm>
-            <a:off x="7672196" y="3970401"/>
-            <a:ext cx="522605" cy="132080"/>
-          </a:xfrm>
-          <a:prstGeom prst="rect">
-            <a:avLst/>
-          </a:prstGeom>
-        </p:spPr>
-        <p:txBody>
-          <a:bodyPr vert="horz" wrap="square" lIns="0" tIns="12065" rIns="0" bIns="0" rtlCol="0">
-            <a:spAutoFit/>
-          </a:bodyPr>
-          <a:lstStyle/>
-          <a:p>
-            <a:pPr marL="12700">
-              <a:lnSpc>
-                <a:spcPct val="100000"/>
-              </a:lnSpc>
-              <a:spcBef>
-                <a:spcPts val="95"/>
-              </a:spcBef>
-            </a:pPr>
-            <a:r>
-              <a:rPr sz="700" spc="-10" dirty="0">
-                <a:solidFill>
-                  <a:srgbClr val="A9B5C2"/>
-                </a:solidFill>
-                <a:latin typeface="Trebuchet MS"/>
-                <a:cs typeface="Trebuchet MS"/>
-              </a:rPr>
-              <a:t>publish</a:t>
-            </a:r>
-            <a:r>
-              <a:rPr sz="700" spc="-60" dirty="0">
-                <a:solidFill>
-                  <a:srgbClr val="A9B5C2"/>
-                </a:solidFill>
-                <a:latin typeface="Trebuchet MS"/>
-                <a:cs typeface="Trebuchet MS"/>
-              </a:rPr>
-              <a:t> </a:t>
-            </a:r>
-            <a:r>
-              <a:rPr sz="700" spc="-10" dirty="0">
-                <a:solidFill>
-                  <a:srgbClr val="A9B5C2"/>
-                </a:solidFill>
-                <a:latin typeface="Trebuchet MS"/>
-                <a:cs typeface="Trebuchet MS"/>
-              </a:rPr>
-              <a:t>topic</a:t>
-            </a:r>
-            <a:endParaRPr sz="700">
-              <a:latin typeface="Trebuchet MS"/>
-              <a:cs typeface="Trebuchet MS"/>
-            </a:endParaRPr>
-          </a:p>
-        </p:txBody>
-      </p:sp>
-      <p:sp>
-        <p:nvSpPr>
-          <p:cNvPr id="29" name="object 29"/>
-          <p:cNvSpPr/>
-          <p:nvPr/>
-        </p:nvSpPr>
-        <p:spPr>
-          <a:xfrm>
-            <a:off x="3017520" y="4579620"/>
-            <a:ext cx="7863840" cy="76200"/>
-          </a:xfrm>
-          <a:custGeom>
-            <a:avLst/>
-            <a:gdLst/>
-            <a:ahLst/>
-            <a:cxnLst/>
-            <a:rect l="l" t="t" r="r" b="b"/>
-            <a:pathLst>
-              <a:path w="7863840" h="76200">
-                <a:moveTo>
-                  <a:pt x="76200" y="0"/>
-                </a:moveTo>
-                <a:lnTo>
-                  <a:pt x="0" y="38099"/>
-                </a:lnTo>
-                <a:lnTo>
-                  <a:pt x="76200" y="76199"/>
-                </a:lnTo>
-                <a:lnTo>
-                  <a:pt x="76200" y="45719"/>
-                </a:lnTo>
-                <a:lnTo>
-                  <a:pt x="63500" y="45719"/>
-                </a:lnTo>
-                <a:lnTo>
-                  <a:pt x="63500" y="30479"/>
-                </a:lnTo>
-                <a:lnTo>
-                  <a:pt x="76200" y="30479"/>
-                </a:lnTo>
-                <a:lnTo>
-                  <a:pt x="76200" y="0"/>
-                </a:lnTo>
-                <a:close/>
-              </a:path>
-              <a:path w="7863840" h="76200">
-                <a:moveTo>
-                  <a:pt x="76200" y="30479"/>
-                </a:moveTo>
-                <a:lnTo>
-                  <a:pt x="63500" y="30479"/>
-                </a:lnTo>
-                <a:lnTo>
-                  <a:pt x="63500" y="45719"/>
-                </a:lnTo>
-                <a:lnTo>
-                  <a:pt x="76200" y="45719"/>
-                </a:lnTo>
-                <a:lnTo>
-                  <a:pt x="76200" y="30479"/>
-                </a:lnTo>
-                <a:close/>
-              </a:path>
-              <a:path w="7863840" h="76200">
-                <a:moveTo>
-                  <a:pt x="7863839" y="30479"/>
-                </a:moveTo>
-                <a:lnTo>
-                  <a:pt x="76200" y="30479"/>
-                </a:lnTo>
-                <a:lnTo>
-                  <a:pt x="76200" y="45719"/>
-                </a:lnTo>
-                <a:lnTo>
-                  <a:pt x="7863839" y="45719"/>
-                </a:lnTo>
-                <a:lnTo>
-                  <a:pt x="7863839" y="30479"/>
-                </a:lnTo>
-                <a:close/>
-              </a:path>
-            </a:pathLst>
-          </a:custGeom>
-          <a:solidFill>
-            <a:srgbClr val="FFFFFF"/>
-          </a:solidFill>
-        </p:spPr>
-        <p:txBody>
-          <a:bodyPr wrap="square" lIns="0" tIns="0" rIns="0" bIns="0" rtlCol="0"/>
-          <a:lstStyle/>
-          <a:p>
-            <a:endParaRPr/>
-          </a:p>
-        </p:txBody>
-      </p:sp>
-      <p:sp>
-        <p:nvSpPr>
-          <p:cNvPr id="30" name="object 30"/>
-          <p:cNvSpPr txBox="1"/>
-          <p:nvPr/>
-        </p:nvSpPr>
-        <p:spPr>
-          <a:xfrm>
-            <a:off x="6666992" y="4427601"/>
-            <a:ext cx="565785" cy="132080"/>
-          </a:xfrm>
-          <a:prstGeom prst="rect">
-            <a:avLst/>
-          </a:prstGeom>
-        </p:spPr>
-        <p:txBody>
-          <a:bodyPr vert="horz" wrap="square" lIns="0" tIns="12065" rIns="0" bIns="0" rtlCol="0">
-            <a:spAutoFit/>
-          </a:bodyPr>
-          <a:lstStyle/>
-          <a:p>
-            <a:pPr marL="12700">
-              <a:lnSpc>
-                <a:spcPct val="100000"/>
-              </a:lnSpc>
-              <a:spcBef>
-                <a:spcPts val="95"/>
-              </a:spcBef>
-            </a:pPr>
-            <a:r>
-              <a:rPr sz="700" spc="-10" dirty="0">
-                <a:solidFill>
-                  <a:srgbClr val="A9B5C2"/>
-                </a:solidFill>
-                <a:latin typeface="Trebuchet MS"/>
-                <a:cs typeface="Trebuchet MS"/>
-              </a:rPr>
-              <a:t>status</a:t>
-            </a:r>
-            <a:r>
-              <a:rPr sz="700" spc="-45" dirty="0">
-                <a:solidFill>
-                  <a:srgbClr val="A9B5C2"/>
-                </a:solidFill>
-                <a:latin typeface="Trebuchet MS"/>
-                <a:cs typeface="Trebuchet MS"/>
-              </a:rPr>
-              <a:t> </a:t>
-            </a:r>
-            <a:r>
-              <a:rPr sz="700" dirty="0">
-                <a:solidFill>
-                  <a:srgbClr val="A9B5C2"/>
-                </a:solidFill>
-                <a:latin typeface="Trebuchet MS"/>
-                <a:cs typeface="Trebuchet MS"/>
-              </a:rPr>
-              <a:t>+</a:t>
-            </a:r>
-            <a:r>
-              <a:rPr sz="700" spc="-50" dirty="0">
-                <a:solidFill>
-                  <a:srgbClr val="A9B5C2"/>
-                </a:solidFill>
-                <a:latin typeface="Trebuchet MS"/>
-                <a:cs typeface="Trebuchet MS"/>
-              </a:rPr>
-              <a:t> </a:t>
-            </a:r>
-            <a:r>
-              <a:rPr sz="700" spc="-10" dirty="0">
-                <a:solidFill>
-                  <a:srgbClr val="A9B5C2"/>
-                </a:solidFill>
-                <a:latin typeface="Trebuchet MS"/>
-                <a:cs typeface="Trebuchet MS"/>
-              </a:rPr>
-              <a:t>offset</a:t>
-            </a:r>
-            <a:endParaRPr sz="700">
-              <a:latin typeface="Trebuchet MS"/>
-              <a:cs typeface="Trebuchet MS"/>
-            </a:endParaRPr>
-          </a:p>
-        </p:txBody>
-      </p:sp>
-      <p:sp>
-        <p:nvSpPr>
-          <p:cNvPr id="31" name="object 31"/>
-          <p:cNvSpPr txBox="1"/>
-          <p:nvPr/>
-        </p:nvSpPr>
-        <p:spPr>
-          <a:xfrm>
-            <a:off x="11421871" y="6408012"/>
-            <a:ext cx="160020" cy="158377"/>
-          </a:xfrm>
-          <a:prstGeom prst="rect">
-            <a:avLst/>
-          </a:prstGeom>
-        </p:spPr>
-        <p:txBody>
-          <a:bodyPr vert="horz" wrap="square" lIns="0" tIns="4445" rIns="0" bIns="0" rtlCol="0">
-            <a:spAutoFit/>
-          </a:bodyPr>
-          <a:lstStyle/>
-          <a:p>
-            <a:pPr marL="12700">
-              <a:lnSpc>
-                <a:spcPct val="100000"/>
-              </a:lnSpc>
-              <a:spcBef>
-                <a:spcPts val="35"/>
-              </a:spcBef>
-            </a:pPr>
-            <a:r>
-              <a:rPr sz="1000" spc="-25" dirty="0" smtClean="0">
-                <a:solidFill>
-                  <a:srgbClr val="A9B5C2"/>
-                </a:solidFill>
-                <a:latin typeface="Trebuchet MS"/>
-                <a:cs typeface="Trebuchet MS"/>
-              </a:rPr>
-              <a:t>0</a:t>
-            </a:r>
-            <a:r>
-              <a:rPr lang="ru-RU" sz="1000" spc="-25" dirty="0" smtClean="0">
-                <a:solidFill>
-                  <a:srgbClr val="A9B5C2"/>
-                </a:solidFill>
-                <a:latin typeface="Trebuchet MS"/>
-                <a:cs typeface="Trebuchet MS"/>
-              </a:rPr>
-              <a:t>6</a:t>
-            </a:r>
-            <a:endParaRPr sz="1000" dirty="0">
-              <a:latin typeface="Trebuchet MS"/>
-              <a:cs typeface="Trebuchet MS"/>
-            </a:endParaRPr>
-          </a:p>
-        </p:txBody>
-      </p:sp>
+      </p:pic>
     </p:spTree>
   </p:cSld>
   <p:clrMapOvr>
@@ -28500,7 +24303,7 @@
       </p:grpSpPr>
       <p:pic>
         <p:nvPicPr>
-          <p:cNvPr id="5" name="Рисунок 4"/>
+          <p:cNvPr id="2" name="Рисунок 1"/>
           <p:cNvPicPr>
             <a:picLocks noChangeAspect="1"/>
           </p:cNvPicPr>
